--- a/output/wordlabs-grace-3day.pptx
+++ b/output/wordlabs-grace-3day.pptx
@@ -4240,7 +4240,7 @@
                 <a:ea typeface="Calibri" pitchFamily="34" charset="-122"/>
                 <a:cs typeface="Calibri" pitchFamily="34" charset="-120"/>
               </a:rPr>
-              <a:t>"elegance, beauty, divine favour"</a:t>
+              <a:t>"elegance, favour, goodwill"</a:t>
             </a:r>
             <a:endParaRPr lang="en-US" sz="2200" dirty="0"/>
           </a:p>
@@ -5288,7 +5288,7 @@
                 <a:ea typeface="Calibri" pitchFamily="34" charset="-122"/>
                 <a:cs typeface="Calibri" pitchFamily="34" charset="-120"/>
               </a:rPr>
-              <a:t>Word Labs  •  wordlabs.app  •  Root: 'grace' = elegance, beauty, divine favour</a:t>
+              <a:t>Word Labs  •  wordlabs.app  •  Root: 'grace' = elegance, favour, goodwill</a:t>
             </a:r>
             <a:endParaRPr lang="en-US" sz="800" dirty="0"/>
           </a:p>
@@ -5928,7 +5928,7 @@
                 <a:ea typeface="Calibri" pitchFamily="34" charset="-122"/>
                 <a:cs typeface="Calibri" pitchFamily="34" charset="-120"/>
               </a:rPr>
-              <a:t>Word Labs  •  wordlabs.app  •  Root: 'grace' = elegance, beauty, divine favour</a:t>
+              <a:t>Word Labs  •  wordlabs.app  •  Root: 'grace' = elegance, favour, goodwill</a:t>
             </a:r>
             <a:endParaRPr lang="en-US" sz="800" dirty="0"/>
           </a:p>
@@ -6071,7 +6071,7 @@
                 <a:ea typeface="Calibri" pitchFamily="34" charset="-122"/>
                 <a:cs typeface="Calibri" pitchFamily="34" charset="-120"/>
               </a:rPr>
-              <a:t> swan glided across the lake, but the duckling felt </a:t>
+              <a:t> skater bowed, but it would be a </a:t>
             </a:r>
             <a:pPr algn="l" indent="0" marL="0">
               <a:buNone/>
@@ -6088,7 +6088,7 @@
                 <a:ea typeface="Calibri" pitchFamily="34" charset="-122"/>
                 <a:cs typeface="Calibri" pitchFamily="34" charset="-120"/>
               </a:rPr>
-              <a:t>ungraceful</a:t>
+              <a:t>disgrace</a:t>
             </a:r>
             <a:pPr algn="l" indent="0" marL="0">
               <a:buNone/>
@@ -6102,7 +6102,7 @@
                 <a:ea typeface="Calibri" pitchFamily="34" charset="-122"/>
                 <a:cs typeface="Calibri" pitchFamily="34" charset="-120"/>
               </a:rPr>
-              <a:t> as it splashed about.</a:t>
+              <a:t> to leave without thanking the crowd.</a:t>
             </a:r>
             <a:endParaRPr lang="en-US" sz="1800" dirty="0"/>
           </a:p>
@@ -6385,7 +6385,7 @@
                 <a:ea typeface="Trebuchet MS" pitchFamily="34" charset="-122"/>
                 <a:cs typeface="Trebuchet MS" pitchFamily="34" charset="-120"/>
               </a:rPr>
-              <a:t>ungraceful</a:t>
+              <a:t>disgrace</a:t>
             </a:r>
             <a:endParaRPr lang="en-US" sz="1400" dirty="0"/>
           </a:p>
@@ -6716,7 +6716,7 @@
                 <a:ea typeface="Calibri" pitchFamily="34" charset="-122"/>
                 <a:cs typeface="Calibri" pitchFamily="34" charset="-120"/>
               </a:rPr>
-              <a:t>Word Labs  •  wordlabs.app  •  Root: 'grace' = elegance, beauty, divine favour</a:t>
+              <a:t>Word Labs  •  wordlabs.app  •  Root: 'grace' = elegance, favour, goodwill</a:t>
             </a:r>
             <a:endParaRPr lang="en-US" sz="800" dirty="0"/>
           </a:p>
@@ -7543,7 +7543,7 @@
                 <a:ea typeface="Calibri" pitchFamily="34" charset="-122"/>
                 <a:cs typeface="Calibri" pitchFamily="34" charset="-120"/>
               </a:rPr>
-              <a:t>Word Labs  •  wordlabs.app  •  Root: 'grace' = elegance, beauty, divine favour</a:t>
+              <a:t>Word Labs  •  wordlabs.app  •  Root: 'grace' = elegance, favour, goodwill</a:t>
             </a:r>
             <a:endParaRPr lang="en-US" sz="800" dirty="0"/>
           </a:p>
@@ -7860,7 +7860,7 @@
                 <a:ea typeface="Calibri" pitchFamily="34" charset="-122"/>
                 <a:cs typeface="Calibri" pitchFamily="34" charset="-120"/>
               </a:rPr>
-              <a:t>elegance, beauty</a:t>
+              <a:t>elegance, beauty, favour</a:t>
             </a:r>
             <a:endParaRPr lang="en-US" sz="850" dirty="0"/>
           </a:p>
@@ -7972,7 +7972,7 @@
                 <a:ea typeface="Calibri" pitchFamily="34" charset="-122"/>
                 <a:cs typeface="Calibri" pitchFamily="34" charset="-120"/>
               </a:rPr>
-              <a:t>full of</a:t>
+              <a:t>full of, having the quality of</a:t>
             </a:r>
             <a:endParaRPr lang="en-US" sz="850" dirty="0"/>
           </a:p>
@@ -8528,7 +8528,7 @@
                 <a:ea typeface="Calibri" pitchFamily="34" charset="-122"/>
                 <a:cs typeface="Calibri" pitchFamily="34" charset="-120"/>
               </a:rPr>
-              <a:t>Word Labs  •  wordlabs.app  •  Root: 'grace' = elegance, beauty, divine favour</a:t>
+              <a:t>Word Labs  •  wordlabs.app  •  Root: 'grace' = elegance, favour, goodwill</a:t>
             </a:r>
             <a:endParaRPr lang="en-US" sz="800" dirty="0"/>
           </a:p>
@@ -8845,7 +8845,7 @@
                 <a:ea typeface="Calibri" pitchFamily="34" charset="-122"/>
                 <a:cs typeface="Calibri" pitchFamily="34" charset="-120"/>
               </a:rPr>
-              <a:t>elegance, beauty</a:t>
+              <a:t>elegance, beauty, favour</a:t>
             </a:r>
             <a:endParaRPr lang="en-US" sz="850" dirty="0"/>
           </a:p>
@@ -8957,7 +8957,7 @@
                 <a:ea typeface="Calibri" pitchFamily="34" charset="-122"/>
                 <a:cs typeface="Calibri" pitchFamily="34" charset="-120"/>
               </a:rPr>
-              <a:t>full of</a:t>
+              <a:t>full of, having the quality of</a:t>
             </a:r>
             <a:endParaRPr lang="en-US" sz="850" dirty="0"/>
           </a:p>
@@ -9645,7 +9645,7 @@
                 <a:ea typeface="Calibri" pitchFamily="34" charset="-122"/>
                 <a:cs typeface="Calibri" pitchFamily="34" charset="-120"/>
               </a:rPr>
-              <a:t>Word Labs  •  wordlabs.app  •  Root: 'grace' = elegance, beauty, divine favour</a:t>
+              <a:t>Word Labs  •  wordlabs.app  •  Root: 'grace' = elegance, favour, goodwill</a:t>
             </a:r>
             <a:endParaRPr lang="en-US" sz="800" dirty="0"/>
           </a:p>
@@ -9962,7 +9962,7 @@
                 <a:ea typeface="Calibri" pitchFamily="34" charset="-122"/>
                 <a:cs typeface="Calibri" pitchFamily="34" charset="-120"/>
               </a:rPr>
-              <a:t>elegance, beauty</a:t>
+              <a:t>elegance, beauty, favour</a:t>
             </a:r>
             <a:endParaRPr lang="en-US" sz="850" dirty="0"/>
           </a:p>
@@ -10074,7 +10074,7 @@
                 <a:ea typeface="Calibri" pitchFamily="34" charset="-122"/>
                 <a:cs typeface="Calibri" pitchFamily="34" charset="-120"/>
               </a:rPr>
-              <a:t>full of</a:t>
+              <a:t>full of, having the quality of</a:t>
             </a:r>
             <a:endParaRPr lang="en-US" sz="850" dirty="0"/>
           </a:p>
@@ -11158,7 +11158,7 @@
                 <a:ea typeface="Calibri" pitchFamily="34" charset="-122"/>
                 <a:cs typeface="Calibri" pitchFamily="34" charset="-120"/>
               </a:rPr>
-              <a:t>Word Labs  •  wordlabs.app  •  Root: 'grace' = elegance, beauty, divine favour</a:t>
+              <a:t>Word Labs  •  wordlabs.app  •  Root: 'grace' = elegance, favour, goodwill</a:t>
             </a:r>
             <a:endParaRPr lang="en-US" sz="800" dirty="0"/>
           </a:p>
@@ -11297,7 +11297,7 @@
                 <a:ea typeface="Trebuchet MS" pitchFamily="34" charset="-122"/>
                 <a:cs typeface="Trebuchet MS" pitchFamily="34" charset="-120"/>
               </a:rPr>
-              <a:t>ungraceful</a:t>
+              <a:t>disgrace</a:t>
             </a:r>
             <a:endParaRPr lang="en-US" sz="2800" dirty="0"/>
           </a:p>
@@ -11985,7 +11985,7 @@
                 <a:ea typeface="Calibri" pitchFamily="34" charset="-122"/>
                 <a:cs typeface="Calibri" pitchFamily="34" charset="-120"/>
               </a:rPr>
-              <a:t>Word Labs  •  wordlabs.app  •  Root: 'grace' = elegance, beauty, divine favour</a:t>
+              <a:t>Word Labs  •  wordlabs.app  •  Root: 'grace' = elegance, favour, goodwill</a:t>
             </a:r>
             <a:endParaRPr lang="en-US" sz="800" dirty="0"/>
           </a:p>
@@ -12124,7 +12124,7 @@
                 <a:ea typeface="Trebuchet MS" pitchFamily="34" charset="-122"/>
                 <a:cs typeface="Trebuchet MS" pitchFamily="34" charset="-120"/>
               </a:rPr>
-              <a:t>ungraceful</a:t>
+              <a:t>disgrace</a:t>
             </a:r>
             <a:endParaRPr lang="en-US" sz="2800" dirty="0"/>
           </a:p>
@@ -12204,7 +12204,7 @@
         </p:nvSpPr>
         <p:spPr>
           <a:xfrm>
-            <a:off x="2221992" y="2258568"/>
+            <a:off x="2938272" y="2258568"/>
             <a:ext cx="1828800" cy="292608"/>
           </a:xfrm>
           <a:prstGeom prst="rect">
@@ -12238,7 +12238,7 @@
         </p:nvSpPr>
         <p:spPr>
           <a:xfrm>
-            <a:off x="2221992" y="2258568"/>
+            <a:off x="2938272" y="2258568"/>
             <a:ext cx="1828800" cy="292608"/>
           </a:xfrm>
           <a:prstGeom prst="rect">
@@ -12263,7 +12263,7 @@
                 <a:ea typeface="Trebuchet MS" pitchFamily="34" charset="-122"/>
                 <a:cs typeface="Trebuchet MS" pitchFamily="34" charset="-120"/>
               </a:rPr>
-              <a:t>un</a:t>
+              <a:t>dis</a:t>
             </a:r>
             <a:endParaRPr lang="en-US" sz="1300" dirty="0"/>
           </a:p>
@@ -12277,7 +12277,7 @@
         </p:nvSpPr>
         <p:spPr>
           <a:xfrm>
-            <a:off x="2221992" y="2569464"/>
+            <a:off x="2938272" y="2569464"/>
             <a:ext cx="1828800" cy="201168"/>
           </a:xfrm>
           <a:prstGeom prst="rect">
@@ -12302,7 +12302,7 @@
                 <a:ea typeface="Calibri" pitchFamily="34" charset="-122"/>
                 <a:cs typeface="Calibri" pitchFamily="34" charset="-120"/>
               </a:rPr>
-              <a:t>not</a:t>
+              <a:t>not, opposite of, away</a:t>
             </a:r>
             <a:endParaRPr lang="en-US" sz="850" dirty="0"/>
           </a:p>
@@ -12316,7 +12316,7 @@
         </p:nvSpPr>
         <p:spPr>
           <a:xfrm>
-            <a:off x="4370832" y="2258568"/>
+            <a:off x="5803392" y="2258568"/>
             <a:ext cx="1828800" cy="292608"/>
           </a:xfrm>
           <a:prstGeom prst="rect">
@@ -12350,7 +12350,7 @@
         </p:nvSpPr>
         <p:spPr>
           <a:xfrm>
-            <a:off x="4370832" y="2258568"/>
+            <a:off x="5803392" y="2258568"/>
             <a:ext cx="1828800" cy="292608"/>
           </a:xfrm>
           <a:prstGeom prst="rect">
@@ -12389,7 +12389,7 @@
         </p:nvSpPr>
         <p:spPr>
           <a:xfrm>
-            <a:off x="4370832" y="2569464"/>
+            <a:off x="5803392" y="2569464"/>
             <a:ext cx="1828800" cy="201168"/>
           </a:xfrm>
           <a:prstGeom prst="rect">
@@ -12414,7 +12414,7 @@
                 <a:ea typeface="Calibri" pitchFamily="34" charset="-122"/>
                 <a:cs typeface="Calibri" pitchFamily="34" charset="-120"/>
               </a:rPr>
-              <a:t>elegance, beauty</a:t>
+              <a:t>elegance, beauty, favour</a:t>
             </a:r>
             <a:endParaRPr lang="en-US" sz="850" dirty="0"/>
           </a:p>
@@ -12428,30 +12428,23 @@
         </p:nvSpPr>
         <p:spPr>
           <a:xfrm>
-            <a:off x="6519672" y="2258568"/>
-            <a:ext cx="1828800" cy="292608"/>
+            <a:off x="365760" y="3273552"/>
+            <a:ext cx="1371600" cy="658368"/>
           </a:xfrm>
           <a:prstGeom prst="rect">
             <a:avLst>
-              <a:gd name="adj" fmla="val 25000"/>
+              <a:gd name="adj" fmla="val 8333"/>
             </a:avLst>
           </a:prstGeom>
           <a:solidFill>
-            <a:srgbClr val="FCE7F3"/>
-          </a:solidFill>
-          <a:ln w="19050">
-            <a:solidFill>
-              <a:srgbClr val="DB2777"/>
-            </a:solidFill>
-            <a:prstDash val="solid"/>
-          </a:ln>
-          <a:effectLst>
-            <a:outerShdw sx="100000" sy="100000" kx="0" ky="0" algn="bl" rotWithShape="0" blurRad="101600" dist="38100" dir="8100000">
-              <a:srgbClr val="000000">
-                <a:alpha val="12000"/>
-              </a:srgbClr>
-            </a:outerShdw>
-          </a:effectLst>
+            <a:srgbClr val="E2E8F0"/>
+          </a:solidFill>
+          <a:ln w="12700">
+            <a:solidFill>
+              <a:srgbClr val="E2E8F0"/>
+            </a:solidFill>
+            <a:prstDash val="solid"/>
+          </a:ln>
         </p:spPr>
       </p:sp>
       <p:sp>
@@ -12462,90 +12455,117 @@
         </p:nvSpPr>
         <p:spPr>
           <a:xfrm>
-            <a:off x="6519672" y="2258568"/>
-            <a:ext cx="1828800" cy="292608"/>
-          </a:xfrm>
-          <a:prstGeom prst="rect">
-            <a:avLst/>
-          </a:prstGeom>
-          <a:noFill/>
-          <a:ln/>
-        </p:spPr>
-        <p:txBody>
-          <a:bodyPr wrap="square" lIns="0" tIns="0" rIns="0" bIns="0" rtlCol="0" anchor="ctr"/>
-          <a:lstStyle/>
-          <a:p>
-            <a:pPr algn="ctr" indent="0" marL="0">
-              <a:buNone/>
-            </a:pPr>
-            <a:r>
-              <a:rPr lang="en-US" sz="1300" b="1" dirty="0">
-                <a:solidFill>
-                  <a:srgbClr val="9D174D"/>
+            <a:off x="365760" y="3273552"/>
+            <a:ext cx="1371600" cy="658368"/>
+          </a:xfrm>
+          <a:prstGeom prst="rect">
+            <a:avLst/>
+          </a:prstGeom>
+          <a:noFill/>
+          <a:ln/>
+        </p:spPr>
+        <p:txBody>
+          <a:bodyPr wrap="square" lIns="0" tIns="0" rIns="0" bIns="0" rtlCol="0" anchor="ctr"/>
+          <a:lstStyle/>
+          <a:p>
+            <a:pPr algn="ctr" indent="0" marL="0">
+              <a:buNone/>
+            </a:pPr>
+            <a:r>
+              <a:rPr lang="en-US" sz="1100" b="1" dirty="0">
+                <a:solidFill>
+                  <a:srgbClr val="475569"/>
                 </a:solidFill>
                 <a:latin typeface="Trebuchet MS" pitchFamily="34" charset="0"/>
                 <a:ea typeface="Trebuchet MS" pitchFamily="34" charset="-122"/>
                 <a:cs typeface="Trebuchet MS" pitchFamily="34" charset="-120"/>
               </a:rPr>
-              <a:t>ful</a:t>
-            </a:r>
-            <a:endParaRPr lang="en-US" sz="1300" dirty="0"/>
-          </a:p>
-        </p:txBody>
-      </p:sp>
-      <p:sp>
-        <p:nvSpPr>
-          <p:cNvPr id="24" name="Text 22"/>
-          <p:cNvSpPr/>
-          <p:nvPr/>
-        </p:nvSpPr>
-        <p:spPr>
-          <a:xfrm>
-            <a:off x="6519672" y="2569464"/>
-            <a:ext cx="1828800" cy="201168"/>
-          </a:xfrm>
-          <a:prstGeom prst="rect">
-            <a:avLst/>
-          </a:prstGeom>
-          <a:noFill/>
-          <a:ln/>
-        </p:spPr>
-        <p:txBody>
-          <a:bodyPr wrap="square" lIns="0" tIns="0" rIns="0" bIns="0" rtlCol="0" anchor="t"/>
-          <a:lstStyle/>
-          <a:p>
-            <a:pPr algn="ctr" indent="0" marL="0">
-              <a:buNone/>
-            </a:pPr>
-            <a:r>
-              <a:rPr lang="en-US" sz="850" dirty="0">
-                <a:solidFill>
-                  <a:srgbClr val="475569"/>
+              <a:t>Syllables</a:t>
+            </a:r>
+            <a:endParaRPr lang="en-US" sz="1100" dirty="0"/>
+          </a:p>
+        </p:txBody>
+      </p:sp>
+      <p:sp>
+        <p:nvSpPr>
+          <p:cNvPr id="24" name="Shape 22"/>
+          <p:cNvSpPr/>
+          <p:nvPr/>
+        </p:nvSpPr>
+        <p:spPr>
+          <a:xfrm>
+            <a:off x="1874520" y="3273552"/>
+            <a:ext cx="6903720" cy="658368"/>
+          </a:xfrm>
+          <a:prstGeom prst="rect">
+            <a:avLst>
+              <a:gd name="adj" fmla="val 8333"/>
+            </a:avLst>
+          </a:prstGeom>
+          <a:solidFill>
+            <a:srgbClr val="F8FAFC"/>
+          </a:solidFill>
+          <a:ln w="12700">
+            <a:solidFill>
+              <a:srgbClr val="E2E8F0"/>
+            </a:solidFill>
+            <a:prstDash val="dash"/>
+          </a:ln>
+        </p:spPr>
+      </p:sp>
+      <p:sp>
+        <p:nvSpPr>
+          <p:cNvPr id="25" name="Text 23"/>
+          <p:cNvSpPr/>
+          <p:nvPr/>
+        </p:nvSpPr>
+        <p:spPr>
+          <a:xfrm>
+            <a:off x="1874520" y="3273552"/>
+            <a:ext cx="6903720" cy="658368"/>
+          </a:xfrm>
+          <a:prstGeom prst="rect">
+            <a:avLst/>
+          </a:prstGeom>
+          <a:noFill/>
+          <a:ln/>
+        </p:spPr>
+        <p:txBody>
+          <a:bodyPr wrap="square" rtlCol="0" anchor="ctr"/>
+          <a:lstStyle/>
+          <a:p>
+            <a:pPr algn="ctr" indent="0" marL="0">
+              <a:buNone/>
+            </a:pPr>
+            <a:r>
+              <a:rPr lang="en-US" sz="1100" i="1" dirty="0">
+                <a:solidFill>
+                  <a:srgbClr val="CBD5E1"/>
                 </a:solidFill>
                 <a:latin typeface="Calibri" pitchFamily="34" charset="0"/>
                 <a:ea typeface="Calibri" pitchFamily="34" charset="-122"/>
                 <a:cs typeface="Calibri" pitchFamily="34" charset="-120"/>
               </a:rPr>
-              <a:t>full of</a:t>
-            </a:r>
-            <a:endParaRPr lang="en-US" sz="850" dirty="0"/>
-          </a:p>
-        </p:txBody>
-      </p:sp>
-      <p:sp>
-        <p:nvSpPr>
-          <p:cNvPr id="25" name="Shape 23"/>
-          <p:cNvSpPr/>
-          <p:nvPr/>
-        </p:nvSpPr>
-        <p:spPr>
-          <a:xfrm>
-            <a:off x="365760" y="3273552"/>
-            <a:ext cx="1371600" cy="658368"/>
+              <a:t>Write here...</a:t>
+            </a:r>
+            <a:endParaRPr lang="en-US" sz="1100" dirty="0"/>
+          </a:p>
+        </p:txBody>
+      </p:sp>
+      <p:sp>
+        <p:nvSpPr>
+          <p:cNvPr id="26" name="Shape 24"/>
+          <p:cNvSpPr/>
+          <p:nvPr/>
+        </p:nvSpPr>
+        <p:spPr>
+          <a:xfrm>
+            <a:off x="365760" y="4096512"/>
+            <a:ext cx="1371600" cy="804672"/>
           </a:xfrm>
           <a:prstGeom prst="rect">
             <a:avLst>
-              <a:gd name="adj" fmla="val 8333"/>
+              <a:gd name="adj" fmla="val 6818"/>
             </a:avLst>
           </a:prstGeom>
           <a:solidFill>
@@ -12561,14 +12581,14 @@
       </p:sp>
       <p:sp>
         <p:nvSpPr>
-          <p:cNvPr id="26" name="Text 24"/>
-          <p:cNvSpPr/>
-          <p:nvPr/>
-        </p:nvSpPr>
-        <p:spPr>
-          <a:xfrm>
-            <a:off x="365760" y="3273552"/>
-            <a:ext cx="1371600" cy="658368"/>
+          <p:cNvPr id="27" name="Text 25"/>
+          <p:cNvSpPr/>
+          <p:nvPr/>
+        </p:nvSpPr>
+        <p:spPr>
+          <a:xfrm>
+            <a:off x="365760" y="4096512"/>
+            <a:ext cx="1371600" cy="804672"/>
           </a:xfrm>
           <a:prstGeom prst="rect">
             <a:avLst/>
@@ -12592,7 +12612,7 @@
                 <a:ea typeface="Trebuchet MS" pitchFamily="34" charset="-122"/>
                 <a:cs typeface="Trebuchet MS" pitchFamily="34" charset="-120"/>
               </a:rPr>
-              <a:t>Syllables</a:t>
+              <a:t>Phonemes</a:t>
             </a:r>
             <a:endParaRPr lang="en-US" sz="1100" dirty="0"/>
           </a:p>
@@ -12600,80 +12620,14 @@
       </p:sp>
       <p:sp>
         <p:nvSpPr>
-          <p:cNvPr id="27" name="Shape 25"/>
-          <p:cNvSpPr/>
-          <p:nvPr/>
-        </p:nvSpPr>
-        <p:spPr>
-          <a:xfrm>
-            <a:off x="1874520" y="3273552"/>
-            <a:ext cx="6903720" cy="658368"/>
-          </a:xfrm>
-          <a:prstGeom prst="rect">
-            <a:avLst>
-              <a:gd name="adj" fmla="val 8333"/>
-            </a:avLst>
-          </a:prstGeom>
-          <a:solidFill>
-            <a:srgbClr val="F8FAFC"/>
-          </a:solidFill>
-          <a:ln w="12700">
-            <a:solidFill>
-              <a:srgbClr val="E2E8F0"/>
-            </a:solidFill>
-            <a:prstDash val="dash"/>
-          </a:ln>
-        </p:spPr>
-      </p:sp>
-      <p:sp>
-        <p:nvSpPr>
-          <p:cNvPr id="28" name="Text 26"/>
-          <p:cNvSpPr/>
-          <p:nvPr/>
-        </p:nvSpPr>
-        <p:spPr>
-          <a:xfrm>
-            <a:off x="1874520" y="3273552"/>
-            <a:ext cx="6903720" cy="658368"/>
-          </a:xfrm>
-          <a:prstGeom prst="rect">
-            <a:avLst/>
-          </a:prstGeom>
-          <a:noFill/>
-          <a:ln/>
-        </p:spPr>
-        <p:txBody>
-          <a:bodyPr wrap="square" rtlCol="0" anchor="ctr"/>
-          <a:lstStyle/>
-          <a:p>
-            <a:pPr algn="ctr" indent="0" marL="0">
-              <a:buNone/>
-            </a:pPr>
-            <a:r>
-              <a:rPr lang="en-US" sz="1100" i="1" dirty="0">
-                <a:solidFill>
-                  <a:srgbClr val="CBD5E1"/>
-                </a:solidFill>
-                <a:latin typeface="Calibri" pitchFamily="34" charset="0"/>
-                <a:ea typeface="Calibri" pitchFamily="34" charset="-122"/>
-                <a:cs typeface="Calibri" pitchFamily="34" charset="-120"/>
-              </a:rPr>
-              <a:t>Write here...</a:t>
-            </a:r>
-            <a:endParaRPr lang="en-US" sz="1100" dirty="0"/>
-          </a:p>
-        </p:txBody>
-      </p:sp>
-      <p:sp>
-        <p:nvSpPr>
-          <p:cNvPr id="29" name="Shape 27"/>
-          <p:cNvSpPr/>
-          <p:nvPr/>
-        </p:nvSpPr>
-        <p:spPr>
-          <a:xfrm>
-            <a:off x="365760" y="4096512"/>
-            <a:ext cx="1371600" cy="804672"/>
+          <p:cNvPr id="28" name="Shape 26"/>
+          <p:cNvSpPr/>
+          <p:nvPr/>
+        </p:nvSpPr>
+        <p:spPr>
+          <a:xfrm>
+            <a:off x="1874520" y="4096512"/>
+            <a:ext cx="6903720" cy="804672"/>
           </a:xfrm>
           <a:prstGeom prst="rect">
             <a:avLst>
@@ -12681,85 +12635,19 @@
             </a:avLst>
           </a:prstGeom>
           <a:solidFill>
-            <a:srgbClr val="E2E8F0"/>
+            <a:srgbClr val="F8FAFC"/>
           </a:solidFill>
           <a:ln w="12700">
             <a:solidFill>
               <a:srgbClr val="E2E8F0"/>
             </a:solidFill>
-            <a:prstDash val="solid"/>
-          </a:ln>
-        </p:spPr>
-      </p:sp>
-      <p:sp>
-        <p:nvSpPr>
-          <p:cNvPr id="30" name="Text 28"/>
-          <p:cNvSpPr/>
-          <p:nvPr/>
-        </p:nvSpPr>
-        <p:spPr>
-          <a:xfrm>
-            <a:off x="365760" y="4096512"/>
-            <a:ext cx="1371600" cy="804672"/>
-          </a:xfrm>
-          <a:prstGeom prst="rect">
-            <a:avLst/>
-          </a:prstGeom>
-          <a:noFill/>
-          <a:ln/>
-        </p:spPr>
-        <p:txBody>
-          <a:bodyPr wrap="square" lIns="0" tIns="0" rIns="0" bIns="0" rtlCol="0" anchor="ctr"/>
-          <a:lstStyle/>
-          <a:p>
-            <a:pPr algn="ctr" indent="0" marL="0">
-              <a:buNone/>
-            </a:pPr>
-            <a:r>
-              <a:rPr lang="en-US" sz="1100" b="1" dirty="0">
-                <a:solidFill>
-                  <a:srgbClr val="475569"/>
-                </a:solidFill>
-                <a:latin typeface="Trebuchet MS" pitchFamily="34" charset="0"/>
-                <a:ea typeface="Trebuchet MS" pitchFamily="34" charset="-122"/>
-                <a:cs typeface="Trebuchet MS" pitchFamily="34" charset="-120"/>
-              </a:rPr>
-              <a:t>Phonemes</a:t>
-            </a:r>
-            <a:endParaRPr lang="en-US" sz="1100" dirty="0"/>
-          </a:p>
-        </p:txBody>
-      </p:sp>
-      <p:sp>
-        <p:nvSpPr>
-          <p:cNvPr id="31" name="Shape 29"/>
-          <p:cNvSpPr/>
-          <p:nvPr/>
-        </p:nvSpPr>
-        <p:spPr>
-          <a:xfrm>
-            <a:off x="1874520" y="4096512"/>
-            <a:ext cx="6903720" cy="804672"/>
-          </a:xfrm>
-          <a:prstGeom prst="rect">
-            <a:avLst>
-              <a:gd name="adj" fmla="val 6818"/>
-            </a:avLst>
-          </a:prstGeom>
-          <a:solidFill>
-            <a:srgbClr val="F8FAFC"/>
-          </a:solidFill>
-          <a:ln w="12700">
-            <a:solidFill>
-              <a:srgbClr val="E2E8F0"/>
-            </a:solidFill>
             <a:prstDash val="dash"/>
           </a:ln>
         </p:spPr>
       </p:sp>
       <p:sp>
         <p:nvSpPr>
-          <p:cNvPr id="32" name="Text 30"/>
+          <p:cNvPr id="29" name="Text 27"/>
           <p:cNvSpPr/>
           <p:nvPr/>
         </p:nvSpPr>
@@ -13082,7 +12970,7 @@
                 <a:ea typeface="Calibri" pitchFamily="34" charset="-122"/>
                 <a:cs typeface="Calibri" pitchFamily="34" charset="-120"/>
               </a:rPr>
-              <a:t>Word Labs  •  wordlabs.app  •  Root: 'grace' = elegance, beauty, divine favour</a:t>
+              <a:t>Word Labs  •  wordlabs.app  •  Root: 'grace' = elegance, favour, goodwill</a:t>
             </a:r>
             <a:endParaRPr lang="en-US" sz="800" dirty="0"/>
           </a:p>
@@ -13221,7 +13109,7 @@
                 <a:ea typeface="Trebuchet MS" pitchFamily="34" charset="-122"/>
                 <a:cs typeface="Trebuchet MS" pitchFamily="34" charset="-120"/>
               </a:rPr>
-              <a:t>ungraceful</a:t>
+              <a:t>disgrace</a:t>
             </a:r>
             <a:endParaRPr lang="en-US" sz="2800" dirty="0"/>
           </a:p>
@@ -13301,7 +13189,7 @@
         </p:nvSpPr>
         <p:spPr>
           <a:xfrm>
-            <a:off x="2221992" y="2258568"/>
+            <a:off x="2938272" y="2258568"/>
             <a:ext cx="1828800" cy="292608"/>
           </a:xfrm>
           <a:prstGeom prst="rect">
@@ -13335,7 +13223,7 @@
         </p:nvSpPr>
         <p:spPr>
           <a:xfrm>
-            <a:off x="2221992" y="2258568"/>
+            <a:off x="2938272" y="2258568"/>
             <a:ext cx="1828800" cy="292608"/>
           </a:xfrm>
           <a:prstGeom prst="rect">
@@ -13360,7 +13248,7 @@
                 <a:ea typeface="Trebuchet MS" pitchFamily="34" charset="-122"/>
                 <a:cs typeface="Trebuchet MS" pitchFamily="34" charset="-120"/>
               </a:rPr>
-              <a:t>un</a:t>
+              <a:t>dis</a:t>
             </a:r>
             <a:endParaRPr lang="en-US" sz="1300" dirty="0"/>
           </a:p>
@@ -13374,7 +13262,7 @@
         </p:nvSpPr>
         <p:spPr>
           <a:xfrm>
-            <a:off x="2221992" y="2569464"/>
+            <a:off x="2938272" y="2569464"/>
             <a:ext cx="1828800" cy="201168"/>
           </a:xfrm>
           <a:prstGeom prst="rect">
@@ -13399,7 +13287,7 @@
                 <a:ea typeface="Calibri" pitchFamily="34" charset="-122"/>
                 <a:cs typeface="Calibri" pitchFamily="34" charset="-120"/>
               </a:rPr>
-              <a:t>not</a:t>
+              <a:t>not, opposite of, away</a:t>
             </a:r>
             <a:endParaRPr lang="en-US" sz="850" dirty="0"/>
           </a:p>
@@ -13413,7 +13301,7 @@
         </p:nvSpPr>
         <p:spPr>
           <a:xfrm>
-            <a:off x="4370832" y="2258568"/>
+            <a:off x="5803392" y="2258568"/>
             <a:ext cx="1828800" cy="292608"/>
           </a:xfrm>
           <a:prstGeom prst="rect">
@@ -13447,7 +13335,7 @@
         </p:nvSpPr>
         <p:spPr>
           <a:xfrm>
-            <a:off x="4370832" y="2258568"/>
+            <a:off x="5803392" y="2258568"/>
             <a:ext cx="1828800" cy="292608"/>
           </a:xfrm>
           <a:prstGeom prst="rect">
@@ -13486,7 +13374,7 @@
         </p:nvSpPr>
         <p:spPr>
           <a:xfrm>
-            <a:off x="4370832" y="2569464"/>
+            <a:off x="5803392" y="2569464"/>
             <a:ext cx="1828800" cy="201168"/>
           </a:xfrm>
           <a:prstGeom prst="rect">
@@ -13511,7 +13399,7 @@
                 <a:ea typeface="Calibri" pitchFamily="34" charset="-122"/>
                 <a:cs typeface="Calibri" pitchFamily="34" charset="-120"/>
               </a:rPr>
-              <a:t>elegance, beauty</a:t>
+              <a:t>elegance, beauty, favour</a:t>
             </a:r>
             <a:endParaRPr lang="en-US" sz="850" dirty="0"/>
           </a:p>
@@ -13525,30 +13413,23 @@
         </p:nvSpPr>
         <p:spPr>
           <a:xfrm>
-            <a:off x="6519672" y="2258568"/>
-            <a:ext cx="1828800" cy="292608"/>
+            <a:off x="365760" y="3273552"/>
+            <a:ext cx="1371600" cy="658368"/>
           </a:xfrm>
           <a:prstGeom prst="rect">
             <a:avLst>
-              <a:gd name="adj" fmla="val 25000"/>
+              <a:gd name="adj" fmla="val 8333"/>
             </a:avLst>
           </a:prstGeom>
           <a:solidFill>
-            <a:srgbClr val="FCE7F3"/>
-          </a:solidFill>
-          <a:ln w="19050">
-            <a:solidFill>
-              <a:srgbClr val="DB2777"/>
-            </a:solidFill>
-            <a:prstDash val="solid"/>
-          </a:ln>
-          <a:effectLst>
-            <a:outerShdw sx="100000" sy="100000" kx="0" ky="0" algn="bl" rotWithShape="0" blurRad="101600" dist="38100" dir="8100000">
-              <a:srgbClr val="000000">
-                <a:alpha val="12000"/>
-              </a:srgbClr>
-            </a:outerShdw>
-          </a:effectLst>
+            <a:srgbClr val="E2E8F0"/>
+          </a:solidFill>
+          <a:ln w="12700">
+            <a:solidFill>
+              <a:srgbClr val="E2E8F0"/>
+            </a:solidFill>
+            <a:prstDash val="solid"/>
+          </a:ln>
         </p:spPr>
       </p:sp>
       <p:sp>
@@ -13559,86 +13440,47 @@
         </p:nvSpPr>
         <p:spPr>
           <a:xfrm>
-            <a:off x="6519672" y="2258568"/>
-            <a:ext cx="1828800" cy="292608"/>
-          </a:xfrm>
-          <a:prstGeom prst="rect">
-            <a:avLst/>
-          </a:prstGeom>
-          <a:noFill/>
-          <a:ln/>
-        </p:spPr>
-        <p:txBody>
-          <a:bodyPr wrap="square" lIns="0" tIns="0" rIns="0" bIns="0" rtlCol="0" anchor="ctr"/>
-          <a:lstStyle/>
-          <a:p>
-            <a:pPr algn="ctr" indent="0" marL="0">
-              <a:buNone/>
-            </a:pPr>
-            <a:r>
-              <a:rPr lang="en-US" sz="1300" b="1" dirty="0">
-                <a:solidFill>
-                  <a:srgbClr val="9D174D"/>
+            <a:off x="365760" y="3273552"/>
+            <a:ext cx="1371600" cy="658368"/>
+          </a:xfrm>
+          <a:prstGeom prst="rect">
+            <a:avLst/>
+          </a:prstGeom>
+          <a:noFill/>
+          <a:ln/>
+        </p:spPr>
+        <p:txBody>
+          <a:bodyPr wrap="square" lIns="0" tIns="0" rIns="0" bIns="0" rtlCol="0" anchor="ctr"/>
+          <a:lstStyle/>
+          <a:p>
+            <a:pPr algn="ctr" indent="0" marL="0">
+              <a:buNone/>
+            </a:pPr>
+            <a:r>
+              <a:rPr lang="en-US" sz="1100" b="1" dirty="0">
+                <a:solidFill>
+                  <a:srgbClr val="475569"/>
                 </a:solidFill>
                 <a:latin typeface="Trebuchet MS" pitchFamily="34" charset="0"/>
                 <a:ea typeface="Trebuchet MS" pitchFamily="34" charset="-122"/>
                 <a:cs typeface="Trebuchet MS" pitchFamily="34" charset="-120"/>
               </a:rPr>
-              <a:t>ful</a:t>
-            </a:r>
-            <a:endParaRPr lang="en-US" sz="1300" dirty="0"/>
-          </a:p>
-        </p:txBody>
-      </p:sp>
-      <p:sp>
-        <p:nvSpPr>
-          <p:cNvPr id="24" name="Text 22"/>
-          <p:cNvSpPr/>
-          <p:nvPr/>
-        </p:nvSpPr>
-        <p:spPr>
-          <a:xfrm>
-            <a:off x="6519672" y="2569464"/>
-            <a:ext cx="1828800" cy="201168"/>
-          </a:xfrm>
-          <a:prstGeom prst="rect">
-            <a:avLst/>
-          </a:prstGeom>
-          <a:noFill/>
-          <a:ln/>
-        </p:spPr>
-        <p:txBody>
-          <a:bodyPr wrap="square" lIns="0" tIns="0" rIns="0" bIns="0" rtlCol="0" anchor="t"/>
-          <a:lstStyle/>
-          <a:p>
-            <a:pPr algn="ctr" indent="0" marL="0">
-              <a:buNone/>
-            </a:pPr>
-            <a:r>
-              <a:rPr lang="en-US" sz="850" dirty="0">
-                <a:solidFill>
-                  <a:srgbClr val="475569"/>
-                </a:solidFill>
-                <a:latin typeface="Calibri" pitchFamily="34" charset="0"/>
-                <a:ea typeface="Calibri" pitchFamily="34" charset="-122"/>
-                <a:cs typeface="Calibri" pitchFamily="34" charset="-120"/>
-              </a:rPr>
-              <a:t>full of</a:t>
-            </a:r>
-            <a:endParaRPr lang="en-US" sz="850" dirty="0"/>
-          </a:p>
-        </p:txBody>
-      </p:sp>
-      <p:sp>
-        <p:nvSpPr>
-          <p:cNvPr id="25" name="Shape 23"/>
-          <p:cNvSpPr/>
-          <p:nvPr/>
-        </p:nvSpPr>
-        <p:spPr>
-          <a:xfrm>
-            <a:off x="365760" y="3273552"/>
-            <a:ext cx="1371600" cy="658368"/>
+              <a:t>Syllables</a:t>
+            </a:r>
+            <a:endParaRPr lang="en-US" sz="1100" dirty="0"/>
+          </a:p>
+        </p:txBody>
+      </p:sp>
+      <p:sp>
+        <p:nvSpPr>
+          <p:cNvPr id="24" name="Shape 22"/>
+          <p:cNvSpPr/>
+          <p:nvPr/>
+        </p:nvSpPr>
+        <p:spPr>
+          <a:xfrm>
+            <a:off x="1874520" y="3273552"/>
+            <a:ext cx="6903720" cy="658368"/>
           </a:xfrm>
           <a:prstGeom prst="rect">
             <a:avLst>
@@ -13646,11 +13488,38 @@
             </a:avLst>
           </a:prstGeom>
           <a:solidFill>
-            <a:srgbClr val="E2E8F0"/>
-          </a:solidFill>
-          <a:ln w="12700">
-            <a:solidFill>
-              <a:srgbClr val="E2E8F0"/>
+            <a:srgbClr val="CCFBF1"/>
+          </a:solidFill>
+          <a:ln w="12700">
+            <a:solidFill>
+              <a:srgbClr val="0D9488"/>
+            </a:solidFill>
+            <a:prstDash val="solid"/>
+          </a:ln>
+        </p:spPr>
+      </p:sp>
+      <p:sp>
+        <p:nvSpPr>
+          <p:cNvPr id="25" name="Shape 23"/>
+          <p:cNvSpPr/>
+          <p:nvPr/>
+        </p:nvSpPr>
+        <p:spPr>
+          <a:xfrm>
+            <a:off x="2999232" y="3364992"/>
+            <a:ext cx="1645920" cy="475488"/>
+          </a:xfrm>
+          <a:prstGeom prst="rect">
+            <a:avLst>
+              <a:gd name="adj" fmla="val 9615"/>
+            </a:avLst>
+          </a:prstGeom>
+          <a:solidFill>
+            <a:srgbClr val="FFFFFF"/>
+          </a:solidFill>
+          <a:ln w="12700">
+            <a:solidFill>
+              <a:srgbClr val="0D9488"/>
             </a:solidFill>
             <a:prstDash val="solid"/>
           </a:ln>
@@ -13664,63 +13533,75 @@
         </p:nvSpPr>
         <p:spPr>
           <a:xfrm>
-            <a:off x="365760" y="3273552"/>
-            <a:ext cx="1371600" cy="658368"/>
-          </a:xfrm>
-          <a:prstGeom prst="rect">
-            <a:avLst/>
-          </a:prstGeom>
-          <a:noFill/>
-          <a:ln/>
-        </p:spPr>
-        <p:txBody>
-          <a:bodyPr wrap="square" lIns="0" tIns="0" rIns="0" bIns="0" rtlCol="0" anchor="ctr"/>
-          <a:lstStyle/>
-          <a:p>
-            <a:pPr algn="ctr" indent="0" marL="0">
-              <a:buNone/>
-            </a:pPr>
-            <a:r>
-              <a:rPr lang="en-US" sz="1100" b="1" dirty="0">
-                <a:solidFill>
-                  <a:srgbClr val="475569"/>
+            <a:off x="2999232" y="3364992"/>
+            <a:ext cx="1645920" cy="475488"/>
+          </a:xfrm>
+          <a:prstGeom prst="rect">
+            <a:avLst/>
+          </a:prstGeom>
+          <a:noFill/>
+          <a:ln/>
+        </p:spPr>
+        <p:txBody>
+          <a:bodyPr wrap="square" lIns="0" tIns="0" rIns="0" bIns="0" rtlCol="0" anchor="ctr"/>
+          <a:lstStyle/>
+          <a:p>
+            <a:pPr algn="ctr" indent="0" marL="0">
+              <a:buNone/>
+            </a:pPr>
+            <a:r>
+              <a:rPr lang="en-US" sz="1400" b="1" dirty="0">
+                <a:solidFill>
+                  <a:srgbClr val="0D9488"/>
                 </a:solidFill>
                 <a:latin typeface="Trebuchet MS" pitchFamily="34" charset="0"/>
                 <a:ea typeface="Trebuchet MS" pitchFamily="34" charset="-122"/>
                 <a:cs typeface="Trebuchet MS" pitchFamily="34" charset="-120"/>
               </a:rPr>
-              <a:t>Syllables</a:t>
-            </a:r>
-            <a:endParaRPr lang="en-US" sz="1100" dirty="0"/>
-          </a:p>
-        </p:txBody>
-      </p:sp>
-      <p:sp>
-        <p:nvSpPr>
-          <p:cNvPr id="27" name="Shape 25"/>
-          <p:cNvSpPr/>
-          <p:nvPr/>
-        </p:nvSpPr>
-        <p:spPr>
-          <a:xfrm>
-            <a:off x="1874520" y="3273552"/>
-            <a:ext cx="6903720" cy="658368"/>
-          </a:xfrm>
-          <a:prstGeom prst="rect">
-            <a:avLst>
-              <a:gd name="adj" fmla="val 8333"/>
-            </a:avLst>
-          </a:prstGeom>
-          <a:solidFill>
-            <a:srgbClr val="CCFBF1"/>
-          </a:solidFill>
-          <a:ln w="12700">
-            <a:solidFill>
-              <a:srgbClr val="0D9488"/>
-            </a:solidFill>
-            <a:prstDash val="solid"/>
-          </a:ln>
-        </p:spPr>
+              <a:t>dis</a:t>
+            </a:r>
+            <a:endParaRPr lang="en-US" sz="1400" dirty="0"/>
+          </a:p>
+        </p:txBody>
+      </p:sp>
+      <p:sp>
+        <p:nvSpPr>
+          <p:cNvPr id="27" name="Text 25"/>
+          <p:cNvSpPr/>
+          <p:nvPr/>
+        </p:nvSpPr>
+        <p:spPr>
+          <a:xfrm>
+            <a:off x="4645152" y="3364992"/>
+            <a:ext cx="1097280" cy="475488"/>
+          </a:xfrm>
+          <a:prstGeom prst="rect">
+            <a:avLst/>
+          </a:prstGeom>
+          <a:noFill/>
+          <a:ln/>
+        </p:spPr>
+        <p:txBody>
+          <a:bodyPr wrap="square" lIns="0" tIns="0" rIns="0" bIns="0" rtlCol="0" anchor="ctr"/>
+          <a:lstStyle/>
+          <a:p>
+            <a:pPr algn="ctr" indent="0" marL="0">
+              <a:buNone/>
+            </a:pPr>
+            <a:r>
+              <a:rPr lang="en-US" sz="1600" b="1" dirty="0">
+                <a:solidFill>
+                  <a:srgbClr val="0D9488"/>
+                </a:solidFill>
+                <a:latin typeface="Trebuchet MS" pitchFamily="34" charset="0"/>
+                <a:ea typeface="Trebuchet MS" pitchFamily="34" charset="-122"/>
+                <a:cs typeface="Trebuchet MS" pitchFamily="34" charset="-120"/>
+              </a:rPr>
+              <a:t>·</a:t>
+            </a:r>
+            <a:endParaRPr lang="en-US" sz="1600" dirty="0"/>
+          </a:p>
+        </p:txBody>
       </p:sp>
       <p:sp>
         <p:nvSpPr>
@@ -13730,7 +13611,7 @@
         </p:nvSpPr>
         <p:spPr>
           <a:xfrm>
-            <a:off x="2313432" y="3364992"/>
+            <a:off x="5742432" y="3364992"/>
             <a:ext cx="1645920" cy="475488"/>
           </a:xfrm>
           <a:prstGeom prst="rect">
@@ -13757,7 +13638,7 @@
         </p:nvSpPr>
         <p:spPr>
           <a:xfrm>
-            <a:off x="2313432" y="3364992"/>
+            <a:off x="5742432" y="3364992"/>
             <a:ext cx="1645920" cy="475488"/>
           </a:xfrm>
           <a:prstGeom prst="rect">
@@ -13782,7 +13663,7 @@
                 <a:ea typeface="Trebuchet MS" pitchFamily="34" charset="-122"/>
                 <a:cs typeface="Trebuchet MS" pitchFamily="34" charset="-120"/>
               </a:rPr>
-              <a:t>un</a:t>
+              <a:t>grace</a:t>
             </a:r>
             <a:endParaRPr lang="en-US" sz="1400" dirty="0"/>
           </a:p>
@@ -13790,224 +13671,80 @@
       </p:sp>
       <p:sp>
         <p:nvSpPr>
-          <p:cNvPr id="30" name="Text 28"/>
-          <p:cNvSpPr/>
-          <p:nvPr/>
-        </p:nvSpPr>
-        <p:spPr>
-          <a:xfrm>
-            <a:off x="3959352" y="3364992"/>
-            <a:ext cx="411480" cy="475488"/>
-          </a:xfrm>
-          <a:prstGeom prst="rect">
-            <a:avLst/>
-          </a:prstGeom>
-          <a:noFill/>
-          <a:ln/>
-        </p:spPr>
-        <p:txBody>
-          <a:bodyPr wrap="square" lIns="0" tIns="0" rIns="0" bIns="0" rtlCol="0" anchor="ctr"/>
-          <a:lstStyle/>
-          <a:p>
-            <a:pPr algn="ctr" indent="0" marL="0">
-              <a:buNone/>
-            </a:pPr>
-            <a:r>
-              <a:rPr lang="en-US" sz="1600" b="1" dirty="0">
-                <a:solidFill>
-                  <a:srgbClr val="0D9488"/>
+          <p:cNvPr id="30" name="Shape 28"/>
+          <p:cNvSpPr/>
+          <p:nvPr/>
+        </p:nvSpPr>
+        <p:spPr>
+          <a:xfrm>
+            <a:off x="365760" y="4096512"/>
+            <a:ext cx="1371600" cy="804672"/>
+          </a:xfrm>
+          <a:prstGeom prst="rect">
+            <a:avLst>
+              <a:gd name="adj" fmla="val 6818"/>
+            </a:avLst>
+          </a:prstGeom>
+          <a:solidFill>
+            <a:srgbClr val="E2E8F0"/>
+          </a:solidFill>
+          <a:ln w="12700">
+            <a:solidFill>
+              <a:srgbClr val="E2E8F0"/>
+            </a:solidFill>
+            <a:prstDash val="solid"/>
+          </a:ln>
+        </p:spPr>
+      </p:sp>
+      <p:sp>
+        <p:nvSpPr>
+          <p:cNvPr id="31" name="Text 29"/>
+          <p:cNvSpPr/>
+          <p:nvPr/>
+        </p:nvSpPr>
+        <p:spPr>
+          <a:xfrm>
+            <a:off x="365760" y="4096512"/>
+            <a:ext cx="1371600" cy="804672"/>
+          </a:xfrm>
+          <a:prstGeom prst="rect">
+            <a:avLst/>
+          </a:prstGeom>
+          <a:noFill/>
+          <a:ln/>
+        </p:spPr>
+        <p:txBody>
+          <a:bodyPr wrap="square" lIns="0" tIns="0" rIns="0" bIns="0" rtlCol="0" anchor="ctr"/>
+          <a:lstStyle/>
+          <a:p>
+            <a:pPr algn="ctr" indent="0" marL="0">
+              <a:buNone/>
+            </a:pPr>
+            <a:r>
+              <a:rPr lang="en-US" sz="1100" b="1" dirty="0">
+                <a:solidFill>
+                  <a:srgbClr val="475569"/>
                 </a:solidFill>
                 <a:latin typeface="Trebuchet MS" pitchFamily="34" charset="0"/>
                 <a:ea typeface="Trebuchet MS" pitchFamily="34" charset="-122"/>
                 <a:cs typeface="Trebuchet MS" pitchFamily="34" charset="-120"/>
               </a:rPr>
-              <a:t>·</a:t>
-            </a:r>
-            <a:endParaRPr lang="en-US" sz="1600" dirty="0"/>
-          </a:p>
-        </p:txBody>
-      </p:sp>
-      <p:sp>
-        <p:nvSpPr>
-          <p:cNvPr id="31" name="Shape 29"/>
-          <p:cNvSpPr/>
-          <p:nvPr/>
-        </p:nvSpPr>
-        <p:spPr>
-          <a:xfrm>
-            <a:off x="4370832" y="3364992"/>
-            <a:ext cx="1645920" cy="475488"/>
-          </a:xfrm>
-          <a:prstGeom prst="rect">
-            <a:avLst>
-              <a:gd name="adj" fmla="val 9615"/>
-            </a:avLst>
-          </a:prstGeom>
-          <a:solidFill>
-            <a:srgbClr val="FFFFFF"/>
-          </a:solidFill>
-          <a:ln w="12700">
-            <a:solidFill>
-              <a:srgbClr val="0D9488"/>
-            </a:solidFill>
-            <a:prstDash val="solid"/>
-          </a:ln>
-        </p:spPr>
-      </p:sp>
-      <p:sp>
-        <p:nvSpPr>
-          <p:cNvPr id="32" name="Text 30"/>
-          <p:cNvSpPr/>
-          <p:nvPr/>
-        </p:nvSpPr>
-        <p:spPr>
-          <a:xfrm>
-            <a:off x="4370832" y="3364992"/>
-            <a:ext cx="1645920" cy="475488"/>
-          </a:xfrm>
-          <a:prstGeom prst="rect">
-            <a:avLst/>
-          </a:prstGeom>
-          <a:noFill/>
-          <a:ln/>
-        </p:spPr>
-        <p:txBody>
-          <a:bodyPr wrap="square" lIns="0" tIns="0" rIns="0" bIns="0" rtlCol="0" anchor="ctr"/>
-          <a:lstStyle/>
-          <a:p>
-            <a:pPr algn="ctr" indent="0" marL="0">
-              <a:buNone/>
-            </a:pPr>
-            <a:r>
-              <a:rPr lang="en-US" sz="1400" b="1" dirty="0">
-                <a:solidFill>
-                  <a:srgbClr val="0D9488"/>
-                </a:solidFill>
-                <a:latin typeface="Trebuchet MS" pitchFamily="34" charset="0"/>
-                <a:ea typeface="Trebuchet MS" pitchFamily="34" charset="-122"/>
-                <a:cs typeface="Trebuchet MS" pitchFamily="34" charset="-120"/>
-              </a:rPr>
-              <a:t>grace</a:t>
-            </a:r>
-            <a:endParaRPr lang="en-US" sz="1400" dirty="0"/>
-          </a:p>
-        </p:txBody>
-      </p:sp>
-      <p:sp>
-        <p:nvSpPr>
-          <p:cNvPr id="33" name="Text 31"/>
-          <p:cNvSpPr/>
-          <p:nvPr/>
-        </p:nvSpPr>
-        <p:spPr>
-          <a:xfrm>
-            <a:off x="6016752" y="3364992"/>
-            <a:ext cx="411480" cy="475488"/>
-          </a:xfrm>
-          <a:prstGeom prst="rect">
-            <a:avLst/>
-          </a:prstGeom>
-          <a:noFill/>
-          <a:ln/>
-        </p:spPr>
-        <p:txBody>
-          <a:bodyPr wrap="square" lIns="0" tIns="0" rIns="0" bIns="0" rtlCol="0" anchor="ctr"/>
-          <a:lstStyle/>
-          <a:p>
-            <a:pPr algn="ctr" indent="0" marL="0">
-              <a:buNone/>
-            </a:pPr>
-            <a:r>
-              <a:rPr lang="en-US" sz="1600" b="1" dirty="0">
-                <a:solidFill>
-                  <a:srgbClr val="0D9488"/>
-                </a:solidFill>
-                <a:latin typeface="Trebuchet MS" pitchFamily="34" charset="0"/>
-                <a:ea typeface="Trebuchet MS" pitchFamily="34" charset="-122"/>
-                <a:cs typeface="Trebuchet MS" pitchFamily="34" charset="-120"/>
-              </a:rPr>
-              <a:t>·</a:t>
-            </a:r>
-            <a:endParaRPr lang="en-US" sz="1600" dirty="0"/>
-          </a:p>
-        </p:txBody>
-      </p:sp>
-      <p:sp>
-        <p:nvSpPr>
-          <p:cNvPr id="34" name="Shape 32"/>
-          <p:cNvSpPr/>
-          <p:nvPr/>
-        </p:nvSpPr>
-        <p:spPr>
-          <a:xfrm>
-            <a:off x="6428232" y="3364992"/>
-            <a:ext cx="1645920" cy="475488"/>
-          </a:xfrm>
-          <a:prstGeom prst="rect">
-            <a:avLst>
-              <a:gd name="adj" fmla="val 9615"/>
-            </a:avLst>
-          </a:prstGeom>
-          <a:solidFill>
-            <a:srgbClr val="FFFFFF"/>
-          </a:solidFill>
-          <a:ln w="12700">
-            <a:solidFill>
-              <a:srgbClr val="0D9488"/>
-            </a:solidFill>
-            <a:prstDash val="solid"/>
-          </a:ln>
-        </p:spPr>
-      </p:sp>
-      <p:sp>
-        <p:nvSpPr>
-          <p:cNvPr id="35" name="Text 33"/>
-          <p:cNvSpPr/>
-          <p:nvPr/>
-        </p:nvSpPr>
-        <p:spPr>
-          <a:xfrm>
-            <a:off x="6428232" y="3364992"/>
-            <a:ext cx="1645920" cy="475488"/>
-          </a:xfrm>
-          <a:prstGeom prst="rect">
-            <a:avLst/>
-          </a:prstGeom>
-          <a:noFill/>
-          <a:ln/>
-        </p:spPr>
-        <p:txBody>
-          <a:bodyPr wrap="square" lIns="0" tIns="0" rIns="0" bIns="0" rtlCol="0" anchor="ctr"/>
-          <a:lstStyle/>
-          <a:p>
-            <a:pPr algn="ctr" indent="0" marL="0">
-              <a:buNone/>
-            </a:pPr>
-            <a:r>
-              <a:rPr lang="en-US" sz="1400" b="1" dirty="0">
-                <a:solidFill>
-                  <a:srgbClr val="0D9488"/>
-                </a:solidFill>
-                <a:latin typeface="Trebuchet MS" pitchFamily="34" charset="0"/>
-                <a:ea typeface="Trebuchet MS" pitchFamily="34" charset="-122"/>
-                <a:cs typeface="Trebuchet MS" pitchFamily="34" charset="-120"/>
-              </a:rPr>
-              <a:t>ful</a:t>
-            </a:r>
-            <a:endParaRPr lang="en-US" sz="1400" dirty="0"/>
-          </a:p>
-        </p:txBody>
-      </p:sp>
-      <p:sp>
-        <p:nvSpPr>
-          <p:cNvPr id="36" name="Shape 34"/>
-          <p:cNvSpPr/>
-          <p:nvPr/>
-        </p:nvSpPr>
-        <p:spPr>
-          <a:xfrm>
-            <a:off x="365760" y="4096512"/>
-            <a:ext cx="1371600" cy="804672"/>
+              <a:t>Phonemes</a:t>
+            </a:r>
+            <a:endParaRPr lang="en-US" sz="1100" dirty="0"/>
+          </a:p>
+        </p:txBody>
+      </p:sp>
+      <p:sp>
+        <p:nvSpPr>
+          <p:cNvPr id="32" name="Shape 30"/>
+          <p:cNvSpPr/>
+          <p:nvPr/>
+        </p:nvSpPr>
+        <p:spPr>
+          <a:xfrm>
+            <a:off x="1874520" y="4096512"/>
+            <a:ext cx="6903720" cy="804672"/>
           </a:xfrm>
           <a:prstGeom prst="rect">
             <a:avLst>
@@ -14015,85 +13752,19 @@
             </a:avLst>
           </a:prstGeom>
           <a:solidFill>
-            <a:srgbClr val="E2E8F0"/>
+            <a:srgbClr val="F8FAFC"/>
           </a:solidFill>
           <a:ln w="12700">
             <a:solidFill>
               <a:srgbClr val="E2E8F0"/>
             </a:solidFill>
-            <a:prstDash val="solid"/>
-          </a:ln>
-        </p:spPr>
-      </p:sp>
-      <p:sp>
-        <p:nvSpPr>
-          <p:cNvPr id="37" name="Text 35"/>
-          <p:cNvSpPr/>
-          <p:nvPr/>
-        </p:nvSpPr>
-        <p:spPr>
-          <a:xfrm>
-            <a:off x="365760" y="4096512"/>
-            <a:ext cx="1371600" cy="804672"/>
-          </a:xfrm>
-          <a:prstGeom prst="rect">
-            <a:avLst/>
-          </a:prstGeom>
-          <a:noFill/>
-          <a:ln/>
-        </p:spPr>
-        <p:txBody>
-          <a:bodyPr wrap="square" lIns="0" tIns="0" rIns="0" bIns="0" rtlCol="0" anchor="ctr"/>
-          <a:lstStyle/>
-          <a:p>
-            <a:pPr algn="ctr" indent="0" marL="0">
-              <a:buNone/>
-            </a:pPr>
-            <a:r>
-              <a:rPr lang="en-US" sz="1100" b="1" dirty="0">
-                <a:solidFill>
-                  <a:srgbClr val="475569"/>
-                </a:solidFill>
-                <a:latin typeface="Trebuchet MS" pitchFamily="34" charset="0"/>
-                <a:ea typeface="Trebuchet MS" pitchFamily="34" charset="-122"/>
-                <a:cs typeface="Trebuchet MS" pitchFamily="34" charset="-120"/>
-              </a:rPr>
-              <a:t>Phonemes</a:t>
-            </a:r>
-            <a:endParaRPr lang="en-US" sz="1100" dirty="0"/>
-          </a:p>
-        </p:txBody>
-      </p:sp>
-      <p:sp>
-        <p:nvSpPr>
-          <p:cNvPr id="38" name="Shape 36"/>
-          <p:cNvSpPr/>
-          <p:nvPr/>
-        </p:nvSpPr>
-        <p:spPr>
-          <a:xfrm>
-            <a:off x="1874520" y="4096512"/>
-            <a:ext cx="6903720" cy="804672"/>
-          </a:xfrm>
-          <a:prstGeom prst="rect">
-            <a:avLst>
-              <a:gd name="adj" fmla="val 6818"/>
-            </a:avLst>
-          </a:prstGeom>
-          <a:solidFill>
-            <a:srgbClr val="F8FAFC"/>
-          </a:solidFill>
-          <a:ln w="12700">
-            <a:solidFill>
-              <a:srgbClr val="E2E8F0"/>
-            </a:solidFill>
             <a:prstDash val="dash"/>
           </a:ln>
         </p:spPr>
       </p:sp>
       <p:sp>
         <p:nvSpPr>
-          <p:cNvPr id="39" name="Text 37"/>
+          <p:cNvPr id="33" name="Text 31"/>
           <p:cNvSpPr/>
           <p:nvPr/>
         </p:nvSpPr>
@@ -14325,7 +13996,7 @@
                 <a:ea typeface="Calibri" pitchFamily="34" charset="-122"/>
                 <a:cs typeface="Calibri" pitchFamily="34" charset="-120"/>
               </a:rPr>
-              <a:t>Root 'grace' — elegance, beauty, divine favour</a:t>
+              <a:t>Root 'grace' — elegance, favour, goodwill</a:t>
             </a:r>
             <a:endParaRPr lang="en-US" sz="1600" dirty="0"/>
           </a:p>
@@ -14681,7 +14352,7 @@
                 <a:ea typeface="Calibri" pitchFamily="34" charset="-122"/>
                 <a:cs typeface="Calibri" pitchFamily="34" charset="-120"/>
               </a:rPr>
-              <a:t>Word Labs  •  wordlabs.app  •  Root: 'grace' = elegance, beauty, divine favour</a:t>
+              <a:t>Word Labs  •  wordlabs.app  •  Root: 'grace' = elegance, favour, goodwill</a:t>
             </a:r>
             <a:endParaRPr lang="en-US" sz="800" dirty="0"/>
           </a:p>
@@ -14820,7 +14491,7 @@
                 <a:ea typeface="Trebuchet MS" pitchFamily="34" charset="-122"/>
                 <a:cs typeface="Trebuchet MS" pitchFamily="34" charset="-120"/>
               </a:rPr>
-              <a:t>ungraceful</a:t>
+              <a:t>disgrace</a:t>
             </a:r>
             <a:endParaRPr lang="en-US" sz="2800" dirty="0"/>
           </a:p>
@@ -14900,7 +14571,7 @@
         </p:nvSpPr>
         <p:spPr>
           <a:xfrm>
-            <a:off x="2221992" y="2258568"/>
+            <a:off x="2938272" y="2258568"/>
             <a:ext cx="1828800" cy="292608"/>
           </a:xfrm>
           <a:prstGeom prst="rect">
@@ -14934,7 +14605,7 @@
         </p:nvSpPr>
         <p:spPr>
           <a:xfrm>
-            <a:off x="2221992" y="2258568"/>
+            <a:off x="2938272" y="2258568"/>
             <a:ext cx="1828800" cy="292608"/>
           </a:xfrm>
           <a:prstGeom prst="rect">
@@ -14959,7 +14630,7 @@
                 <a:ea typeface="Trebuchet MS" pitchFamily="34" charset="-122"/>
                 <a:cs typeface="Trebuchet MS" pitchFamily="34" charset="-120"/>
               </a:rPr>
-              <a:t>un</a:t>
+              <a:t>dis</a:t>
             </a:r>
             <a:endParaRPr lang="en-US" sz="1300" dirty="0"/>
           </a:p>
@@ -14973,7 +14644,7 @@
         </p:nvSpPr>
         <p:spPr>
           <a:xfrm>
-            <a:off x="2221992" y="2569464"/>
+            <a:off x="2938272" y="2569464"/>
             <a:ext cx="1828800" cy="201168"/>
           </a:xfrm>
           <a:prstGeom prst="rect">
@@ -14998,7 +14669,7 @@
                 <a:ea typeface="Calibri" pitchFamily="34" charset="-122"/>
                 <a:cs typeface="Calibri" pitchFamily="34" charset="-120"/>
               </a:rPr>
-              <a:t>not</a:t>
+              <a:t>not, opposite of, away</a:t>
             </a:r>
             <a:endParaRPr lang="en-US" sz="850" dirty="0"/>
           </a:p>
@@ -15012,7 +14683,7 @@
         </p:nvSpPr>
         <p:spPr>
           <a:xfrm>
-            <a:off x="4370832" y="2258568"/>
+            <a:off x="5803392" y="2258568"/>
             <a:ext cx="1828800" cy="292608"/>
           </a:xfrm>
           <a:prstGeom prst="rect">
@@ -15046,7 +14717,7 @@
         </p:nvSpPr>
         <p:spPr>
           <a:xfrm>
-            <a:off x="4370832" y="2258568"/>
+            <a:off x="5803392" y="2258568"/>
             <a:ext cx="1828800" cy="292608"/>
           </a:xfrm>
           <a:prstGeom prst="rect">
@@ -15085,7 +14756,7 @@
         </p:nvSpPr>
         <p:spPr>
           <a:xfrm>
-            <a:off x="4370832" y="2569464"/>
+            <a:off x="5803392" y="2569464"/>
             <a:ext cx="1828800" cy="201168"/>
           </a:xfrm>
           <a:prstGeom prst="rect">
@@ -15110,7 +14781,7 @@
                 <a:ea typeface="Calibri" pitchFamily="34" charset="-122"/>
                 <a:cs typeface="Calibri" pitchFamily="34" charset="-120"/>
               </a:rPr>
-              <a:t>elegance, beauty</a:t>
+              <a:t>elegance, beauty, favour</a:t>
             </a:r>
             <a:endParaRPr lang="en-US" sz="850" dirty="0"/>
           </a:p>
@@ -15124,30 +14795,23 @@
         </p:nvSpPr>
         <p:spPr>
           <a:xfrm>
-            <a:off x="6519672" y="2258568"/>
-            <a:ext cx="1828800" cy="292608"/>
+            <a:off x="365760" y="3273552"/>
+            <a:ext cx="1371600" cy="658368"/>
           </a:xfrm>
           <a:prstGeom prst="rect">
             <a:avLst>
-              <a:gd name="adj" fmla="val 25000"/>
+              <a:gd name="adj" fmla="val 8333"/>
             </a:avLst>
           </a:prstGeom>
           <a:solidFill>
-            <a:srgbClr val="FCE7F3"/>
-          </a:solidFill>
-          <a:ln w="19050">
-            <a:solidFill>
-              <a:srgbClr val="DB2777"/>
-            </a:solidFill>
-            <a:prstDash val="solid"/>
-          </a:ln>
-          <a:effectLst>
-            <a:outerShdw sx="100000" sy="100000" kx="0" ky="0" algn="bl" rotWithShape="0" blurRad="101600" dist="38100" dir="8100000">
-              <a:srgbClr val="000000">
-                <a:alpha val="12000"/>
-              </a:srgbClr>
-            </a:outerShdw>
-          </a:effectLst>
+            <a:srgbClr val="E2E8F0"/>
+          </a:solidFill>
+          <a:ln w="12700">
+            <a:solidFill>
+              <a:srgbClr val="E2E8F0"/>
+            </a:solidFill>
+            <a:prstDash val="solid"/>
+          </a:ln>
         </p:spPr>
       </p:sp>
       <p:sp>
@@ -15158,47 +14822,734 @@
         </p:nvSpPr>
         <p:spPr>
           <a:xfrm>
-            <a:off x="6519672" y="2258568"/>
-            <a:ext cx="1828800" cy="292608"/>
-          </a:xfrm>
-          <a:prstGeom prst="rect">
-            <a:avLst/>
-          </a:prstGeom>
-          <a:noFill/>
-          <a:ln/>
-        </p:spPr>
-        <p:txBody>
-          <a:bodyPr wrap="square" lIns="0" tIns="0" rIns="0" bIns="0" rtlCol="0" anchor="ctr"/>
-          <a:lstStyle/>
-          <a:p>
-            <a:pPr algn="ctr" indent="0" marL="0">
-              <a:buNone/>
-            </a:pPr>
-            <a:r>
-              <a:rPr lang="en-US" sz="1300" b="1" dirty="0">
-                <a:solidFill>
-                  <a:srgbClr val="9D174D"/>
+            <a:off x="365760" y="3273552"/>
+            <a:ext cx="1371600" cy="658368"/>
+          </a:xfrm>
+          <a:prstGeom prst="rect">
+            <a:avLst/>
+          </a:prstGeom>
+          <a:noFill/>
+          <a:ln/>
+        </p:spPr>
+        <p:txBody>
+          <a:bodyPr wrap="square" lIns="0" tIns="0" rIns="0" bIns="0" rtlCol="0" anchor="ctr"/>
+          <a:lstStyle/>
+          <a:p>
+            <a:pPr algn="ctr" indent="0" marL="0">
+              <a:buNone/>
+            </a:pPr>
+            <a:r>
+              <a:rPr lang="en-US" sz="1100" b="1" dirty="0">
+                <a:solidFill>
+                  <a:srgbClr val="475569"/>
                 </a:solidFill>
                 <a:latin typeface="Trebuchet MS" pitchFamily="34" charset="0"/>
                 <a:ea typeface="Trebuchet MS" pitchFamily="34" charset="-122"/>
                 <a:cs typeface="Trebuchet MS" pitchFamily="34" charset="-120"/>
               </a:rPr>
-              <a:t>ful</a:t>
-            </a:r>
-            <a:endParaRPr lang="en-US" sz="1300" dirty="0"/>
-          </a:p>
-        </p:txBody>
-      </p:sp>
-      <p:sp>
-        <p:nvSpPr>
-          <p:cNvPr id="24" name="Text 22"/>
-          <p:cNvSpPr/>
-          <p:nvPr/>
-        </p:nvSpPr>
-        <p:spPr>
-          <a:xfrm>
-            <a:off x="6519672" y="2569464"/>
-            <a:ext cx="1828800" cy="201168"/>
+              <a:t>Syllables</a:t>
+            </a:r>
+            <a:endParaRPr lang="en-US" sz="1100" dirty="0"/>
+          </a:p>
+        </p:txBody>
+      </p:sp>
+      <p:sp>
+        <p:nvSpPr>
+          <p:cNvPr id="24" name="Shape 22"/>
+          <p:cNvSpPr/>
+          <p:nvPr/>
+        </p:nvSpPr>
+        <p:spPr>
+          <a:xfrm>
+            <a:off x="1874520" y="3273552"/>
+            <a:ext cx="6903720" cy="658368"/>
+          </a:xfrm>
+          <a:prstGeom prst="rect">
+            <a:avLst>
+              <a:gd name="adj" fmla="val 8333"/>
+            </a:avLst>
+          </a:prstGeom>
+          <a:solidFill>
+            <a:srgbClr val="CCFBF1"/>
+          </a:solidFill>
+          <a:ln w="12700">
+            <a:solidFill>
+              <a:srgbClr val="0D9488"/>
+            </a:solidFill>
+            <a:prstDash val="solid"/>
+          </a:ln>
+        </p:spPr>
+      </p:sp>
+      <p:sp>
+        <p:nvSpPr>
+          <p:cNvPr id="25" name="Shape 23"/>
+          <p:cNvSpPr/>
+          <p:nvPr/>
+        </p:nvSpPr>
+        <p:spPr>
+          <a:xfrm>
+            <a:off x="2999232" y="3364992"/>
+            <a:ext cx="1645920" cy="475488"/>
+          </a:xfrm>
+          <a:prstGeom prst="rect">
+            <a:avLst>
+              <a:gd name="adj" fmla="val 9615"/>
+            </a:avLst>
+          </a:prstGeom>
+          <a:solidFill>
+            <a:srgbClr val="FFFFFF"/>
+          </a:solidFill>
+          <a:ln w="12700">
+            <a:solidFill>
+              <a:srgbClr val="0D9488"/>
+            </a:solidFill>
+            <a:prstDash val="solid"/>
+          </a:ln>
+        </p:spPr>
+      </p:sp>
+      <p:sp>
+        <p:nvSpPr>
+          <p:cNvPr id="26" name="Text 24"/>
+          <p:cNvSpPr/>
+          <p:nvPr/>
+        </p:nvSpPr>
+        <p:spPr>
+          <a:xfrm>
+            <a:off x="2999232" y="3364992"/>
+            <a:ext cx="1645920" cy="475488"/>
+          </a:xfrm>
+          <a:prstGeom prst="rect">
+            <a:avLst/>
+          </a:prstGeom>
+          <a:noFill/>
+          <a:ln/>
+        </p:spPr>
+        <p:txBody>
+          <a:bodyPr wrap="square" lIns="0" tIns="0" rIns="0" bIns="0" rtlCol="0" anchor="ctr"/>
+          <a:lstStyle/>
+          <a:p>
+            <a:pPr algn="ctr" indent="0" marL="0">
+              <a:buNone/>
+            </a:pPr>
+            <a:r>
+              <a:rPr lang="en-US" sz="1400" b="1" dirty="0">
+                <a:solidFill>
+                  <a:srgbClr val="0D9488"/>
+                </a:solidFill>
+                <a:latin typeface="Trebuchet MS" pitchFamily="34" charset="0"/>
+                <a:ea typeface="Trebuchet MS" pitchFamily="34" charset="-122"/>
+                <a:cs typeface="Trebuchet MS" pitchFamily="34" charset="-120"/>
+              </a:rPr>
+              <a:t>dis</a:t>
+            </a:r>
+            <a:endParaRPr lang="en-US" sz="1400" dirty="0"/>
+          </a:p>
+        </p:txBody>
+      </p:sp>
+      <p:sp>
+        <p:nvSpPr>
+          <p:cNvPr id="27" name="Text 25"/>
+          <p:cNvSpPr/>
+          <p:nvPr/>
+        </p:nvSpPr>
+        <p:spPr>
+          <a:xfrm>
+            <a:off x="4645152" y="3364992"/>
+            <a:ext cx="1097280" cy="475488"/>
+          </a:xfrm>
+          <a:prstGeom prst="rect">
+            <a:avLst/>
+          </a:prstGeom>
+          <a:noFill/>
+          <a:ln/>
+        </p:spPr>
+        <p:txBody>
+          <a:bodyPr wrap="square" lIns="0" tIns="0" rIns="0" bIns="0" rtlCol="0" anchor="ctr"/>
+          <a:lstStyle/>
+          <a:p>
+            <a:pPr algn="ctr" indent="0" marL="0">
+              <a:buNone/>
+            </a:pPr>
+            <a:r>
+              <a:rPr lang="en-US" sz="1600" b="1" dirty="0">
+                <a:solidFill>
+                  <a:srgbClr val="0D9488"/>
+                </a:solidFill>
+                <a:latin typeface="Trebuchet MS" pitchFamily="34" charset="0"/>
+                <a:ea typeface="Trebuchet MS" pitchFamily="34" charset="-122"/>
+                <a:cs typeface="Trebuchet MS" pitchFamily="34" charset="-120"/>
+              </a:rPr>
+              <a:t>·</a:t>
+            </a:r>
+            <a:endParaRPr lang="en-US" sz="1600" dirty="0"/>
+          </a:p>
+        </p:txBody>
+      </p:sp>
+      <p:sp>
+        <p:nvSpPr>
+          <p:cNvPr id="28" name="Shape 26"/>
+          <p:cNvSpPr/>
+          <p:nvPr/>
+        </p:nvSpPr>
+        <p:spPr>
+          <a:xfrm>
+            <a:off x="5742432" y="3364992"/>
+            <a:ext cx="1645920" cy="475488"/>
+          </a:xfrm>
+          <a:prstGeom prst="rect">
+            <a:avLst>
+              <a:gd name="adj" fmla="val 9615"/>
+            </a:avLst>
+          </a:prstGeom>
+          <a:solidFill>
+            <a:srgbClr val="FFFFFF"/>
+          </a:solidFill>
+          <a:ln w="12700">
+            <a:solidFill>
+              <a:srgbClr val="0D9488"/>
+            </a:solidFill>
+            <a:prstDash val="solid"/>
+          </a:ln>
+        </p:spPr>
+      </p:sp>
+      <p:sp>
+        <p:nvSpPr>
+          <p:cNvPr id="29" name="Text 27"/>
+          <p:cNvSpPr/>
+          <p:nvPr/>
+        </p:nvSpPr>
+        <p:spPr>
+          <a:xfrm>
+            <a:off x="5742432" y="3364992"/>
+            <a:ext cx="1645920" cy="475488"/>
+          </a:xfrm>
+          <a:prstGeom prst="rect">
+            <a:avLst/>
+          </a:prstGeom>
+          <a:noFill/>
+          <a:ln/>
+        </p:spPr>
+        <p:txBody>
+          <a:bodyPr wrap="square" lIns="0" tIns="0" rIns="0" bIns="0" rtlCol="0" anchor="ctr"/>
+          <a:lstStyle/>
+          <a:p>
+            <a:pPr algn="ctr" indent="0" marL="0">
+              <a:buNone/>
+            </a:pPr>
+            <a:r>
+              <a:rPr lang="en-US" sz="1400" b="1" dirty="0">
+                <a:solidFill>
+                  <a:srgbClr val="0D9488"/>
+                </a:solidFill>
+                <a:latin typeface="Trebuchet MS" pitchFamily="34" charset="0"/>
+                <a:ea typeface="Trebuchet MS" pitchFamily="34" charset="-122"/>
+                <a:cs typeface="Trebuchet MS" pitchFamily="34" charset="-120"/>
+              </a:rPr>
+              <a:t>grace</a:t>
+            </a:r>
+            <a:endParaRPr lang="en-US" sz="1400" dirty="0"/>
+          </a:p>
+        </p:txBody>
+      </p:sp>
+      <p:sp>
+        <p:nvSpPr>
+          <p:cNvPr id="30" name="Shape 28"/>
+          <p:cNvSpPr/>
+          <p:nvPr/>
+        </p:nvSpPr>
+        <p:spPr>
+          <a:xfrm>
+            <a:off x="365760" y="4096512"/>
+            <a:ext cx="1371600" cy="804672"/>
+          </a:xfrm>
+          <a:prstGeom prst="rect">
+            <a:avLst>
+              <a:gd name="adj" fmla="val 6818"/>
+            </a:avLst>
+          </a:prstGeom>
+          <a:solidFill>
+            <a:srgbClr val="E2E8F0"/>
+          </a:solidFill>
+          <a:ln w="12700">
+            <a:solidFill>
+              <a:srgbClr val="E2E8F0"/>
+            </a:solidFill>
+            <a:prstDash val="solid"/>
+          </a:ln>
+        </p:spPr>
+      </p:sp>
+      <p:sp>
+        <p:nvSpPr>
+          <p:cNvPr id="31" name="Text 29"/>
+          <p:cNvSpPr/>
+          <p:nvPr/>
+        </p:nvSpPr>
+        <p:spPr>
+          <a:xfrm>
+            <a:off x="365760" y="4096512"/>
+            <a:ext cx="1371600" cy="804672"/>
+          </a:xfrm>
+          <a:prstGeom prst="rect">
+            <a:avLst/>
+          </a:prstGeom>
+          <a:noFill/>
+          <a:ln/>
+        </p:spPr>
+        <p:txBody>
+          <a:bodyPr wrap="square" lIns="0" tIns="0" rIns="0" bIns="0" rtlCol="0" anchor="ctr"/>
+          <a:lstStyle/>
+          <a:p>
+            <a:pPr algn="ctr" indent="0" marL="0">
+              <a:buNone/>
+            </a:pPr>
+            <a:r>
+              <a:rPr lang="en-US" sz="1100" b="1" dirty="0">
+                <a:solidFill>
+                  <a:srgbClr val="475569"/>
+                </a:solidFill>
+                <a:latin typeface="Trebuchet MS" pitchFamily="34" charset="0"/>
+                <a:ea typeface="Trebuchet MS" pitchFamily="34" charset="-122"/>
+                <a:cs typeface="Trebuchet MS" pitchFamily="34" charset="-120"/>
+              </a:rPr>
+              <a:t>Phonemes</a:t>
+            </a:r>
+            <a:endParaRPr lang="en-US" sz="1100" dirty="0"/>
+          </a:p>
+        </p:txBody>
+      </p:sp>
+      <p:sp>
+        <p:nvSpPr>
+          <p:cNvPr id="32" name="Shape 30"/>
+          <p:cNvSpPr/>
+          <p:nvPr/>
+        </p:nvSpPr>
+        <p:spPr>
+          <a:xfrm>
+            <a:off x="1874520" y="4096512"/>
+            <a:ext cx="6903720" cy="804672"/>
+          </a:xfrm>
+          <a:prstGeom prst="rect">
+            <a:avLst>
+              <a:gd name="adj" fmla="val 6818"/>
+            </a:avLst>
+          </a:prstGeom>
+          <a:solidFill>
+            <a:srgbClr val="FCE7F3"/>
+          </a:solidFill>
+          <a:ln w="12700">
+            <a:solidFill>
+              <a:srgbClr val="DB2777"/>
+            </a:solidFill>
+            <a:prstDash val="solid"/>
+          </a:ln>
+        </p:spPr>
+      </p:sp>
+      <p:sp>
+        <p:nvSpPr>
+          <p:cNvPr id="33" name="Shape 31"/>
+          <p:cNvSpPr/>
+          <p:nvPr/>
+        </p:nvSpPr>
+        <p:spPr>
+          <a:xfrm>
+            <a:off x="2254649" y="4169664"/>
+            <a:ext cx="685800" cy="384048"/>
+          </a:xfrm>
+          <a:prstGeom prst="rect">
+            <a:avLst>
+              <a:gd name="adj" fmla="val 9524"/>
+            </a:avLst>
+          </a:prstGeom>
+          <a:solidFill>
+            <a:srgbClr val="FFFFFF"/>
+          </a:solidFill>
+          <a:ln w="12700">
+            <a:solidFill>
+              <a:srgbClr val="DB2777"/>
+            </a:solidFill>
+            <a:prstDash val="solid"/>
+          </a:ln>
+        </p:spPr>
+      </p:sp>
+      <p:sp>
+        <p:nvSpPr>
+          <p:cNvPr id="34" name="Text 32"/>
+          <p:cNvSpPr/>
+          <p:nvPr/>
+        </p:nvSpPr>
+        <p:spPr>
+          <a:xfrm>
+            <a:off x="2254649" y="4169664"/>
+            <a:ext cx="685800" cy="384048"/>
+          </a:xfrm>
+          <a:prstGeom prst="rect">
+            <a:avLst/>
+          </a:prstGeom>
+          <a:noFill/>
+          <a:ln/>
+        </p:spPr>
+        <p:txBody>
+          <a:bodyPr wrap="square" lIns="0" tIns="0" rIns="0" bIns="0" rtlCol="0" anchor="ctr"/>
+          <a:lstStyle/>
+          <a:p>
+            <a:pPr algn="ctr" indent="0" marL="0">
+              <a:buNone/>
+            </a:pPr>
+            <a:r>
+              <a:rPr lang="en-US" sz="900" b="1" dirty="0">
+                <a:solidFill>
+                  <a:srgbClr val="9D174D"/>
+                </a:solidFill>
+                <a:latin typeface="Trebuchet MS" pitchFamily="34" charset="0"/>
+                <a:ea typeface="Trebuchet MS" pitchFamily="34" charset="-122"/>
+                <a:cs typeface="Trebuchet MS" pitchFamily="34" charset="-120"/>
+              </a:rPr>
+              <a:t>d</a:t>
+            </a:r>
+            <a:endParaRPr lang="en-US" sz="900" dirty="0"/>
+          </a:p>
+        </p:txBody>
+      </p:sp>
+      <p:sp>
+        <p:nvSpPr>
+          <p:cNvPr id="35" name="Shape 33"/>
+          <p:cNvSpPr/>
+          <p:nvPr/>
+        </p:nvSpPr>
+        <p:spPr>
+          <a:xfrm>
+            <a:off x="3293146" y="4169664"/>
+            <a:ext cx="685800" cy="384048"/>
+          </a:xfrm>
+          <a:prstGeom prst="rect">
+            <a:avLst>
+              <a:gd name="adj" fmla="val 9524"/>
+            </a:avLst>
+          </a:prstGeom>
+          <a:solidFill>
+            <a:srgbClr val="FFFFFF"/>
+          </a:solidFill>
+          <a:ln w="12700">
+            <a:solidFill>
+              <a:srgbClr val="DB2777"/>
+            </a:solidFill>
+            <a:prstDash val="solid"/>
+          </a:ln>
+        </p:spPr>
+      </p:sp>
+      <p:sp>
+        <p:nvSpPr>
+          <p:cNvPr id="36" name="Text 34"/>
+          <p:cNvSpPr/>
+          <p:nvPr/>
+        </p:nvSpPr>
+        <p:spPr>
+          <a:xfrm>
+            <a:off x="3293146" y="4169664"/>
+            <a:ext cx="685800" cy="384048"/>
+          </a:xfrm>
+          <a:prstGeom prst="rect">
+            <a:avLst/>
+          </a:prstGeom>
+          <a:noFill/>
+          <a:ln/>
+        </p:spPr>
+        <p:txBody>
+          <a:bodyPr wrap="square" lIns="0" tIns="0" rIns="0" bIns="0" rtlCol="0" anchor="ctr"/>
+          <a:lstStyle/>
+          <a:p>
+            <a:pPr algn="ctr" indent="0" marL="0">
+              <a:buNone/>
+            </a:pPr>
+            <a:r>
+              <a:rPr lang="en-US" sz="900" b="1" dirty="0">
+                <a:solidFill>
+                  <a:srgbClr val="9D174D"/>
+                </a:solidFill>
+                <a:latin typeface="Trebuchet MS" pitchFamily="34" charset="0"/>
+                <a:ea typeface="Trebuchet MS" pitchFamily="34" charset="-122"/>
+                <a:cs typeface="Trebuchet MS" pitchFamily="34" charset="-120"/>
+              </a:rPr>
+              <a:t>i</a:t>
+            </a:r>
+            <a:endParaRPr lang="en-US" sz="900" dirty="0"/>
+          </a:p>
+        </p:txBody>
+      </p:sp>
+      <p:sp>
+        <p:nvSpPr>
+          <p:cNvPr id="37" name="Shape 35"/>
+          <p:cNvSpPr/>
+          <p:nvPr/>
+        </p:nvSpPr>
+        <p:spPr>
+          <a:xfrm>
+            <a:off x="4331643" y="4169664"/>
+            <a:ext cx="685800" cy="384048"/>
+          </a:xfrm>
+          <a:prstGeom prst="rect">
+            <a:avLst>
+              <a:gd name="adj" fmla="val 9524"/>
+            </a:avLst>
+          </a:prstGeom>
+          <a:solidFill>
+            <a:srgbClr val="FFFFFF"/>
+          </a:solidFill>
+          <a:ln w="12700">
+            <a:solidFill>
+              <a:srgbClr val="DB2777"/>
+            </a:solidFill>
+            <a:prstDash val="solid"/>
+          </a:ln>
+        </p:spPr>
+      </p:sp>
+      <p:sp>
+        <p:nvSpPr>
+          <p:cNvPr id="38" name="Text 36"/>
+          <p:cNvSpPr/>
+          <p:nvPr/>
+        </p:nvSpPr>
+        <p:spPr>
+          <a:xfrm>
+            <a:off x="4331643" y="4169664"/>
+            <a:ext cx="685800" cy="384048"/>
+          </a:xfrm>
+          <a:prstGeom prst="rect">
+            <a:avLst/>
+          </a:prstGeom>
+          <a:noFill/>
+          <a:ln/>
+        </p:spPr>
+        <p:txBody>
+          <a:bodyPr wrap="square" lIns="0" tIns="0" rIns="0" bIns="0" rtlCol="0" anchor="ctr"/>
+          <a:lstStyle/>
+          <a:p>
+            <a:pPr algn="ctr" indent="0" marL="0">
+              <a:buNone/>
+            </a:pPr>
+            <a:r>
+              <a:rPr lang="en-US" sz="900" b="1" dirty="0">
+                <a:solidFill>
+                  <a:srgbClr val="9D174D"/>
+                </a:solidFill>
+                <a:latin typeface="Trebuchet MS" pitchFamily="34" charset="0"/>
+                <a:ea typeface="Trebuchet MS" pitchFamily="34" charset="-122"/>
+                <a:cs typeface="Trebuchet MS" pitchFamily="34" charset="-120"/>
+              </a:rPr>
+              <a:t>s</a:t>
+            </a:r>
+            <a:endParaRPr lang="en-US" sz="900" dirty="0"/>
+          </a:p>
+        </p:txBody>
+      </p:sp>
+      <p:sp>
+        <p:nvSpPr>
+          <p:cNvPr id="39" name="Shape 37"/>
+          <p:cNvSpPr/>
+          <p:nvPr/>
+        </p:nvSpPr>
+        <p:spPr>
+          <a:xfrm>
+            <a:off x="5370141" y="4169664"/>
+            <a:ext cx="685800" cy="384048"/>
+          </a:xfrm>
+          <a:prstGeom prst="rect">
+            <a:avLst>
+              <a:gd name="adj" fmla="val 9524"/>
+            </a:avLst>
+          </a:prstGeom>
+          <a:solidFill>
+            <a:srgbClr val="FFFFFF"/>
+          </a:solidFill>
+          <a:ln w="12700">
+            <a:solidFill>
+              <a:srgbClr val="DB2777"/>
+            </a:solidFill>
+            <a:prstDash val="solid"/>
+          </a:ln>
+        </p:spPr>
+      </p:sp>
+      <p:sp>
+        <p:nvSpPr>
+          <p:cNvPr id="40" name="Text 38"/>
+          <p:cNvSpPr/>
+          <p:nvPr/>
+        </p:nvSpPr>
+        <p:spPr>
+          <a:xfrm>
+            <a:off x="5370141" y="4169664"/>
+            <a:ext cx="685800" cy="384048"/>
+          </a:xfrm>
+          <a:prstGeom prst="rect">
+            <a:avLst/>
+          </a:prstGeom>
+          <a:noFill/>
+          <a:ln/>
+        </p:spPr>
+        <p:txBody>
+          <a:bodyPr wrap="square" lIns="0" tIns="0" rIns="0" bIns="0" rtlCol="0" anchor="ctr"/>
+          <a:lstStyle/>
+          <a:p>
+            <a:pPr algn="ctr" indent="0" marL="0">
+              <a:buNone/>
+            </a:pPr>
+            <a:r>
+              <a:rPr lang="en-US" sz="900" b="1" dirty="0">
+                <a:solidFill>
+                  <a:srgbClr val="9D174D"/>
+                </a:solidFill>
+                <a:latin typeface="Trebuchet MS" pitchFamily="34" charset="0"/>
+                <a:ea typeface="Trebuchet MS" pitchFamily="34" charset="-122"/>
+                <a:cs typeface="Trebuchet MS" pitchFamily="34" charset="-120"/>
+              </a:rPr>
+              <a:t>gr</a:t>
+            </a:r>
+            <a:endParaRPr lang="en-US" sz="900" dirty="0"/>
+          </a:p>
+        </p:txBody>
+      </p:sp>
+      <p:sp>
+        <p:nvSpPr>
+          <p:cNvPr id="41" name="Shape 39"/>
+          <p:cNvSpPr/>
+          <p:nvPr/>
+        </p:nvSpPr>
+        <p:spPr>
+          <a:xfrm>
+            <a:off x="6408638" y="4169664"/>
+            <a:ext cx="685800" cy="384048"/>
+          </a:xfrm>
+          <a:prstGeom prst="rect">
+            <a:avLst>
+              <a:gd name="adj" fmla="val 9524"/>
+            </a:avLst>
+          </a:prstGeom>
+          <a:solidFill>
+            <a:srgbClr val="FFFFFF"/>
+          </a:solidFill>
+          <a:ln w="12700">
+            <a:solidFill>
+              <a:srgbClr val="DB2777"/>
+            </a:solidFill>
+            <a:prstDash val="solid"/>
+          </a:ln>
+        </p:spPr>
+      </p:sp>
+      <p:sp>
+        <p:nvSpPr>
+          <p:cNvPr id="42" name="Text 40"/>
+          <p:cNvSpPr/>
+          <p:nvPr/>
+        </p:nvSpPr>
+        <p:spPr>
+          <a:xfrm>
+            <a:off x="6408638" y="4169664"/>
+            <a:ext cx="685800" cy="384048"/>
+          </a:xfrm>
+          <a:prstGeom prst="rect">
+            <a:avLst/>
+          </a:prstGeom>
+          <a:noFill/>
+          <a:ln/>
+        </p:spPr>
+        <p:txBody>
+          <a:bodyPr wrap="square" lIns="0" tIns="0" rIns="0" bIns="0" rtlCol="0" anchor="ctr"/>
+          <a:lstStyle/>
+          <a:p>
+            <a:pPr algn="ctr" indent="0" marL="0">
+              <a:buNone/>
+            </a:pPr>
+            <a:r>
+              <a:rPr lang="en-US" sz="900" b="1" dirty="0">
+                <a:solidFill>
+                  <a:srgbClr val="9D174D"/>
+                </a:solidFill>
+                <a:latin typeface="Trebuchet MS" pitchFamily="34" charset="0"/>
+                <a:ea typeface="Trebuchet MS" pitchFamily="34" charset="-122"/>
+                <a:cs typeface="Trebuchet MS" pitchFamily="34" charset="-120"/>
+              </a:rPr>
+              <a:t>a</a:t>
+            </a:r>
+            <a:endParaRPr lang="en-US" sz="900" dirty="0"/>
+          </a:p>
+        </p:txBody>
+      </p:sp>
+      <p:sp>
+        <p:nvSpPr>
+          <p:cNvPr id="43" name="Shape 41"/>
+          <p:cNvSpPr/>
+          <p:nvPr/>
+        </p:nvSpPr>
+        <p:spPr>
+          <a:xfrm>
+            <a:off x="7447135" y="4169664"/>
+            <a:ext cx="685800" cy="384048"/>
+          </a:xfrm>
+          <a:prstGeom prst="rect">
+            <a:avLst>
+              <a:gd name="adj" fmla="val 9524"/>
+            </a:avLst>
+          </a:prstGeom>
+          <a:solidFill>
+            <a:srgbClr val="FFFFFF"/>
+          </a:solidFill>
+          <a:ln w="12700">
+            <a:solidFill>
+              <a:srgbClr val="DB2777"/>
+            </a:solidFill>
+            <a:prstDash val="solid"/>
+          </a:ln>
+        </p:spPr>
+      </p:sp>
+      <p:sp>
+        <p:nvSpPr>
+          <p:cNvPr id="44" name="Text 42"/>
+          <p:cNvSpPr/>
+          <p:nvPr/>
+        </p:nvSpPr>
+        <p:spPr>
+          <a:xfrm>
+            <a:off x="7447135" y="4169664"/>
+            <a:ext cx="685800" cy="384048"/>
+          </a:xfrm>
+          <a:prstGeom prst="rect">
+            <a:avLst/>
+          </a:prstGeom>
+          <a:noFill/>
+          <a:ln/>
+        </p:spPr>
+        <p:txBody>
+          <a:bodyPr wrap="square" lIns="0" tIns="0" rIns="0" bIns="0" rtlCol="0" anchor="ctr"/>
+          <a:lstStyle/>
+          <a:p>
+            <a:pPr algn="ctr" indent="0" marL="0">
+              <a:buNone/>
+            </a:pPr>
+            <a:r>
+              <a:rPr lang="en-US" sz="900" b="1" dirty="0">
+                <a:solidFill>
+                  <a:srgbClr val="9D174D"/>
+                </a:solidFill>
+                <a:latin typeface="Trebuchet MS" pitchFamily="34" charset="0"/>
+                <a:ea typeface="Trebuchet MS" pitchFamily="34" charset="-122"/>
+                <a:cs typeface="Trebuchet MS" pitchFamily="34" charset="-120"/>
+              </a:rPr>
+              <a:t>ce</a:t>
+            </a:r>
+            <a:endParaRPr lang="en-US" sz="900" dirty="0"/>
+          </a:p>
+        </p:txBody>
+      </p:sp>
+      <p:sp>
+        <p:nvSpPr>
+          <p:cNvPr id="45" name="Text 43"/>
+          <p:cNvSpPr/>
+          <p:nvPr/>
+        </p:nvSpPr>
+        <p:spPr>
+          <a:xfrm>
+            <a:off x="7447135" y="4572000"/>
+            <a:ext cx="685800" cy="219456"/>
           </a:xfrm>
           <a:prstGeom prst="rect">
             <a:avLst/>
@@ -15214,1046 +15565,17 @@
               <a:buNone/>
             </a:pPr>
             <a:r>
-              <a:rPr lang="en-US" sz="850" dirty="0">
-                <a:solidFill>
-                  <a:srgbClr val="475569"/>
+              <a:rPr lang="en-US" sz="750" i="1" dirty="0">
+                <a:solidFill>
+                  <a:srgbClr val="94A3B8"/>
                 </a:solidFill>
                 <a:latin typeface="Calibri" pitchFamily="34" charset="0"/>
                 <a:ea typeface="Calibri" pitchFamily="34" charset="-122"/>
                 <a:cs typeface="Calibri" pitchFamily="34" charset="-120"/>
               </a:rPr>
-              <a:t>full of</a:t>
-            </a:r>
-            <a:endParaRPr lang="en-US" sz="850" dirty="0"/>
-          </a:p>
-        </p:txBody>
-      </p:sp>
-      <p:sp>
-        <p:nvSpPr>
-          <p:cNvPr id="25" name="Shape 23"/>
-          <p:cNvSpPr/>
-          <p:nvPr/>
-        </p:nvSpPr>
-        <p:spPr>
-          <a:xfrm>
-            <a:off x="365760" y="3273552"/>
-            <a:ext cx="1371600" cy="658368"/>
-          </a:xfrm>
-          <a:prstGeom prst="rect">
-            <a:avLst>
-              <a:gd name="adj" fmla="val 8333"/>
-            </a:avLst>
-          </a:prstGeom>
-          <a:solidFill>
-            <a:srgbClr val="E2E8F0"/>
-          </a:solidFill>
-          <a:ln w="12700">
-            <a:solidFill>
-              <a:srgbClr val="E2E8F0"/>
-            </a:solidFill>
-            <a:prstDash val="solid"/>
-          </a:ln>
-        </p:spPr>
-      </p:sp>
-      <p:sp>
-        <p:nvSpPr>
-          <p:cNvPr id="26" name="Text 24"/>
-          <p:cNvSpPr/>
-          <p:nvPr/>
-        </p:nvSpPr>
-        <p:spPr>
-          <a:xfrm>
-            <a:off x="365760" y="3273552"/>
-            <a:ext cx="1371600" cy="658368"/>
-          </a:xfrm>
-          <a:prstGeom prst="rect">
-            <a:avLst/>
-          </a:prstGeom>
-          <a:noFill/>
-          <a:ln/>
-        </p:spPr>
-        <p:txBody>
-          <a:bodyPr wrap="square" lIns="0" tIns="0" rIns="0" bIns="0" rtlCol="0" anchor="ctr"/>
-          <a:lstStyle/>
-          <a:p>
-            <a:pPr algn="ctr" indent="0" marL="0">
-              <a:buNone/>
-            </a:pPr>
-            <a:r>
-              <a:rPr lang="en-US" sz="1100" b="1" dirty="0">
-                <a:solidFill>
-                  <a:srgbClr val="475569"/>
-                </a:solidFill>
-                <a:latin typeface="Trebuchet MS" pitchFamily="34" charset="0"/>
-                <a:ea typeface="Trebuchet MS" pitchFamily="34" charset="-122"/>
-                <a:cs typeface="Trebuchet MS" pitchFamily="34" charset="-120"/>
-              </a:rPr>
-              <a:t>Syllables</a:t>
-            </a:r>
-            <a:endParaRPr lang="en-US" sz="1100" dirty="0"/>
-          </a:p>
-        </p:txBody>
-      </p:sp>
-      <p:sp>
-        <p:nvSpPr>
-          <p:cNvPr id="27" name="Shape 25"/>
-          <p:cNvSpPr/>
-          <p:nvPr/>
-        </p:nvSpPr>
-        <p:spPr>
-          <a:xfrm>
-            <a:off x="1874520" y="3273552"/>
-            <a:ext cx="6903720" cy="658368"/>
-          </a:xfrm>
-          <a:prstGeom prst="rect">
-            <a:avLst>
-              <a:gd name="adj" fmla="val 8333"/>
-            </a:avLst>
-          </a:prstGeom>
-          <a:solidFill>
-            <a:srgbClr val="CCFBF1"/>
-          </a:solidFill>
-          <a:ln w="12700">
-            <a:solidFill>
-              <a:srgbClr val="0D9488"/>
-            </a:solidFill>
-            <a:prstDash val="solid"/>
-          </a:ln>
-        </p:spPr>
-      </p:sp>
-      <p:sp>
-        <p:nvSpPr>
-          <p:cNvPr id="28" name="Shape 26"/>
-          <p:cNvSpPr/>
-          <p:nvPr/>
-        </p:nvSpPr>
-        <p:spPr>
-          <a:xfrm>
-            <a:off x="2313432" y="3364992"/>
-            <a:ext cx="1645920" cy="475488"/>
-          </a:xfrm>
-          <a:prstGeom prst="rect">
-            <a:avLst>
-              <a:gd name="adj" fmla="val 9615"/>
-            </a:avLst>
-          </a:prstGeom>
-          <a:solidFill>
-            <a:srgbClr val="FFFFFF"/>
-          </a:solidFill>
-          <a:ln w="12700">
-            <a:solidFill>
-              <a:srgbClr val="0D9488"/>
-            </a:solidFill>
-            <a:prstDash val="solid"/>
-          </a:ln>
-        </p:spPr>
-      </p:sp>
-      <p:sp>
-        <p:nvSpPr>
-          <p:cNvPr id="29" name="Text 27"/>
-          <p:cNvSpPr/>
-          <p:nvPr/>
-        </p:nvSpPr>
-        <p:spPr>
-          <a:xfrm>
-            <a:off x="2313432" y="3364992"/>
-            <a:ext cx="1645920" cy="475488"/>
-          </a:xfrm>
-          <a:prstGeom prst="rect">
-            <a:avLst/>
-          </a:prstGeom>
-          <a:noFill/>
-          <a:ln/>
-        </p:spPr>
-        <p:txBody>
-          <a:bodyPr wrap="square" lIns="0" tIns="0" rIns="0" bIns="0" rtlCol="0" anchor="ctr"/>
-          <a:lstStyle/>
-          <a:p>
-            <a:pPr algn="ctr" indent="0" marL="0">
-              <a:buNone/>
-            </a:pPr>
-            <a:r>
-              <a:rPr lang="en-US" sz="1400" b="1" dirty="0">
-                <a:solidFill>
-                  <a:srgbClr val="0D9488"/>
-                </a:solidFill>
-                <a:latin typeface="Trebuchet MS" pitchFamily="34" charset="0"/>
-                <a:ea typeface="Trebuchet MS" pitchFamily="34" charset="-122"/>
-                <a:cs typeface="Trebuchet MS" pitchFamily="34" charset="-120"/>
-              </a:rPr>
-              <a:t>un</a:t>
-            </a:r>
-            <a:endParaRPr lang="en-US" sz="1400" dirty="0"/>
-          </a:p>
-        </p:txBody>
-      </p:sp>
-      <p:sp>
-        <p:nvSpPr>
-          <p:cNvPr id="30" name="Text 28"/>
-          <p:cNvSpPr/>
-          <p:nvPr/>
-        </p:nvSpPr>
-        <p:spPr>
-          <a:xfrm>
-            <a:off x="3959352" y="3364992"/>
-            <a:ext cx="411480" cy="475488"/>
-          </a:xfrm>
-          <a:prstGeom prst="rect">
-            <a:avLst/>
-          </a:prstGeom>
-          <a:noFill/>
-          <a:ln/>
-        </p:spPr>
-        <p:txBody>
-          <a:bodyPr wrap="square" lIns="0" tIns="0" rIns="0" bIns="0" rtlCol="0" anchor="ctr"/>
-          <a:lstStyle/>
-          <a:p>
-            <a:pPr algn="ctr" indent="0" marL="0">
-              <a:buNone/>
-            </a:pPr>
-            <a:r>
-              <a:rPr lang="en-US" sz="1600" b="1" dirty="0">
-                <a:solidFill>
-                  <a:srgbClr val="0D9488"/>
-                </a:solidFill>
-                <a:latin typeface="Trebuchet MS" pitchFamily="34" charset="0"/>
-                <a:ea typeface="Trebuchet MS" pitchFamily="34" charset="-122"/>
-                <a:cs typeface="Trebuchet MS" pitchFamily="34" charset="-120"/>
-              </a:rPr>
-              <a:t>·</a:t>
-            </a:r>
-            <a:endParaRPr lang="en-US" sz="1600" dirty="0"/>
-          </a:p>
-        </p:txBody>
-      </p:sp>
-      <p:sp>
-        <p:nvSpPr>
-          <p:cNvPr id="31" name="Shape 29"/>
-          <p:cNvSpPr/>
-          <p:nvPr/>
-        </p:nvSpPr>
-        <p:spPr>
-          <a:xfrm>
-            <a:off x="4370832" y="3364992"/>
-            <a:ext cx="1645920" cy="475488"/>
-          </a:xfrm>
-          <a:prstGeom prst="rect">
-            <a:avLst>
-              <a:gd name="adj" fmla="val 9615"/>
-            </a:avLst>
-          </a:prstGeom>
-          <a:solidFill>
-            <a:srgbClr val="FFFFFF"/>
-          </a:solidFill>
-          <a:ln w="12700">
-            <a:solidFill>
-              <a:srgbClr val="0D9488"/>
-            </a:solidFill>
-            <a:prstDash val="solid"/>
-          </a:ln>
-        </p:spPr>
-      </p:sp>
-      <p:sp>
-        <p:nvSpPr>
-          <p:cNvPr id="32" name="Text 30"/>
-          <p:cNvSpPr/>
-          <p:nvPr/>
-        </p:nvSpPr>
-        <p:spPr>
-          <a:xfrm>
-            <a:off x="4370832" y="3364992"/>
-            <a:ext cx="1645920" cy="475488"/>
-          </a:xfrm>
-          <a:prstGeom prst="rect">
-            <a:avLst/>
-          </a:prstGeom>
-          <a:noFill/>
-          <a:ln/>
-        </p:spPr>
-        <p:txBody>
-          <a:bodyPr wrap="square" lIns="0" tIns="0" rIns="0" bIns="0" rtlCol="0" anchor="ctr"/>
-          <a:lstStyle/>
-          <a:p>
-            <a:pPr algn="ctr" indent="0" marL="0">
-              <a:buNone/>
-            </a:pPr>
-            <a:r>
-              <a:rPr lang="en-US" sz="1400" b="1" dirty="0">
-                <a:solidFill>
-                  <a:srgbClr val="0D9488"/>
-                </a:solidFill>
-                <a:latin typeface="Trebuchet MS" pitchFamily="34" charset="0"/>
-                <a:ea typeface="Trebuchet MS" pitchFamily="34" charset="-122"/>
-                <a:cs typeface="Trebuchet MS" pitchFamily="34" charset="-120"/>
-              </a:rPr>
-              <a:t>grace</a:t>
-            </a:r>
-            <a:endParaRPr lang="en-US" sz="1400" dirty="0"/>
-          </a:p>
-        </p:txBody>
-      </p:sp>
-      <p:sp>
-        <p:nvSpPr>
-          <p:cNvPr id="33" name="Text 31"/>
-          <p:cNvSpPr/>
-          <p:nvPr/>
-        </p:nvSpPr>
-        <p:spPr>
-          <a:xfrm>
-            <a:off x="6016752" y="3364992"/>
-            <a:ext cx="411480" cy="475488"/>
-          </a:xfrm>
-          <a:prstGeom prst="rect">
-            <a:avLst/>
-          </a:prstGeom>
-          <a:noFill/>
-          <a:ln/>
-        </p:spPr>
-        <p:txBody>
-          <a:bodyPr wrap="square" lIns="0" tIns="0" rIns="0" bIns="0" rtlCol="0" anchor="ctr"/>
-          <a:lstStyle/>
-          <a:p>
-            <a:pPr algn="ctr" indent="0" marL="0">
-              <a:buNone/>
-            </a:pPr>
-            <a:r>
-              <a:rPr lang="en-US" sz="1600" b="1" dirty="0">
-                <a:solidFill>
-                  <a:srgbClr val="0D9488"/>
-                </a:solidFill>
-                <a:latin typeface="Trebuchet MS" pitchFamily="34" charset="0"/>
-                <a:ea typeface="Trebuchet MS" pitchFamily="34" charset="-122"/>
-                <a:cs typeface="Trebuchet MS" pitchFamily="34" charset="-120"/>
-              </a:rPr>
-              <a:t>·</a:t>
-            </a:r>
-            <a:endParaRPr lang="en-US" sz="1600" dirty="0"/>
-          </a:p>
-        </p:txBody>
-      </p:sp>
-      <p:sp>
-        <p:nvSpPr>
-          <p:cNvPr id="34" name="Shape 32"/>
-          <p:cNvSpPr/>
-          <p:nvPr/>
-        </p:nvSpPr>
-        <p:spPr>
-          <a:xfrm>
-            <a:off x="6428232" y="3364992"/>
-            <a:ext cx="1645920" cy="475488"/>
-          </a:xfrm>
-          <a:prstGeom prst="rect">
-            <a:avLst>
-              <a:gd name="adj" fmla="val 9615"/>
-            </a:avLst>
-          </a:prstGeom>
-          <a:solidFill>
-            <a:srgbClr val="FFFFFF"/>
-          </a:solidFill>
-          <a:ln w="12700">
-            <a:solidFill>
-              <a:srgbClr val="0D9488"/>
-            </a:solidFill>
-            <a:prstDash val="solid"/>
-          </a:ln>
-        </p:spPr>
-      </p:sp>
-      <p:sp>
-        <p:nvSpPr>
-          <p:cNvPr id="35" name="Text 33"/>
-          <p:cNvSpPr/>
-          <p:nvPr/>
-        </p:nvSpPr>
-        <p:spPr>
-          <a:xfrm>
-            <a:off x="6428232" y="3364992"/>
-            <a:ext cx="1645920" cy="475488"/>
-          </a:xfrm>
-          <a:prstGeom prst="rect">
-            <a:avLst/>
-          </a:prstGeom>
-          <a:noFill/>
-          <a:ln/>
-        </p:spPr>
-        <p:txBody>
-          <a:bodyPr wrap="square" lIns="0" tIns="0" rIns="0" bIns="0" rtlCol="0" anchor="ctr"/>
-          <a:lstStyle/>
-          <a:p>
-            <a:pPr algn="ctr" indent="0" marL="0">
-              <a:buNone/>
-            </a:pPr>
-            <a:r>
-              <a:rPr lang="en-US" sz="1400" b="1" dirty="0">
-                <a:solidFill>
-                  <a:srgbClr val="0D9488"/>
-                </a:solidFill>
-                <a:latin typeface="Trebuchet MS" pitchFamily="34" charset="0"/>
-                <a:ea typeface="Trebuchet MS" pitchFamily="34" charset="-122"/>
-                <a:cs typeface="Trebuchet MS" pitchFamily="34" charset="-120"/>
-              </a:rPr>
-              <a:t>ful</a:t>
-            </a:r>
-            <a:endParaRPr lang="en-US" sz="1400" dirty="0"/>
-          </a:p>
-        </p:txBody>
-      </p:sp>
-      <p:sp>
-        <p:nvSpPr>
-          <p:cNvPr id="36" name="Shape 34"/>
-          <p:cNvSpPr/>
-          <p:nvPr/>
-        </p:nvSpPr>
-        <p:spPr>
-          <a:xfrm>
-            <a:off x="365760" y="4096512"/>
-            <a:ext cx="1371600" cy="804672"/>
-          </a:xfrm>
-          <a:prstGeom prst="rect">
-            <a:avLst>
-              <a:gd name="adj" fmla="val 6818"/>
-            </a:avLst>
-          </a:prstGeom>
-          <a:solidFill>
-            <a:srgbClr val="E2E8F0"/>
-          </a:solidFill>
-          <a:ln w="12700">
-            <a:solidFill>
-              <a:srgbClr val="E2E8F0"/>
-            </a:solidFill>
-            <a:prstDash val="solid"/>
-          </a:ln>
-        </p:spPr>
-      </p:sp>
-      <p:sp>
-        <p:nvSpPr>
-          <p:cNvPr id="37" name="Text 35"/>
-          <p:cNvSpPr/>
-          <p:nvPr/>
-        </p:nvSpPr>
-        <p:spPr>
-          <a:xfrm>
-            <a:off x="365760" y="4096512"/>
-            <a:ext cx="1371600" cy="804672"/>
-          </a:xfrm>
-          <a:prstGeom prst="rect">
-            <a:avLst/>
-          </a:prstGeom>
-          <a:noFill/>
-          <a:ln/>
-        </p:spPr>
-        <p:txBody>
-          <a:bodyPr wrap="square" lIns="0" tIns="0" rIns="0" bIns="0" rtlCol="0" anchor="ctr"/>
-          <a:lstStyle/>
-          <a:p>
-            <a:pPr algn="ctr" indent="0" marL="0">
-              <a:buNone/>
-            </a:pPr>
-            <a:r>
-              <a:rPr lang="en-US" sz="1100" b="1" dirty="0">
-                <a:solidFill>
-                  <a:srgbClr val="475569"/>
-                </a:solidFill>
-                <a:latin typeface="Trebuchet MS" pitchFamily="34" charset="0"/>
-                <a:ea typeface="Trebuchet MS" pitchFamily="34" charset="-122"/>
-                <a:cs typeface="Trebuchet MS" pitchFamily="34" charset="-120"/>
-              </a:rPr>
-              <a:t>Phonemes</a:t>
-            </a:r>
-            <a:endParaRPr lang="en-US" sz="1100" dirty="0"/>
-          </a:p>
-        </p:txBody>
-      </p:sp>
-      <p:sp>
-        <p:nvSpPr>
-          <p:cNvPr id="38" name="Shape 36"/>
-          <p:cNvSpPr/>
-          <p:nvPr/>
-        </p:nvSpPr>
-        <p:spPr>
-          <a:xfrm>
-            <a:off x="1874520" y="4096512"/>
-            <a:ext cx="6903720" cy="804672"/>
-          </a:xfrm>
-          <a:prstGeom prst="rect">
-            <a:avLst>
-              <a:gd name="adj" fmla="val 6818"/>
-            </a:avLst>
-          </a:prstGeom>
-          <a:solidFill>
-            <a:srgbClr val="FCE7F3"/>
-          </a:solidFill>
-          <a:ln w="12700">
-            <a:solidFill>
-              <a:srgbClr val="DB2777"/>
-            </a:solidFill>
-            <a:prstDash val="solid"/>
-          </a:ln>
-        </p:spPr>
-      </p:sp>
-      <p:sp>
-        <p:nvSpPr>
-          <p:cNvPr id="39" name="Shape 37"/>
-          <p:cNvSpPr/>
-          <p:nvPr/>
-        </p:nvSpPr>
-        <p:spPr>
-          <a:xfrm>
-            <a:off x="2023872" y="4169664"/>
-            <a:ext cx="685800" cy="384048"/>
-          </a:xfrm>
-          <a:prstGeom prst="rect">
-            <a:avLst>
-              <a:gd name="adj" fmla="val 9524"/>
-            </a:avLst>
-          </a:prstGeom>
-          <a:solidFill>
-            <a:srgbClr val="FFFFFF"/>
-          </a:solidFill>
-          <a:ln w="12700">
-            <a:solidFill>
-              <a:srgbClr val="DB2777"/>
-            </a:solidFill>
-            <a:prstDash val="solid"/>
-          </a:ln>
-        </p:spPr>
-      </p:sp>
-      <p:sp>
-        <p:nvSpPr>
-          <p:cNvPr id="40" name="Text 38"/>
-          <p:cNvSpPr/>
-          <p:nvPr/>
-        </p:nvSpPr>
-        <p:spPr>
-          <a:xfrm>
-            <a:off x="2023872" y="4169664"/>
-            <a:ext cx="685800" cy="384048"/>
-          </a:xfrm>
-          <a:prstGeom prst="rect">
-            <a:avLst/>
-          </a:prstGeom>
-          <a:noFill/>
-          <a:ln/>
-        </p:spPr>
-        <p:txBody>
-          <a:bodyPr wrap="square" lIns="0" tIns="0" rIns="0" bIns="0" rtlCol="0" anchor="ctr"/>
-          <a:lstStyle/>
-          <a:p>
-            <a:pPr algn="ctr" indent="0" marL="0">
-              <a:buNone/>
-            </a:pPr>
-            <a:r>
-              <a:rPr lang="en-US" sz="900" b="1" dirty="0">
-                <a:solidFill>
-                  <a:srgbClr val="9D174D"/>
-                </a:solidFill>
-                <a:latin typeface="Trebuchet MS" pitchFamily="34" charset="0"/>
-                <a:ea typeface="Trebuchet MS" pitchFamily="34" charset="-122"/>
-                <a:cs typeface="Trebuchet MS" pitchFamily="34" charset="-120"/>
-              </a:rPr>
-              <a:t>u</a:t>
-            </a:r>
-            <a:endParaRPr lang="en-US" sz="900" dirty="0"/>
-          </a:p>
-        </p:txBody>
-      </p:sp>
-      <p:sp>
-        <p:nvSpPr>
-          <p:cNvPr id="41" name="Shape 39"/>
-          <p:cNvSpPr/>
-          <p:nvPr/>
-        </p:nvSpPr>
-        <p:spPr>
-          <a:xfrm>
-            <a:off x="2831592" y="4169664"/>
-            <a:ext cx="685800" cy="384048"/>
-          </a:xfrm>
-          <a:prstGeom prst="rect">
-            <a:avLst>
-              <a:gd name="adj" fmla="val 9524"/>
-            </a:avLst>
-          </a:prstGeom>
-          <a:solidFill>
-            <a:srgbClr val="FFFFFF"/>
-          </a:solidFill>
-          <a:ln w="12700">
-            <a:solidFill>
-              <a:srgbClr val="DB2777"/>
-            </a:solidFill>
-            <a:prstDash val="solid"/>
-          </a:ln>
-        </p:spPr>
-      </p:sp>
-      <p:sp>
-        <p:nvSpPr>
-          <p:cNvPr id="42" name="Text 40"/>
-          <p:cNvSpPr/>
-          <p:nvPr/>
-        </p:nvSpPr>
-        <p:spPr>
-          <a:xfrm>
-            <a:off x="2831592" y="4169664"/>
-            <a:ext cx="685800" cy="384048"/>
-          </a:xfrm>
-          <a:prstGeom prst="rect">
-            <a:avLst/>
-          </a:prstGeom>
-          <a:noFill/>
-          <a:ln/>
-        </p:spPr>
-        <p:txBody>
-          <a:bodyPr wrap="square" lIns="0" tIns="0" rIns="0" bIns="0" rtlCol="0" anchor="ctr"/>
-          <a:lstStyle/>
-          <a:p>
-            <a:pPr algn="ctr" indent="0" marL="0">
-              <a:buNone/>
-            </a:pPr>
-            <a:r>
-              <a:rPr lang="en-US" sz="900" b="1" dirty="0">
-                <a:solidFill>
-                  <a:srgbClr val="9D174D"/>
-                </a:solidFill>
-                <a:latin typeface="Trebuchet MS" pitchFamily="34" charset="0"/>
-                <a:ea typeface="Trebuchet MS" pitchFamily="34" charset="-122"/>
-                <a:cs typeface="Trebuchet MS" pitchFamily="34" charset="-120"/>
-              </a:rPr>
-              <a:t>n</a:t>
-            </a:r>
-            <a:endParaRPr lang="en-US" sz="900" dirty="0"/>
-          </a:p>
-        </p:txBody>
-      </p:sp>
-      <p:sp>
-        <p:nvSpPr>
-          <p:cNvPr id="43" name="Shape 41"/>
-          <p:cNvSpPr/>
-          <p:nvPr/>
-        </p:nvSpPr>
-        <p:spPr>
-          <a:xfrm>
-            <a:off x="3639312" y="4169664"/>
-            <a:ext cx="685800" cy="384048"/>
-          </a:xfrm>
-          <a:prstGeom prst="rect">
-            <a:avLst>
-              <a:gd name="adj" fmla="val 9524"/>
-            </a:avLst>
-          </a:prstGeom>
-          <a:solidFill>
-            <a:srgbClr val="FFFFFF"/>
-          </a:solidFill>
-          <a:ln w="12700">
-            <a:solidFill>
-              <a:srgbClr val="DB2777"/>
-            </a:solidFill>
-            <a:prstDash val="solid"/>
-          </a:ln>
-        </p:spPr>
-      </p:sp>
-      <p:sp>
-        <p:nvSpPr>
-          <p:cNvPr id="44" name="Text 42"/>
-          <p:cNvSpPr/>
-          <p:nvPr/>
-        </p:nvSpPr>
-        <p:spPr>
-          <a:xfrm>
-            <a:off x="3639312" y="4169664"/>
-            <a:ext cx="685800" cy="384048"/>
-          </a:xfrm>
-          <a:prstGeom prst="rect">
-            <a:avLst/>
-          </a:prstGeom>
-          <a:noFill/>
-          <a:ln/>
-        </p:spPr>
-        <p:txBody>
-          <a:bodyPr wrap="square" lIns="0" tIns="0" rIns="0" bIns="0" rtlCol="0" anchor="ctr"/>
-          <a:lstStyle/>
-          <a:p>
-            <a:pPr algn="ctr" indent="0" marL="0">
-              <a:buNone/>
-            </a:pPr>
-            <a:r>
-              <a:rPr lang="en-US" sz="900" b="1" dirty="0">
-                <a:solidFill>
-                  <a:srgbClr val="9D174D"/>
-                </a:solidFill>
-                <a:latin typeface="Trebuchet MS" pitchFamily="34" charset="0"/>
-                <a:ea typeface="Trebuchet MS" pitchFamily="34" charset="-122"/>
-                <a:cs typeface="Trebuchet MS" pitchFamily="34" charset="-120"/>
-              </a:rPr>
-              <a:t>gr</a:t>
-            </a:r>
-            <a:endParaRPr lang="en-US" sz="900" dirty="0"/>
-          </a:p>
-        </p:txBody>
-      </p:sp>
-      <p:sp>
-        <p:nvSpPr>
-          <p:cNvPr id="45" name="Shape 43"/>
-          <p:cNvSpPr/>
-          <p:nvPr/>
-        </p:nvSpPr>
-        <p:spPr>
-          <a:xfrm>
-            <a:off x="4447032" y="4169664"/>
-            <a:ext cx="685800" cy="384048"/>
-          </a:xfrm>
-          <a:prstGeom prst="rect">
-            <a:avLst>
-              <a:gd name="adj" fmla="val 9524"/>
-            </a:avLst>
-          </a:prstGeom>
-          <a:solidFill>
-            <a:srgbClr val="FFFFFF"/>
-          </a:solidFill>
-          <a:ln w="12700">
-            <a:solidFill>
-              <a:srgbClr val="DB2777"/>
-            </a:solidFill>
-            <a:prstDash val="solid"/>
-          </a:ln>
-        </p:spPr>
-      </p:sp>
-      <p:sp>
-        <p:nvSpPr>
-          <p:cNvPr id="46" name="Text 44"/>
-          <p:cNvSpPr/>
-          <p:nvPr/>
-        </p:nvSpPr>
-        <p:spPr>
-          <a:xfrm>
-            <a:off x="4447032" y="4169664"/>
-            <a:ext cx="685800" cy="384048"/>
-          </a:xfrm>
-          <a:prstGeom prst="rect">
-            <a:avLst/>
-          </a:prstGeom>
-          <a:noFill/>
-          <a:ln/>
-        </p:spPr>
-        <p:txBody>
-          <a:bodyPr wrap="square" lIns="0" tIns="0" rIns="0" bIns="0" rtlCol="0" anchor="ctr"/>
-          <a:lstStyle/>
-          <a:p>
-            <a:pPr algn="ctr" indent="0" marL="0">
-              <a:buNone/>
-            </a:pPr>
-            <a:r>
-              <a:rPr lang="en-US" sz="900" b="1" dirty="0">
-                <a:solidFill>
-                  <a:srgbClr val="9D174D"/>
-                </a:solidFill>
-                <a:latin typeface="Trebuchet MS" pitchFamily="34" charset="0"/>
-                <a:ea typeface="Trebuchet MS" pitchFamily="34" charset="-122"/>
-                <a:cs typeface="Trebuchet MS" pitchFamily="34" charset="-120"/>
-              </a:rPr>
-              <a:t>a</a:t>
-            </a:r>
-            <a:endParaRPr lang="en-US" sz="900" dirty="0"/>
-          </a:p>
-        </p:txBody>
-      </p:sp>
-      <p:sp>
-        <p:nvSpPr>
-          <p:cNvPr id="47" name="Shape 45"/>
-          <p:cNvSpPr/>
-          <p:nvPr/>
-        </p:nvSpPr>
-        <p:spPr>
-          <a:xfrm>
-            <a:off x="5254752" y="4169664"/>
-            <a:ext cx="685800" cy="384048"/>
-          </a:xfrm>
-          <a:prstGeom prst="rect">
-            <a:avLst>
-              <a:gd name="adj" fmla="val 9524"/>
-            </a:avLst>
-          </a:prstGeom>
-          <a:solidFill>
-            <a:srgbClr val="FFFFFF"/>
-          </a:solidFill>
-          <a:ln w="12700">
-            <a:solidFill>
-              <a:srgbClr val="DB2777"/>
-            </a:solidFill>
-            <a:prstDash val="solid"/>
-          </a:ln>
-        </p:spPr>
-      </p:sp>
-      <p:sp>
-        <p:nvSpPr>
-          <p:cNvPr id="48" name="Text 46"/>
-          <p:cNvSpPr/>
-          <p:nvPr/>
-        </p:nvSpPr>
-        <p:spPr>
-          <a:xfrm>
-            <a:off x="5254752" y="4169664"/>
-            <a:ext cx="685800" cy="384048"/>
-          </a:xfrm>
-          <a:prstGeom prst="rect">
-            <a:avLst/>
-          </a:prstGeom>
-          <a:noFill/>
-          <a:ln/>
-        </p:spPr>
-        <p:txBody>
-          <a:bodyPr wrap="square" lIns="0" tIns="0" rIns="0" bIns="0" rtlCol="0" anchor="ctr"/>
-          <a:lstStyle/>
-          <a:p>
-            <a:pPr algn="ctr" indent="0" marL="0">
-              <a:buNone/>
-            </a:pPr>
-            <a:r>
-              <a:rPr lang="en-US" sz="900" b="1" dirty="0">
-                <a:solidFill>
-                  <a:srgbClr val="9D174D"/>
-                </a:solidFill>
-                <a:latin typeface="Trebuchet MS" pitchFamily="34" charset="0"/>
-                <a:ea typeface="Trebuchet MS" pitchFamily="34" charset="-122"/>
-                <a:cs typeface="Trebuchet MS" pitchFamily="34" charset="-120"/>
-              </a:rPr>
-              <a:t>ce</a:t>
-            </a:r>
-            <a:endParaRPr lang="en-US" sz="900" dirty="0"/>
-          </a:p>
-        </p:txBody>
-      </p:sp>
-      <p:sp>
-        <p:nvSpPr>
-          <p:cNvPr id="49" name="Text 47"/>
-          <p:cNvSpPr/>
-          <p:nvPr/>
-        </p:nvSpPr>
-        <p:spPr>
-          <a:xfrm>
-            <a:off x="5254752" y="4572000"/>
-            <a:ext cx="685800" cy="219456"/>
-          </a:xfrm>
-          <a:prstGeom prst="rect">
-            <a:avLst/>
-          </a:prstGeom>
-          <a:noFill/>
-          <a:ln/>
-        </p:spPr>
-        <p:txBody>
-          <a:bodyPr wrap="square" lIns="0" tIns="0" rIns="0" bIns="0" rtlCol="0" anchor="t"/>
-          <a:lstStyle/>
-          <a:p>
-            <a:pPr algn="ctr" indent="0" marL="0">
-              <a:buNone/>
-            </a:pPr>
-            <a:r>
-              <a:rPr lang="en-US" sz="750" i="1" dirty="0">
-                <a:solidFill>
-                  <a:srgbClr val="94A3B8"/>
-                </a:solidFill>
-                <a:latin typeface="Calibri" pitchFamily="34" charset="0"/>
-                <a:ea typeface="Calibri" pitchFamily="34" charset="-122"/>
-                <a:cs typeface="Calibri" pitchFamily="34" charset="-120"/>
-              </a:rPr>
               <a:t>/s/</a:t>
             </a:r>
             <a:endParaRPr lang="en-US" sz="750" dirty="0"/>
-          </a:p>
-        </p:txBody>
-      </p:sp>
-      <p:sp>
-        <p:nvSpPr>
-          <p:cNvPr id="50" name="Shape 48"/>
-          <p:cNvSpPr/>
-          <p:nvPr/>
-        </p:nvSpPr>
-        <p:spPr>
-          <a:xfrm>
-            <a:off x="6062472" y="4169664"/>
-            <a:ext cx="685800" cy="384048"/>
-          </a:xfrm>
-          <a:prstGeom prst="rect">
-            <a:avLst>
-              <a:gd name="adj" fmla="val 9524"/>
-            </a:avLst>
-          </a:prstGeom>
-          <a:solidFill>
-            <a:srgbClr val="FFFFFF"/>
-          </a:solidFill>
-          <a:ln w="12700">
-            <a:solidFill>
-              <a:srgbClr val="DB2777"/>
-            </a:solidFill>
-            <a:prstDash val="solid"/>
-          </a:ln>
-        </p:spPr>
-      </p:sp>
-      <p:sp>
-        <p:nvSpPr>
-          <p:cNvPr id="51" name="Text 49"/>
-          <p:cNvSpPr/>
-          <p:nvPr/>
-        </p:nvSpPr>
-        <p:spPr>
-          <a:xfrm>
-            <a:off x="6062472" y="4169664"/>
-            <a:ext cx="685800" cy="384048"/>
-          </a:xfrm>
-          <a:prstGeom prst="rect">
-            <a:avLst/>
-          </a:prstGeom>
-          <a:noFill/>
-          <a:ln/>
-        </p:spPr>
-        <p:txBody>
-          <a:bodyPr wrap="square" lIns="0" tIns="0" rIns="0" bIns="0" rtlCol="0" anchor="ctr"/>
-          <a:lstStyle/>
-          <a:p>
-            <a:pPr algn="ctr" indent="0" marL="0">
-              <a:buNone/>
-            </a:pPr>
-            <a:r>
-              <a:rPr lang="en-US" sz="900" b="1" dirty="0">
-                <a:solidFill>
-                  <a:srgbClr val="9D174D"/>
-                </a:solidFill>
-                <a:latin typeface="Trebuchet MS" pitchFamily="34" charset="0"/>
-                <a:ea typeface="Trebuchet MS" pitchFamily="34" charset="-122"/>
-                <a:cs typeface="Trebuchet MS" pitchFamily="34" charset="-120"/>
-              </a:rPr>
-              <a:t>f</a:t>
-            </a:r>
-            <a:endParaRPr lang="en-US" sz="900" dirty="0"/>
-          </a:p>
-        </p:txBody>
-      </p:sp>
-      <p:sp>
-        <p:nvSpPr>
-          <p:cNvPr id="52" name="Shape 50"/>
-          <p:cNvSpPr/>
-          <p:nvPr/>
-        </p:nvSpPr>
-        <p:spPr>
-          <a:xfrm>
-            <a:off x="6870192" y="4169664"/>
-            <a:ext cx="685800" cy="384048"/>
-          </a:xfrm>
-          <a:prstGeom prst="rect">
-            <a:avLst>
-              <a:gd name="adj" fmla="val 9524"/>
-            </a:avLst>
-          </a:prstGeom>
-          <a:solidFill>
-            <a:srgbClr val="FFFFFF"/>
-          </a:solidFill>
-          <a:ln w="12700">
-            <a:solidFill>
-              <a:srgbClr val="DB2777"/>
-            </a:solidFill>
-            <a:prstDash val="solid"/>
-          </a:ln>
-        </p:spPr>
-      </p:sp>
-      <p:sp>
-        <p:nvSpPr>
-          <p:cNvPr id="53" name="Text 51"/>
-          <p:cNvSpPr/>
-          <p:nvPr/>
-        </p:nvSpPr>
-        <p:spPr>
-          <a:xfrm>
-            <a:off x="6870192" y="4169664"/>
-            <a:ext cx="685800" cy="384048"/>
-          </a:xfrm>
-          <a:prstGeom prst="rect">
-            <a:avLst/>
-          </a:prstGeom>
-          <a:noFill/>
-          <a:ln/>
-        </p:spPr>
-        <p:txBody>
-          <a:bodyPr wrap="square" lIns="0" tIns="0" rIns="0" bIns="0" rtlCol="0" anchor="ctr"/>
-          <a:lstStyle/>
-          <a:p>
-            <a:pPr algn="ctr" indent="0" marL="0">
-              <a:buNone/>
-            </a:pPr>
-            <a:r>
-              <a:rPr lang="en-US" sz="900" b="1" dirty="0">
-                <a:solidFill>
-                  <a:srgbClr val="9D174D"/>
-                </a:solidFill>
-                <a:latin typeface="Trebuchet MS" pitchFamily="34" charset="0"/>
-                <a:ea typeface="Trebuchet MS" pitchFamily="34" charset="-122"/>
-                <a:cs typeface="Trebuchet MS" pitchFamily="34" charset="-120"/>
-              </a:rPr>
-              <a:t>u</a:t>
-            </a:r>
-            <a:endParaRPr lang="en-US" sz="900" dirty="0"/>
-          </a:p>
-        </p:txBody>
-      </p:sp>
-      <p:sp>
-        <p:nvSpPr>
-          <p:cNvPr id="54" name="Shape 52"/>
-          <p:cNvSpPr/>
-          <p:nvPr/>
-        </p:nvSpPr>
-        <p:spPr>
-          <a:xfrm>
-            <a:off x="7677912" y="4169664"/>
-            <a:ext cx="685800" cy="384048"/>
-          </a:xfrm>
-          <a:prstGeom prst="rect">
-            <a:avLst>
-              <a:gd name="adj" fmla="val 9524"/>
-            </a:avLst>
-          </a:prstGeom>
-          <a:solidFill>
-            <a:srgbClr val="FFFFFF"/>
-          </a:solidFill>
-          <a:ln w="12700">
-            <a:solidFill>
-              <a:srgbClr val="DB2777"/>
-            </a:solidFill>
-            <a:prstDash val="solid"/>
-          </a:ln>
-        </p:spPr>
-      </p:sp>
-      <p:sp>
-        <p:nvSpPr>
-          <p:cNvPr id="55" name="Text 53"/>
-          <p:cNvSpPr/>
-          <p:nvPr/>
-        </p:nvSpPr>
-        <p:spPr>
-          <a:xfrm>
-            <a:off x="7677912" y="4169664"/>
-            <a:ext cx="685800" cy="384048"/>
-          </a:xfrm>
-          <a:prstGeom prst="rect">
-            <a:avLst/>
-          </a:prstGeom>
-          <a:noFill/>
-          <a:ln/>
-        </p:spPr>
-        <p:txBody>
-          <a:bodyPr wrap="square" lIns="0" tIns="0" rIns="0" bIns="0" rtlCol="0" anchor="ctr"/>
-          <a:lstStyle/>
-          <a:p>
-            <a:pPr algn="ctr" indent="0" marL="0">
-              <a:buNone/>
-            </a:pPr>
-            <a:r>
-              <a:rPr lang="en-US" sz="900" b="1" dirty="0">
-                <a:solidFill>
-                  <a:srgbClr val="9D174D"/>
-                </a:solidFill>
-                <a:latin typeface="Trebuchet MS" pitchFamily="34" charset="0"/>
-                <a:ea typeface="Trebuchet MS" pitchFamily="34" charset="-122"/>
-                <a:cs typeface="Trebuchet MS" pitchFamily="34" charset="-120"/>
-              </a:rPr>
-              <a:t>l</a:t>
-            </a:r>
-            <a:endParaRPr lang="en-US" sz="900" dirty="0"/>
           </a:p>
         </p:txBody>
       </p:sp>
@@ -16825,7 +16147,7 @@
                 <a:ea typeface="Calibri" pitchFamily="34" charset="-122"/>
                 <a:cs typeface="Calibri" pitchFamily="34" charset="-120"/>
               </a:rPr>
-              <a:t>Word Labs  •  wordlabs.app  •  Root: 'grace' = elegance, beauty, divine favour</a:t>
+              <a:t>Word Labs  •  wordlabs.app  •  Root: 'grace' = elegance, favour, goodwill</a:t>
             </a:r>
             <a:endParaRPr lang="en-US" sz="800" dirty="0"/>
           </a:p>
@@ -17465,7 +16787,7 @@
                 <a:ea typeface="Calibri" pitchFamily="34" charset="-122"/>
                 <a:cs typeface="Calibri" pitchFamily="34" charset="-120"/>
               </a:rPr>
-              <a:t>Word Labs  •  wordlabs.app  •  Root: 'grace' = elegance, beauty, divine favour</a:t>
+              <a:t>Word Labs  •  wordlabs.app  •  Root: 'grace' = elegance, favour, goodwill</a:t>
             </a:r>
             <a:endParaRPr lang="en-US" sz="800" dirty="0"/>
           </a:p>
@@ -17577,7 +16899,7 @@
                 <a:ea typeface="Calibri" pitchFamily="34" charset="-122"/>
                 <a:cs typeface="Calibri" pitchFamily="34" charset="-120"/>
               </a:rPr>
-              <a:t>The </a:t>
+              <a:t>Acting </a:t>
             </a:r>
             <a:pPr algn="l" indent="0" marL="0">
               <a:buNone/>
@@ -17594,7 +16916,7 @@
                 <a:ea typeface="Calibri" pitchFamily="34" charset="-122"/>
                 <a:cs typeface="Calibri" pitchFamily="34" charset="-120"/>
               </a:rPr>
-              <a:t>gracious</a:t>
+              <a:t>graciously</a:t>
             </a:r>
             <a:pPr algn="l" indent="0" marL="0">
               <a:buNone/>
@@ -17608,7 +16930,7 @@
                 <a:ea typeface="Calibri" pitchFamily="34" charset="-122"/>
                 <a:cs typeface="Calibri" pitchFamily="34" charset="-120"/>
               </a:rPr>
-              <a:t> judge smiled as the </a:t>
+              <a:t> toward others is admirable; behaving </a:t>
             </a:r>
             <a:pPr algn="l" indent="0" marL="0">
               <a:buNone/>
@@ -17625,7 +16947,7 @@
                 <a:ea typeface="Calibri" pitchFamily="34" charset="-122"/>
                 <a:cs typeface="Calibri" pitchFamily="34" charset="-120"/>
               </a:rPr>
-              <a:t>graceful</a:t>
+              <a:t>gracelessly</a:t>
             </a:r>
             <a:pPr algn="l" indent="0" marL="0">
               <a:buNone/>
@@ -17639,7 +16961,7 @@
                 <a:ea typeface="Calibri" pitchFamily="34" charset="-122"/>
                 <a:cs typeface="Calibri" pitchFamily="34" charset="-120"/>
               </a:rPr>
-              <a:t> gymnast bowed, though her teammate's </a:t>
+              <a:t>, however, is truly </a:t>
             </a:r>
             <a:pPr algn="l" indent="0" marL="0">
               <a:buNone/>
@@ -17656,7 +16978,7 @@
                 <a:ea typeface="Calibri" pitchFamily="34" charset="-122"/>
                 <a:cs typeface="Calibri" pitchFamily="34" charset="-120"/>
               </a:rPr>
-              <a:t>graceless</a:t>
+              <a:t>disgraceful</a:t>
             </a:r>
             <a:pPr algn="l" indent="0" marL="0">
               <a:buNone/>
@@ -17670,7 +16992,7 @@
                 <a:ea typeface="Calibri" pitchFamily="34" charset="-122"/>
                 <a:cs typeface="Calibri" pitchFamily="34" charset="-120"/>
               </a:rPr>
-              <a:t> stumble made the crowd gasp.</a:t>
+              <a:t>.</a:t>
             </a:r>
             <a:endParaRPr lang="en-US" sz="1800" dirty="0"/>
           </a:p>
@@ -17825,7 +17147,7 @@
                 <a:ea typeface="Trebuchet MS" pitchFamily="34" charset="-122"/>
                 <a:cs typeface="Trebuchet MS" pitchFamily="34" charset="-120"/>
               </a:rPr>
-              <a:t>gracious</a:t>
+              <a:t>graciously</a:t>
             </a:r>
             <a:endParaRPr lang="en-US" sz="1400" dirty="0"/>
           </a:p>
@@ -17953,7 +17275,7 @@
                 <a:ea typeface="Trebuchet MS" pitchFamily="34" charset="-122"/>
                 <a:cs typeface="Trebuchet MS" pitchFamily="34" charset="-120"/>
               </a:rPr>
-              <a:t>graceful</a:t>
+              <a:t>gracelessly</a:t>
             </a:r>
             <a:endParaRPr lang="en-US" sz="1400" dirty="0"/>
           </a:p>
@@ -18081,7 +17403,7 @@
                 <a:ea typeface="Trebuchet MS" pitchFamily="34" charset="-122"/>
                 <a:cs typeface="Trebuchet MS" pitchFamily="34" charset="-120"/>
               </a:rPr>
-              <a:t>graceless</a:t>
+              <a:t>disgraceful</a:t>
             </a:r>
             <a:endParaRPr lang="en-US" sz="1400" dirty="0"/>
           </a:p>
@@ -18412,7 +17734,7 @@
                 <a:ea typeface="Calibri" pitchFamily="34" charset="-122"/>
                 <a:cs typeface="Calibri" pitchFamily="34" charset="-120"/>
               </a:rPr>
-              <a:t>Word Labs  •  wordlabs.app  •  Root: 'grace' = elegance, beauty, divine favour</a:t>
+              <a:t>Word Labs  •  wordlabs.app  •  Root: 'grace' = elegance, favour, goodwill</a:t>
             </a:r>
             <a:endParaRPr lang="en-US" sz="800" dirty="0"/>
           </a:p>
@@ -18551,7 +17873,7 @@
                 <a:ea typeface="Trebuchet MS" pitchFamily="34" charset="-122"/>
                 <a:cs typeface="Trebuchet MS" pitchFamily="34" charset="-120"/>
               </a:rPr>
-              <a:t>gracious</a:t>
+              <a:t>graciously</a:t>
             </a:r>
             <a:endParaRPr lang="en-US" sz="2800" dirty="0"/>
           </a:p>
@@ -19239,7 +18561,7 @@
                 <a:ea typeface="Calibri" pitchFamily="34" charset="-122"/>
                 <a:cs typeface="Calibri" pitchFamily="34" charset="-120"/>
               </a:rPr>
-              <a:t>Word Labs  •  wordlabs.app  •  Root: 'grace' = elegance, beauty, divine favour</a:t>
+              <a:t>Word Labs  •  wordlabs.app  •  Root: 'grace' = elegance, favour, goodwill</a:t>
             </a:r>
             <a:endParaRPr lang="en-US" sz="800" dirty="0"/>
           </a:p>
@@ -19378,7 +18700,7 @@
                 <a:ea typeface="Trebuchet MS" pitchFamily="34" charset="-122"/>
                 <a:cs typeface="Trebuchet MS" pitchFamily="34" charset="-120"/>
               </a:rPr>
-              <a:t>gracious</a:t>
+              <a:t>graciously</a:t>
             </a:r>
             <a:endParaRPr lang="en-US" sz="2800" dirty="0"/>
           </a:p>
@@ -19458,7 +18780,7 @@
         </p:nvSpPr>
         <p:spPr>
           <a:xfrm>
-            <a:off x="2938272" y="2258568"/>
+            <a:off x="2221992" y="2258568"/>
             <a:ext cx="1828800" cy="292608"/>
           </a:xfrm>
           <a:prstGeom prst="rect">
@@ -19492,7 +18814,7 @@
         </p:nvSpPr>
         <p:spPr>
           <a:xfrm>
-            <a:off x="2938272" y="2258568"/>
+            <a:off x="2221992" y="2258568"/>
             <a:ext cx="1828800" cy="292608"/>
           </a:xfrm>
           <a:prstGeom prst="rect">
@@ -19531,7 +18853,7 @@
         </p:nvSpPr>
         <p:spPr>
           <a:xfrm>
-            <a:off x="2938272" y="2569464"/>
+            <a:off x="2221992" y="2569464"/>
             <a:ext cx="1828800" cy="201168"/>
           </a:xfrm>
           <a:prstGeom prst="rect">
@@ -19556,7 +18878,7 @@
                 <a:ea typeface="Calibri" pitchFamily="34" charset="-122"/>
                 <a:cs typeface="Calibri" pitchFamily="34" charset="-120"/>
               </a:rPr>
-              <a:t>elegance, beauty</a:t>
+              <a:t>elegance, beauty, favour</a:t>
             </a:r>
             <a:endParaRPr lang="en-US" sz="850" dirty="0"/>
           </a:p>
@@ -19570,7 +18892,7 @@
         </p:nvSpPr>
         <p:spPr>
           <a:xfrm>
-            <a:off x="5803392" y="2258568"/>
+            <a:off x="4370832" y="2258568"/>
             <a:ext cx="1828800" cy="292608"/>
           </a:xfrm>
           <a:prstGeom prst="rect">
@@ -19604,7 +18926,7 @@
         </p:nvSpPr>
         <p:spPr>
           <a:xfrm>
-            <a:off x="5803392" y="2258568"/>
+            <a:off x="4370832" y="2258568"/>
             <a:ext cx="1828800" cy="292608"/>
           </a:xfrm>
           <a:prstGeom prst="rect">
@@ -19629,7 +18951,7 @@
                 <a:ea typeface="Trebuchet MS" pitchFamily="34" charset="-122"/>
                 <a:cs typeface="Trebuchet MS" pitchFamily="34" charset="-120"/>
               </a:rPr>
-              <a:t>ous</a:t>
+              <a:t>ious</a:t>
             </a:r>
             <a:endParaRPr lang="en-US" sz="1300" dirty="0"/>
           </a:p>
@@ -19643,7 +18965,7 @@
         </p:nvSpPr>
         <p:spPr>
           <a:xfrm>
-            <a:off x="5803392" y="2569464"/>
+            <a:off x="4370832" y="2569464"/>
             <a:ext cx="1828800" cy="201168"/>
           </a:xfrm>
           <a:prstGeom prst="rect">
@@ -19676,14 +18998,87 @@
       </p:sp>
       <p:sp>
         <p:nvSpPr>
-          <p:cNvPr id="22" name="Text 20"/>
-          <p:cNvSpPr/>
-          <p:nvPr/>
-        </p:nvSpPr>
-        <p:spPr>
-          <a:xfrm>
-            <a:off x="5803392" y="2752344"/>
-            <a:ext cx="1828800" cy="182880"/>
+          <p:cNvPr id="22" name="Shape 20"/>
+          <p:cNvSpPr/>
+          <p:nvPr/>
+        </p:nvSpPr>
+        <p:spPr>
+          <a:xfrm>
+            <a:off x="6519672" y="2258568"/>
+            <a:ext cx="1828800" cy="292608"/>
+          </a:xfrm>
+          <a:prstGeom prst="rect">
+            <a:avLst>
+              <a:gd name="adj" fmla="val 25000"/>
+            </a:avLst>
+          </a:prstGeom>
+          <a:solidFill>
+            <a:srgbClr val="FCE7F3"/>
+          </a:solidFill>
+          <a:ln w="19050">
+            <a:solidFill>
+              <a:srgbClr val="DB2777"/>
+            </a:solidFill>
+            <a:prstDash val="solid"/>
+          </a:ln>
+          <a:effectLst>
+            <a:outerShdw sx="100000" sy="100000" kx="0" ky="0" algn="bl" rotWithShape="0" blurRad="101600" dist="38100" dir="8100000">
+              <a:srgbClr val="000000">
+                <a:alpha val="12000"/>
+              </a:srgbClr>
+            </a:outerShdw>
+          </a:effectLst>
+        </p:spPr>
+      </p:sp>
+      <p:sp>
+        <p:nvSpPr>
+          <p:cNvPr id="23" name="Text 21"/>
+          <p:cNvSpPr/>
+          <p:nvPr/>
+        </p:nvSpPr>
+        <p:spPr>
+          <a:xfrm>
+            <a:off x="6519672" y="2258568"/>
+            <a:ext cx="1828800" cy="292608"/>
+          </a:xfrm>
+          <a:prstGeom prst="rect">
+            <a:avLst/>
+          </a:prstGeom>
+          <a:noFill/>
+          <a:ln/>
+        </p:spPr>
+        <p:txBody>
+          <a:bodyPr wrap="square" lIns="0" tIns="0" rIns="0" bIns="0" rtlCol="0" anchor="ctr"/>
+          <a:lstStyle/>
+          <a:p>
+            <a:pPr algn="ctr" indent="0" marL="0">
+              <a:buNone/>
+            </a:pPr>
+            <a:r>
+              <a:rPr lang="en-US" sz="1300" b="1" dirty="0">
+                <a:solidFill>
+                  <a:srgbClr val="9D174D"/>
+                </a:solidFill>
+                <a:latin typeface="Trebuchet MS" pitchFamily="34" charset="0"/>
+                <a:ea typeface="Trebuchet MS" pitchFamily="34" charset="-122"/>
+                <a:cs typeface="Trebuchet MS" pitchFamily="34" charset="-120"/>
+              </a:rPr>
+              <a:t>ly</a:t>
+            </a:r>
+            <a:endParaRPr lang="en-US" sz="1300" dirty="0"/>
+          </a:p>
+        </p:txBody>
+      </p:sp>
+      <p:sp>
+        <p:nvSpPr>
+          <p:cNvPr id="24" name="Text 22"/>
+          <p:cNvSpPr/>
+          <p:nvPr/>
+        </p:nvSpPr>
+        <p:spPr>
+          <a:xfrm>
+            <a:off x="6519672" y="2569464"/>
+            <a:ext cx="1828800" cy="201168"/>
           </a:xfrm>
           <a:prstGeom prst="rect">
             <a:avLst/>
@@ -19699,23 +19094,23 @@
               <a:buNone/>
             </a:pPr>
             <a:r>
-              <a:rPr lang="en-US" sz="700" i="1" dirty="0">
-                <a:solidFill>
-                  <a:srgbClr val="94A3B8"/>
+              <a:rPr lang="en-US" sz="850" dirty="0">
+                <a:solidFill>
+                  <a:srgbClr val="475569"/>
                 </a:solidFill>
                 <a:latin typeface="Calibri" pitchFamily="34" charset="0"/>
                 <a:ea typeface="Calibri" pitchFamily="34" charset="-122"/>
                 <a:cs typeface="Calibri" pitchFamily="34" charset="-120"/>
               </a:rPr>
-              <a:t>'e' dropped before vowel suffix</a:t>
-            </a:r>
-            <a:endParaRPr lang="en-US" sz="700" dirty="0"/>
-          </a:p>
-        </p:txBody>
-      </p:sp>
-      <p:sp>
-        <p:nvSpPr>
-          <p:cNvPr id="23" name="Shape 21"/>
+              <a:t>in a certain way</a:t>
+            </a:r>
+            <a:endParaRPr lang="en-US" sz="850" dirty="0"/>
+          </a:p>
+        </p:txBody>
+      </p:sp>
+      <p:sp>
+        <p:nvSpPr>
+          <p:cNvPr id="25" name="Shape 23"/>
           <p:cNvSpPr/>
           <p:nvPr/>
         </p:nvSpPr>
@@ -19742,7 +19137,7 @@
       </p:sp>
       <p:sp>
         <p:nvSpPr>
-          <p:cNvPr id="24" name="Text 22"/>
+          <p:cNvPr id="26" name="Text 24"/>
           <p:cNvSpPr/>
           <p:nvPr/>
         </p:nvSpPr>
@@ -19781,7 +19176,7 @@
       </p:sp>
       <p:sp>
         <p:nvSpPr>
-          <p:cNvPr id="25" name="Shape 23"/>
+          <p:cNvPr id="27" name="Shape 25"/>
           <p:cNvSpPr/>
           <p:nvPr/>
         </p:nvSpPr>
@@ -19808,7 +19203,7 @@
       </p:sp>
       <p:sp>
         <p:nvSpPr>
-          <p:cNvPr id="26" name="Text 24"/>
+          <p:cNvPr id="28" name="Text 26"/>
           <p:cNvSpPr/>
           <p:nvPr/>
         </p:nvSpPr>
@@ -19847,7 +19242,7 @@
       </p:sp>
       <p:sp>
         <p:nvSpPr>
-          <p:cNvPr id="27" name="Shape 25"/>
+          <p:cNvPr id="29" name="Shape 27"/>
           <p:cNvSpPr/>
           <p:nvPr/>
         </p:nvSpPr>
@@ -19874,7 +19269,7 @@
       </p:sp>
       <p:sp>
         <p:nvSpPr>
-          <p:cNvPr id="28" name="Text 26"/>
+          <p:cNvPr id="30" name="Text 28"/>
           <p:cNvSpPr/>
           <p:nvPr/>
         </p:nvSpPr>
@@ -19913,7 +19308,7 @@
       </p:sp>
       <p:sp>
         <p:nvSpPr>
-          <p:cNvPr id="29" name="Shape 27"/>
+          <p:cNvPr id="31" name="Shape 29"/>
           <p:cNvSpPr/>
           <p:nvPr/>
         </p:nvSpPr>
@@ -19940,7 +19335,7 @@
       </p:sp>
       <p:sp>
         <p:nvSpPr>
-          <p:cNvPr id="30" name="Text 28"/>
+          <p:cNvPr id="32" name="Text 30"/>
           <p:cNvSpPr/>
           <p:nvPr/>
         </p:nvSpPr>
@@ -20263,7 +19658,7 @@
                 <a:ea typeface="Calibri" pitchFamily="34" charset="-122"/>
                 <a:cs typeface="Calibri" pitchFamily="34" charset="-120"/>
               </a:rPr>
-              <a:t>Word Labs  •  wordlabs.app  •  Root: 'grace' = elegance, beauty, divine favour</a:t>
+              <a:t>Word Labs  •  wordlabs.app  •  Root: 'grace' = elegance, favour, goodwill</a:t>
             </a:r>
             <a:endParaRPr lang="en-US" sz="800" dirty="0"/>
           </a:p>
@@ -20402,7 +19797,7 @@
                 <a:ea typeface="Trebuchet MS" pitchFamily="34" charset="-122"/>
                 <a:cs typeface="Trebuchet MS" pitchFamily="34" charset="-120"/>
               </a:rPr>
-              <a:t>gracious</a:t>
+              <a:t>graciously</a:t>
             </a:r>
             <a:endParaRPr lang="en-US" sz="2800" dirty="0"/>
           </a:p>
@@ -20482,7 +19877,7 @@
         </p:nvSpPr>
         <p:spPr>
           <a:xfrm>
-            <a:off x="2938272" y="2258568"/>
+            <a:off x="2221992" y="2258568"/>
             <a:ext cx="1828800" cy="292608"/>
           </a:xfrm>
           <a:prstGeom prst="rect">
@@ -20516,7 +19911,7 @@
         </p:nvSpPr>
         <p:spPr>
           <a:xfrm>
-            <a:off x="2938272" y="2258568"/>
+            <a:off x="2221992" y="2258568"/>
             <a:ext cx="1828800" cy="292608"/>
           </a:xfrm>
           <a:prstGeom prst="rect">
@@ -20555,7 +19950,7 @@
         </p:nvSpPr>
         <p:spPr>
           <a:xfrm>
-            <a:off x="2938272" y="2569464"/>
+            <a:off x="2221992" y="2569464"/>
             <a:ext cx="1828800" cy="201168"/>
           </a:xfrm>
           <a:prstGeom prst="rect">
@@ -20580,7 +19975,7 @@
                 <a:ea typeface="Calibri" pitchFamily="34" charset="-122"/>
                 <a:cs typeface="Calibri" pitchFamily="34" charset="-120"/>
               </a:rPr>
-              <a:t>elegance, beauty</a:t>
+              <a:t>elegance, beauty, favour</a:t>
             </a:r>
             <a:endParaRPr lang="en-US" sz="850" dirty="0"/>
           </a:p>
@@ -20594,7 +19989,7 @@
         </p:nvSpPr>
         <p:spPr>
           <a:xfrm>
-            <a:off x="5803392" y="2258568"/>
+            <a:off x="4370832" y="2258568"/>
             <a:ext cx="1828800" cy="292608"/>
           </a:xfrm>
           <a:prstGeom prst="rect">
@@ -20628,7 +20023,7 @@
         </p:nvSpPr>
         <p:spPr>
           <a:xfrm>
-            <a:off x="5803392" y="2258568"/>
+            <a:off x="4370832" y="2258568"/>
             <a:ext cx="1828800" cy="292608"/>
           </a:xfrm>
           <a:prstGeom prst="rect">
@@ -20653,7 +20048,7 @@
                 <a:ea typeface="Trebuchet MS" pitchFamily="34" charset="-122"/>
                 <a:cs typeface="Trebuchet MS" pitchFamily="34" charset="-120"/>
               </a:rPr>
-              <a:t>ous</a:t>
+              <a:t>ious</a:t>
             </a:r>
             <a:endParaRPr lang="en-US" sz="1300" dirty="0"/>
           </a:p>
@@ -20667,7 +20062,7 @@
         </p:nvSpPr>
         <p:spPr>
           <a:xfrm>
-            <a:off x="5803392" y="2569464"/>
+            <a:off x="4370832" y="2569464"/>
             <a:ext cx="1828800" cy="201168"/>
           </a:xfrm>
           <a:prstGeom prst="rect">
@@ -20700,14 +20095,87 @@
       </p:sp>
       <p:sp>
         <p:nvSpPr>
-          <p:cNvPr id="22" name="Text 20"/>
-          <p:cNvSpPr/>
-          <p:nvPr/>
-        </p:nvSpPr>
-        <p:spPr>
-          <a:xfrm>
-            <a:off x="5803392" y="2752344"/>
-            <a:ext cx="1828800" cy="182880"/>
+          <p:cNvPr id="22" name="Shape 20"/>
+          <p:cNvSpPr/>
+          <p:nvPr/>
+        </p:nvSpPr>
+        <p:spPr>
+          <a:xfrm>
+            <a:off x="6519672" y="2258568"/>
+            <a:ext cx="1828800" cy="292608"/>
+          </a:xfrm>
+          <a:prstGeom prst="rect">
+            <a:avLst>
+              <a:gd name="adj" fmla="val 25000"/>
+            </a:avLst>
+          </a:prstGeom>
+          <a:solidFill>
+            <a:srgbClr val="FCE7F3"/>
+          </a:solidFill>
+          <a:ln w="19050">
+            <a:solidFill>
+              <a:srgbClr val="DB2777"/>
+            </a:solidFill>
+            <a:prstDash val="solid"/>
+          </a:ln>
+          <a:effectLst>
+            <a:outerShdw sx="100000" sy="100000" kx="0" ky="0" algn="bl" rotWithShape="0" blurRad="101600" dist="38100" dir="8100000">
+              <a:srgbClr val="000000">
+                <a:alpha val="12000"/>
+              </a:srgbClr>
+            </a:outerShdw>
+          </a:effectLst>
+        </p:spPr>
+      </p:sp>
+      <p:sp>
+        <p:nvSpPr>
+          <p:cNvPr id="23" name="Text 21"/>
+          <p:cNvSpPr/>
+          <p:nvPr/>
+        </p:nvSpPr>
+        <p:spPr>
+          <a:xfrm>
+            <a:off x="6519672" y="2258568"/>
+            <a:ext cx="1828800" cy="292608"/>
+          </a:xfrm>
+          <a:prstGeom prst="rect">
+            <a:avLst/>
+          </a:prstGeom>
+          <a:noFill/>
+          <a:ln/>
+        </p:spPr>
+        <p:txBody>
+          <a:bodyPr wrap="square" lIns="0" tIns="0" rIns="0" bIns="0" rtlCol="0" anchor="ctr"/>
+          <a:lstStyle/>
+          <a:p>
+            <a:pPr algn="ctr" indent="0" marL="0">
+              <a:buNone/>
+            </a:pPr>
+            <a:r>
+              <a:rPr lang="en-US" sz="1300" b="1" dirty="0">
+                <a:solidFill>
+                  <a:srgbClr val="9D174D"/>
+                </a:solidFill>
+                <a:latin typeface="Trebuchet MS" pitchFamily="34" charset="0"/>
+                <a:ea typeface="Trebuchet MS" pitchFamily="34" charset="-122"/>
+                <a:cs typeface="Trebuchet MS" pitchFamily="34" charset="-120"/>
+              </a:rPr>
+              <a:t>ly</a:t>
+            </a:r>
+            <a:endParaRPr lang="en-US" sz="1300" dirty="0"/>
+          </a:p>
+        </p:txBody>
+      </p:sp>
+      <p:sp>
+        <p:nvSpPr>
+          <p:cNvPr id="24" name="Text 22"/>
+          <p:cNvSpPr/>
+          <p:nvPr/>
+        </p:nvSpPr>
+        <p:spPr>
+          <a:xfrm>
+            <a:off x="6519672" y="2569464"/>
+            <a:ext cx="1828800" cy="201168"/>
           </a:xfrm>
           <a:prstGeom prst="rect">
             <a:avLst/>
@@ -20723,23 +20191,23 @@
               <a:buNone/>
             </a:pPr>
             <a:r>
-              <a:rPr lang="en-US" sz="700" i="1" dirty="0">
-                <a:solidFill>
-                  <a:srgbClr val="94A3B8"/>
+              <a:rPr lang="en-US" sz="850" dirty="0">
+                <a:solidFill>
+                  <a:srgbClr val="475569"/>
                 </a:solidFill>
                 <a:latin typeface="Calibri" pitchFamily="34" charset="0"/>
                 <a:ea typeface="Calibri" pitchFamily="34" charset="-122"/>
                 <a:cs typeface="Calibri" pitchFamily="34" charset="-120"/>
               </a:rPr>
-              <a:t>'e' dropped before vowel suffix</a:t>
-            </a:r>
-            <a:endParaRPr lang="en-US" sz="700" dirty="0"/>
-          </a:p>
-        </p:txBody>
-      </p:sp>
-      <p:sp>
-        <p:nvSpPr>
-          <p:cNvPr id="23" name="Shape 21"/>
+              <a:t>in a certain way</a:t>
+            </a:r>
+            <a:endParaRPr lang="en-US" sz="850" dirty="0"/>
+          </a:p>
+        </p:txBody>
+      </p:sp>
+      <p:sp>
+        <p:nvSpPr>
+          <p:cNvPr id="25" name="Shape 23"/>
           <p:cNvSpPr/>
           <p:nvPr/>
         </p:nvSpPr>
@@ -20766,7 +20234,7 @@
       </p:sp>
       <p:sp>
         <p:nvSpPr>
-          <p:cNvPr id="24" name="Text 22"/>
+          <p:cNvPr id="26" name="Text 24"/>
           <p:cNvSpPr/>
           <p:nvPr/>
         </p:nvSpPr>
@@ -20805,7 +20273,7 @@
       </p:sp>
       <p:sp>
         <p:nvSpPr>
-          <p:cNvPr id="25" name="Shape 23"/>
+          <p:cNvPr id="27" name="Shape 25"/>
           <p:cNvSpPr/>
           <p:nvPr/>
         </p:nvSpPr>
@@ -20832,13 +20300,13 @@
       </p:sp>
       <p:sp>
         <p:nvSpPr>
-          <p:cNvPr id="26" name="Shape 24"/>
-          <p:cNvSpPr/>
-          <p:nvPr/>
-        </p:nvSpPr>
-        <p:spPr>
-          <a:xfrm>
-            <a:off x="2999232" y="3364992"/>
+          <p:cNvPr id="28" name="Shape 26"/>
+          <p:cNvSpPr/>
+          <p:nvPr/>
+        </p:nvSpPr>
+        <p:spPr>
+          <a:xfrm>
+            <a:off x="2313432" y="3364992"/>
             <a:ext cx="1645920" cy="475488"/>
           </a:xfrm>
           <a:prstGeom prst="rect">
@@ -20859,13 +20327,13 @@
       </p:sp>
       <p:sp>
         <p:nvSpPr>
-          <p:cNvPr id="27" name="Text 25"/>
-          <p:cNvSpPr/>
-          <p:nvPr/>
-        </p:nvSpPr>
-        <p:spPr>
-          <a:xfrm>
-            <a:off x="2999232" y="3364992"/>
+          <p:cNvPr id="29" name="Text 27"/>
+          <p:cNvSpPr/>
+          <p:nvPr/>
+        </p:nvSpPr>
+        <p:spPr>
+          <a:xfrm>
+            <a:off x="2313432" y="3364992"/>
             <a:ext cx="1645920" cy="475488"/>
           </a:xfrm>
           <a:prstGeom prst="rect">
@@ -20898,14 +20366,14 @@
       </p:sp>
       <p:sp>
         <p:nvSpPr>
-          <p:cNvPr id="28" name="Text 26"/>
-          <p:cNvSpPr/>
-          <p:nvPr/>
-        </p:nvSpPr>
-        <p:spPr>
-          <a:xfrm>
-            <a:off x="4645152" y="3364992"/>
-            <a:ext cx="1097280" cy="475488"/>
+          <p:cNvPr id="30" name="Text 28"/>
+          <p:cNvSpPr/>
+          <p:nvPr/>
+        </p:nvSpPr>
+        <p:spPr>
+          <a:xfrm>
+            <a:off x="3959352" y="3364992"/>
+            <a:ext cx="411480" cy="475488"/>
           </a:xfrm>
           <a:prstGeom prst="rect">
             <a:avLst/>
@@ -20937,13 +20405,13 @@
       </p:sp>
       <p:sp>
         <p:nvSpPr>
-          <p:cNvPr id="29" name="Shape 27"/>
-          <p:cNvSpPr/>
-          <p:nvPr/>
-        </p:nvSpPr>
-        <p:spPr>
-          <a:xfrm>
-            <a:off x="5742432" y="3364992"/>
+          <p:cNvPr id="31" name="Shape 29"/>
+          <p:cNvSpPr/>
+          <p:nvPr/>
+        </p:nvSpPr>
+        <p:spPr>
+          <a:xfrm>
+            <a:off x="4370832" y="3364992"/>
             <a:ext cx="1645920" cy="475488"/>
           </a:xfrm>
           <a:prstGeom prst="rect">
@@ -20964,13 +20432,13 @@
       </p:sp>
       <p:sp>
         <p:nvSpPr>
-          <p:cNvPr id="30" name="Text 28"/>
-          <p:cNvSpPr/>
-          <p:nvPr/>
-        </p:nvSpPr>
-        <p:spPr>
-          <a:xfrm>
-            <a:off x="5742432" y="3364992"/>
+          <p:cNvPr id="32" name="Text 30"/>
+          <p:cNvSpPr/>
+          <p:nvPr/>
+        </p:nvSpPr>
+        <p:spPr>
+          <a:xfrm>
+            <a:off x="4370832" y="3364992"/>
             <a:ext cx="1645920" cy="475488"/>
           </a:xfrm>
           <a:prstGeom prst="rect">
@@ -21003,7 +20471,112 @@
       </p:sp>
       <p:sp>
         <p:nvSpPr>
-          <p:cNvPr id="31" name="Shape 29"/>
+          <p:cNvPr id="33" name="Text 31"/>
+          <p:cNvSpPr/>
+          <p:nvPr/>
+        </p:nvSpPr>
+        <p:spPr>
+          <a:xfrm>
+            <a:off x="6016752" y="3364992"/>
+            <a:ext cx="411480" cy="475488"/>
+          </a:xfrm>
+          <a:prstGeom prst="rect">
+            <a:avLst/>
+          </a:prstGeom>
+          <a:noFill/>
+          <a:ln/>
+        </p:spPr>
+        <p:txBody>
+          <a:bodyPr wrap="square" lIns="0" tIns="0" rIns="0" bIns="0" rtlCol="0" anchor="ctr"/>
+          <a:lstStyle/>
+          <a:p>
+            <a:pPr algn="ctr" indent="0" marL="0">
+              <a:buNone/>
+            </a:pPr>
+            <a:r>
+              <a:rPr lang="en-US" sz="1600" b="1" dirty="0">
+                <a:solidFill>
+                  <a:srgbClr val="0D9488"/>
+                </a:solidFill>
+                <a:latin typeface="Trebuchet MS" pitchFamily="34" charset="0"/>
+                <a:ea typeface="Trebuchet MS" pitchFamily="34" charset="-122"/>
+                <a:cs typeface="Trebuchet MS" pitchFamily="34" charset="-120"/>
+              </a:rPr>
+              <a:t>·</a:t>
+            </a:r>
+            <a:endParaRPr lang="en-US" sz="1600" dirty="0"/>
+          </a:p>
+        </p:txBody>
+      </p:sp>
+      <p:sp>
+        <p:nvSpPr>
+          <p:cNvPr id="34" name="Shape 32"/>
+          <p:cNvSpPr/>
+          <p:nvPr/>
+        </p:nvSpPr>
+        <p:spPr>
+          <a:xfrm>
+            <a:off x="6428232" y="3364992"/>
+            <a:ext cx="1645920" cy="475488"/>
+          </a:xfrm>
+          <a:prstGeom prst="rect">
+            <a:avLst>
+              <a:gd name="adj" fmla="val 9615"/>
+            </a:avLst>
+          </a:prstGeom>
+          <a:solidFill>
+            <a:srgbClr val="FFFFFF"/>
+          </a:solidFill>
+          <a:ln w="12700">
+            <a:solidFill>
+              <a:srgbClr val="0D9488"/>
+            </a:solidFill>
+            <a:prstDash val="solid"/>
+          </a:ln>
+        </p:spPr>
+      </p:sp>
+      <p:sp>
+        <p:nvSpPr>
+          <p:cNvPr id="35" name="Text 33"/>
+          <p:cNvSpPr/>
+          <p:nvPr/>
+        </p:nvSpPr>
+        <p:spPr>
+          <a:xfrm>
+            <a:off x="6428232" y="3364992"/>
+            <a:ext cx="1645920" cy="475488"/>
+          </a:xfrm>
+          <a:prstGeom prst="rect">
+            <a:avLst/>
+          </a:prstGeom>
+          <a:noFill/>
+          <a:ln/>
+        </p:spPr>
+        <p:txBody>
+          <a:bodyPr wrap="square" lIns="0" tIns="0" rIns="0" bIns="0" rtlCol="0" anchor="ctr"/>
+          <a:lstStyle/>
+          <a:p>
+            <a:pPr algn="ctr" indent="0" marL="0">
+              <a:buNone/>
+            </a:pPr>
+            <a:r>
+              <a:rPr lang="en-US" sz="1400" b="1" dirty="0">
+                <a:solidFill>
+                  <a:srgbClr val="0D9488"/>
+                </a:solidFill>
+                <a:latin typeface="Trebuchet MS" pitchFamily="34" charset="0"/>
+                <a:ea typeface="Trebuchet MS" pitchFamily="34" charset="-122"/>
+                <a:cs typeface="Trebuchet MS" pitchFamily="34" charset="-120"/>
+              </a:rPr>
+              <a:t>ly</a:t>
+            </a:r>
+            <a:endParaRPr lang="en-US" sz="1400" dirty="0"/>
+          </a:p>
+        </p:txBody>
+      </p:sp>
+      <p:sp>
+        <p:nvSpPr>
+          <p:cNvPr id="36" name="Shape 34"/>
           <p:cNvSpPr/>
           <p:nvPr/>
         </p:nvSpPr>
@@ -21030,7 +20603,7 @@
       </p:sp>
       <p:sp>
         <p:nvSpPr>
-          <p:cNvPr id="32" name="Text 30"/>
+          <p:cNvPr id="37" name="Text 35"/>
           <p:cNvSpPr/>
           <p:nvPr/>
         </p:nvSpPr>
@@ -21069,7 +20642,7 @@
       </p:sp>
       <p:sp>
         <p:nvSpPr>
-          <p:cNvPr id="33" name="Shape 31"/>
+          <p:cNvPr id="38" name="Shape 36"/>
           <p:cNvSpPr/>
           <p:nvPr/>
         </p:nvSpPr>
@@ -21096,7 +20669,7 @@
       </p:sp>
       <p:sp>
         <p:nvSpPr>
-          <p:cNvPr id="34" name="Text 32"/>
+          <p:cNvPr id="39" name="Text 37"/>
           <p:cNvSpPr/>
           <p:nvPr/>
         </p:nvSpPr>
@@ -21419,7 +20992,7 @@
                 <a:ea typeface="Calibri" pitchFamily="34" charset="-122"/>
                 <a:cs typeface="Calibri" pitchFamily="34" charset="-120"/>
               </a:rPr>
-              <a:t>Word Labs  •  wordlabs.app  •  Root: 'grace' = elegance, beauty, divine favour</a:t>
+              <a:t>Word Labs  •  wordlabs.app  •  Root: 'grace' = elegance, favour, goodwill</a:t>
             </a:r>
             <a:endParaRPr lang="en-US" sz="800" dirty="0"/>
           </a:p>
@@ -21558,7 +21131,7 @@
                 <a:ea typeface="Trebuchet MS" pitchFamily="34" charset="-122"/>
                 <a:cs typeface="Trebuchet MS" pitchFamily="34" charset="-120"/>
               </a:rPr>
-              <a:t>gracious</a:t>
+              <a:t>graciously</a:t>
             </a:r>
             <a:endParaRPr lang="en-US" sz="2800" dirty="0"/>
           </a:p>
@@ -21638,7 +21211,7 @@
         </p:nvSpPr>
         <p:spPr>
           <a:xfrm>
-            <a:off x="2938272" y="2258568"/>
+            <a:off x="2221992" y="2258568"/>
             <a:ext cx="1828800" cy="292608"/>
           </a:xfrm>
           <a:prstGeom prst="rect">
@@ -21672,7 +21245,7 @@
         </p:nvSpPr>
         <p:spPr>
           <a:xfrm>
-            <a:off x="2938272" y="2258568"/>
+            <a:off x="2221992" y="2258568"/>
             <a:ext cx="1828800" cy="292608"/>
           </a:xfrm>
           <a:prstGeom prst="rect">
@@ -21711,7 +21284,7 @@
         </p:nvSpPr>
         <p:spPr>
           <a:xfrm>
-            <a:off x="2938272" y="2569464"/>
+            <a:off x="2221992" y="2569464"/>
             <a:ext cx="1828800" cy="201168"/>
           </a:xfrm>
           <a:prstGeom prst="rect">
@@ -21736,7 +21309,7 @@
                 <a:ea typeface="Calibri" pitchFamily="34" charset="-122"/>
                 <a:cs typeface="Calibri" pitchFamily="34" charset="-120"/>
               </a:rPr>
-              <a:t>elegance, beauty</a:t>
+              <a:t>elegance, beauty, favour</a:t>
             </a:r>
             <a:endParaRPr lang="en-US" sz="850" dirty="0"/>
           </a:p>
@@ -21750,7 +21323,7 @@
         </p:nvSpPr>
         <p:spPr>
           <a:xfrm>
-            <a:off x="5803392" y="2258568"/>
+            <a:off x="4370832" y="2258568"/>
             <a:ext cx="1828800" cy="292608"/>
           </a:xfrm>
           <a:prstGeom prst="rect">
@@ -21784,7 +21357,7 @@
         </p:nvSpPr>
         <p:spPr>
           <a:xfrm>
-            <a:off x="5803392" y="2258568"/>
+            <a:off x="4370832" y="2258568"/>
             <a:ext cx="1828800" cy="292608"/>
           </a:xfrm>
           <a:prstGeom prst="rect">
@@ -21809,7 +21382,7 @@
                 <a:ea typeface="Trebuchet MS" pitchFamily="34" charset="-122"/>
                 <a:cs typeface="Trebuchet MS" pitchFamily="34" charset="-120"/>
               </a:rPr>
-              <a:t>ous</a:t>
+              <a:t>ious</a:t>
             </a:r>
             <a:endParaRPr lang="en-US" sz="1300" dirty="0"/>
           </a:p>
@@ -21823,7 +21396,7 @@
         </p:nvSpPr>
         <p:spPr>
           <a:xfrm>
-            <a:off x="5803392" y="2569464"/>
+            <a:off x="4370832" y="2569464"/>
             <a:ext cx="1828800" cy="201168"/>
           </a:xfrm>
           <a:prstGeom prst="rect">
@@ -21856,14 +21429,87 @@
       </p:sp>
       <p:sp>
         <p:nvSpPr>
-          <p:cNvPr id="22" name="Text 20"/>
-          <p:cNvSpPr/>
-          <p:nvPr/>
-        </p:nvSpPr>
-        <p:spPr>
-          <a:xfrm>
-            <a:off x="5803392" y="2752344"/>
-            <a:ext cx="1828800" cy="182880"/>
+          <p:cNvPr id="22" name="Shape 20"/>
+          <p:cNvSpPr/>
+          <p:nvPr/>
+        </p:nvSpPr>
+        <p:spPr>
+          <a:xfrm>
+            <a:off x="6519672" y="2258568"/>
+            <a:ext cx="1828800" cy="292608"/>
+          </a:xfrm>
+          <a:prstGeom prst="rect">
+            <a:avLst>
+              <a:gd name="adj" fmla="val 25000"/>
+            </a:avLst>
+          </a:prstGeom>
+          <a:solidFill>
+            <a:srgbClr val="FCE7F3"/>
+          </a:solidFill>
+          <a:ln w="19050">
+            <a:solidFill>
+              <a:srgbClr val="DB2777"/>
+            </a:solidFill>
+            <a:prstDash val="solid"/>
+          </a:ln>
+          <a:effectLst>
+            <a:outerShdw sx="100000" sy="100000" kx="0" ky="0" algn="bl" rotWithShape="0" blurRad="101600" dist="38100" dir="8100000">
+              <a:srgbClr val="000000">
+                <a:alpha val="12000"/>
+              </a:srgbClr>
+            </a:outerShdw>
+          </a:effectLst>
+        </p:spPr>
+      </p:sp>
+      <p:sp>
+        <p:nvSpPr>
+          <p:cNvPr id="23" name="Text 21"/>
+          <p:cNvSpPr/>
+          <p:nvPr/>
+        </p:nvSpPr>
+        <p:spPr>
+          <a:xfrm>
+            <a:off x="6519672" y="2258568"/>
+            <a:ext cx="1828800" cy="292608"/>
+          </a:xfrm>
+          <a:prstGeom prst="rect">
+            <a:avLst/>
+          </a:prstGeom>
+          <a:noFill/>
+          <a:ln/>
+        </p:spPr>
+        <p:txBody>
+          <a:bodyPr wrap="square" lIns="0" tIns="0" rIns="0" bIns="0" rtlCol="0" anchor="ctr"/>
+          <a:lstStyle/>
+          <a:p>
+            <a:pPr algn="ctr" indent="0" marL="0">
+              <a:buNone/>
+            </a:pPr>
+            <a:r>
+              <a:rPr lang="en-US" sz="1300" b="1" dirty="0">
+                <a:solidFill>
+                  <a:srgbClr val="9D174D"/>
+                </a:solidFill>
+                <a:latin typeface="Trebuchet MS" pitchFamily="34" charset="0"/>
+                <a:ea typeface="Trebuchet MS" pitchFamily="34" charset="-122"/>
+                <a:cs typeface="Trebuchet MS" pitchFamily="34" charset="-120"/>
+              </a:rPr>
+              <a:t>ly</a:t>
+            </a:r>
+            <a:endParaRPr lang="en-US" sz="1300" dirty="0"/>
+          </a:p>
+        </p:txBody>
+      </p:sp>
+      <p:sp>
+        <p:nvSpPr>
+          <p:cNvPr id="24" name="Text 22"/>
+          <p:cNvSpPr/>
+          <p:nvPr/>
+        </p:nvSpPr>
+        <p:spPr>
+          <a:xfrm>
+            <a:off x="6519672" y="2569464"/>
+            <a:ext cx="1828800" cy="201168"/>
           </a:xfrm>
           <a:prstGeom prst="rect">
             <a:avLst/>
@@ -21879,23 +21525,23 @@
               <a:buNone/>
             </a:pPr>
             <a:r>
-              <a:rPr lang="en-US" sz="700" i="1" dirty="0">
-                <a:solidFill>
-                  <a:srgbClr val="94A3B8"/>
+              <a:rPr lang="en-US" sz="850" dirty="0">
+                <a:solidFill>
+                  <a:srgbClr val="475569"/>
                 </a:solidFill>
                 <a:latin typeface="Calibri" pitchFamily="34" charset="0"/>
                 <a:ea typeface="Calibri" pitchFamily="34" charset="-122"/>
                 <a:cs typeface="Calibri" pitchFamily="34" charset="-120"/>
               </a:rPr>
-              <a:t>'e' dropped before vowel suffix</a:t>
-            </a:r>
-            <a:endParaRPr lang="en-US" sz="700" dirty="0"/>
-          </a:p>
-        </p:txBody>
-      </p:sp>
-      <p:sp>
-        <p:nvSpPr>
-          <p:cNvPr id="23" name="Shape 21"/>
+              <a:t>in a certain way</a:t>
+            </a:r>
+            <a:endParaRPr lang="en-US" sz="850" dirty="0"/>
+          </a:p>
+        </p:txBody>
+      </p:sp>
+      <p:sp>
+        <p:nvSpPr>
+          <p:cNvPr id="25" name="Shape 23"/>
           <p:cNvSpPr/>
           <p:nvPr/>
         </p:nvSpPr>
@@ -21922,7 +21568,7 @@
       </p:sp>
       <p:sp>
         <p:nvSpPr>
-          <p:cNvPr id="24" name="Text 22"/>
+          <p:cNvPr id="26" name="Text 24"/>
           <p:cNvSpPr/>
           <p:nvPr/>
         </p:nvSpPr>
@@ -21961,7 +21607,7 @@
       </p:sp>
       <p:sp>
         <p:nvSpPr>
-          <p:cNvPr id="25" name="Shape 23"/>
+          <p:cNvPr id="27" name="Shape 25"/>
           <p:cNvSpPr/>
           <p:nvPr/>
         </p:nvSpPr>
@@ -21988,13 +21634,13 @@
       </p:sp>
       <p:sp>
         <p:nvSpPr>
-          <p:cNvPr id="26" name="Shape 24"/>
-          <p:cNvSpPr/>
-          <p:nvPr/>
-        </p:nvSpPr>
-        <p:spPr>
-          <a:xfrm>
-            <a:off x="2999232" y="3364992"/>
+          <p:cNvPr id="28" name="Shape 26"/>
+          <p:cNvSpPr/>
+          <p:nvPr/>
+        </p:nvSpPr>
+        <p:spPr>
+          <a:xfrm>
+            <a:off x="2313432" y="3364992"/>
             <a:ext cx="1645920" cy="475488"/>
           </a:xfrm>
           <a:prstGeom prst="rect">
@@ -22015,13 +21661,13 @@
       </p:sp>
       <p:sp>
         <p:nvSpPr>
-          <p:cNvPr id="27" name="Text 25"/>
-          <p:cNvSpPr/>
-          <p:nvPr/>
-        </p:nvSpPr>
-        <p:spPr>
-          <a:xfrm>
-            <a:off x="2999232" y="3364992"/>
+          <p:cNvPr id="29" name="Text 27"/>
+          <p:cNvSpPr/>
+          <p:nvPr/>
+        </p:nvSpPr>
+        <p:spPr>
+          <a:xfrm>
+            <a:off x="2313432" y="3364992"/>
             <a:ext cx="1645920" cy="475488"/>
           </a:xfrm>
           <a:prstGeom prst="rect">
@@ -22054,14 +21700,14 @@
       </p:sp>
       <p:sp>
         <p:nvSpPr>
-          <p:cNvPr id="28" name="Text 26"/>
-          <p:cNvSpPr/>
-          <p:nvPr/>
-        </p:nvSpPr>
-        <p:spPr>
-          <a:xfrm>
-            <a:off x="4645152" y="3364992"/>
-            <a:ext cx="1097280" cy="475488"/>
+          <p:cNvPr id="30" name="Text 28"/>
+          <p:cNvSpPr/>
+          <p:nvPr/>
+        </p:nvSpPr>
+        <p:spPr>
+          <a:xfrm>
+            <a:off x="3959352" y="3364992"/>
+            <a:ext cx="411480" cy="475488"/>
           </a:xfrm>
           <a:prstGeom prst="rect">
             <a:avLst/>
@@ -22093,13 +21739,13 @@
       </p:sp>
       <p:sp>
         <p:nvSpPr>
-          <p:cNvPr id="29" name="Shape 27"/>
-          <p:cNvSpPr/>
-          <p:nvPr/>
-        </p:nvSpPr>
-        <p:spPr>
-          <a:xfrm>
-            <a:off x="5742432" y="3364992"/>
+          <p:cNvPr id="31" name="Shape 29"/>
+          <p:cNvSpPr/>
+          <p:nvPr/>
+        </p:nvSpPr>
+        <p:spPr>
+          <a:xfrm>
+            <a:off x="4370832" y="3364992"/>
             <a:ext cx="1645920" cy="475488"/>
           </a:xfrm>
           <a:prstGeom prst="rect">
@@ -22120,13 +21766,13 @@
       </p:sp>
       <p:sp>
         <p:nvSpPr>
-          <p:cNvPr id="30" name="Text 28"/>
-          <p:cNvSpPr/>
-          <p:nvPr/>
-        </p:nvSpPr>
-        <p:spPr>
-          <a:xfrm>
-            <a:off x="5742432" y="3364992"/>
+          <p:cNvPr id="32" name="Text 30"/>
+          <p:cNvSpPr/>
+          <p:nvPr/>
+        </p:nvSpPr>
+        <p:spPr>
+          <a:xfrm>
+            <a:off x="4370832" y="3364992"/>
             <a:ext cx="1645920" cy="475488"/>
           </a:xfrm>
           <a:prstGeom prst="rect">
@@ -22159,7 +21805,112 @@
       </p:sp>
       <p:sp>
         <p:nvSpPr>
-          <p:cNvPr id="31" name="Shape 29"/>
+          <p:cNvPr id="33" name="Text 31"/>
+          <p:cNvSpPr/>
+          <p:nvPr/>
+        </p:nvSpPr>
+        <p:spPr>
+          <a:xfrm>
+            <a:off x="6016752" y="3364992"/>
+            <a:ext cx="411480" cy="475488"/>
+          </a:xfrm>
+          <a:prstGeom prst="rect">
+            <a:avLst/>
+          </a:prstGeom>
+          <a:noFill/>
+          <a:ln/>
+        </p:spPr>
+        <p:txBody>
+          <a:bodyPr wrap="square" lIns="0" tIns="0" rIns="0" bIns="0" rtlCol="0" anchor="ctr"/>
+          <a:lstStyle/>
+          <a:p>
+            <a:pPr algn="ctr" indent="0" marL="0">
+              <a:buNone/>
+            </a:pPr>
+            <a:r>
+              <a:rPr lang="en-US" sz="1600" b="1" dirty="0">
+                <a:solidFill>
+                  <a:srgbClr val="0D9488"/>
+                </a:solidFill>
+                <a:latin typeface="Trebuchet MS" pitchFamily="34" charset="0"/>
+                <a:ea typeface="Trebuchet MS" pitchFamily="34" charset="-122"/>
+                <a:cs typeface="Trebuchet MS" pitchFamily="34" charset="-120"/>
+              </a:rPr>
+              <a:t>·</a:t>
+            </a:r>
+            <a:endParaRPr lang="en-US" sz="1600" dirty="0"/>
+          </a:p>
+        </p:txBody>
+      </p:sp>
+      <p:sp>
+        <p:nvSpPr>
+          <p:cNvPr id="34" name="Shape 32"/>
+          <p:cNvSpPr/>
+          <p:nvPr/>
+        </p:nvSpPr>
+        <p:spPr>
+          <a:xfrm>
+            <a:off x="6428232" y="3364992"/>
+            <a:ext cx="1645920" cy="475488"/>
+          </a:xfrm>
+          <a:prstGeom prst="rect">
+            <a:avLst>
+              <a:gd name="adj" fmla="val 9615"/>
+            </a:avLst>
+          </a:prstGeom>
+          <a:solidFill>
+            <a:srgbClr val="FFFFFF"/>
+          </a:solidFill>
+          <a:ln w="12700">
+            <a:solidFill>
+              <a:srgbClr val="0D9488"/>
+            </a:solidFill>
+            <a:prstDash val="solid"/>
+          </a:ln>
+        </p:spPr>
+      </p:sp>
+      <p:sp>
+        <p:nvSpPr>
+          <p:cNvPr id="35" name="Text 33"/>
+          <p:cNvSpPr/>
+          <p:nvPr/>
+        </p:nvSpPr>
+        <p:spPr>
+          <a:xfrm>
+            <a:off x="6428232" y="3364992"/>
+            <a:ext cx="1645920" cy="475488"/>
+          </a:xfrm>
+          <a:prstGeom prst="rect">
+            <a:avLst/>
+          </a:prstGeom>
+          <a:noFill/>
+          <a:ln/>
+        </p:spPr>
+        <p:txBody>
+          <a:bodyPr wrap="square" lIns="0" tIns="0" rIns="0" bIns="0" rtlCol="0" anchor="ctr"/>
+          <a:lstStyle/>
+          <a:p>
+            <a:pPr algn="ctr" indent="0" marL="0">
+              <a:buNone/>
+            </a:pPr>
+            <a:r>
+              <a:rPr lang="en-US" sz="1400" b="1" dirty="0">
+                <a:solidFill>
+                  <a:srgbClr val="0D9488"/>
+                </a:solidFill>
+                <a:latin typeface="Trebuchet MS" pitchFamily="34" charset="0"/>
+                <a:ea typeface="Trebuchet MS" pitchFamily="34" charset="-122"/>
+                <a:cs typeface="Trebuchet MS" pitchFamily="34" charset="-120"/>
+              </a:rPr>
+              <a:t>ly</a:t>
+            </a:r>
+            <a:endParaRPr lang="en-US" sz="1400" dirty="0"/>
+          </a:p>
+        </p:txBody>
+      </p:sp>
+      <p:sp>
+        <p:nvSpPr>
+          <p:cNvPr id="36" name="Shape 34"/>
           <p:cNvSpPr/>
           <p:nvPr/>
         </p:nvSpPr>
@@ -22186,7 +21937,7 @@
       </p:sp>
       <p:sp>
         <p:nvSpPr>
-          <p:cNvPr id="32" name="Text 30"/>
+          <p:cNvPr id="37" name="Text 35"/>
           <p:cNvSpPr/>
           <p:nvPr/>
         </p:nvSpPr>
@@ -22225,7 +21976,7 @@
       </p:sp>
       <p:sp>
         <p:nvSpPr>
-          <p:cNvPr id="33" name="Shape 31"/>
+          <p:cNvPr id="38" name="Shape 36"/>
           <p:cNvSpPr/>
           <p:nvPr/>
         </p:nvSpPr>
@@ -22252,7 +22003,7 @@
       </p:sp>
       <p:sp>
         <p:nvSpPr>
-          <p:cNvPr id="34" name="Shape 32"/>
+          <p:cNvPr id="39" name="Shape 37"/>
           <p:cNvSpPr/>
           <p:nvPr/>
         </p:nvSpPr>
@@ -22279,7 +22030,7 @@
       </p:sp>
       <p:sp>
         <p:nvSpPr>
-          <p:cNvPr id="35" name="Text 33"/>
+          <p:cNvPr id="40" name="Text 38"/>
           <p:cNvSpPr/>
           <p:nvPr/>
         </p:nvSpPr>
@@ -22318,7 +22069,7 @@
       </p:sp>
       <p:sp>
         <p:nvSpPr>
-          <p:cNvPr id="36" name="Shape 34"/>
+          <p:cNvPr id="41" name="Shape 39"/>
           <p:cNvSpPr/>
           <p:nvPr/>
         </p:nvSpPr>
@@ -22345,7 +22096,7 @@
       </p:sp>
       <p:sp>
         <p:nvSpPr>
-          <p:cNvPr id="37" name="Text 35"/>
+          <p:cNvPr id="42" name="Text 40"/>
           <p:cNvSpPr/>
           <p:nvPr/>
         </p:nvSpPr>
@@ -22384,7 +22135,7 @@
       </p:sp>
       <p:sp>
         <p:nvSpPr>
-          <p:cNvPr id="38" name="Shape 36"/>
+          <p:cNvPr id="43" name="Shape 41"/>
           <p:cNvSpPr/>
           <p:nvPr/>
         </p:nvSpPr>
@@ -22411,7 +22162,7 @@
       </p:sp>
       <p:sp>
         <p:nvSpPr>
-          <p:cNvPr id="39" name="Text 37"/>
+          <p:cNvPr id="44" name="Text 42"/>
           <p:cNvSpPr/>
           <p:nvPr/>
         </p:nvSpPr>
@@ -22450,7 +22201,7 @@
       </p:sp>
       <p:sp>
         <p:nvSpPr>
-          <p:cNvPr id="40" name="Text 38"/>
+          <p:cNvPr id="45" name="Text 43"/>
           <p:cNvSpPr/>
           <p:nvPr/>
         </p:nvSpPr>
@@ -22489,7 +22240,7 @@
       </p:sp>
       <p:sp>
         <p:nvSpPr>
-          <p:cNvPr id="41" name="Shape 39"/>
+          <p:cNvPr id="46" name="Shape 44"/>
           <p:cNvSpPr/>
           <p:nvPr/>
         </p:nvSpPr>
@@ -22516,7 +22267,7 @@
       </p:sp>
       <p:sp>
         <p:nvSpPr>
-          <p:cNvPr id="42" name="Text 40"/>
+          <p:cNvPr id="47" name="Text 45"/>
           <p:cNvSpPr/>
           <p:nvPr/>
         </p:nvSpPr>
@@ -22547,7 +22298,7 @@
                 <a:ea typeface="Trebuchet MS" pitchFamily="34" charset="-122"/>
                 <a:cs typeface="Trebuchet MS" pitchFamily="34" charset="-120"/>
               </a:rPr>
-              <a:t>i</a:t>
+              <a:t>ious</a:t>
             </a:r>
             <a:endParaRPr lang="en-US" sz="900" dirty="0"/>
           </a:p>
@@ -22555,7 +22306,7 @@
       </p:sp>
       <p:sp>
         <p:nvSpPr>
-          <p:cNvPr id="43" name="Shape 41"/>
+          <p:cNvPr id="48" name="Shape 46"/>
           <p:cNvSpPr/>
           <p:nvPr/>
         </p:nvSpPr>
@@ -22582,7 +22333,7 @@
       </p:sp>
       <p:sp>
         <p:nvSpPr>
-          <p:cNvPr id="44" name="Text 42"/>
+          <p:cNvPr id="49" name="Text 47"/>
           <p:cNvSpPr/>
           <p:nvPr/>
         </p:nvSpPr>
@@ -22613,7 +22364,7 @@
                 <a:ea typeface="Trebuchet MS" pitchFamily="34" charset="-122"/>
                 <a:cs typeface="Trebuchet MS" pitchFamily="34" charset="-120"/>
               </a:rPr>
-              <a:t>ou</a:t>
+              <a:t>l</a:t>
             </a:r>
             <a:endParaRPr lang="en-US" sz="900" dirty="0"/>
           </a:p>
@@ -22621,7 +22372,7 @@
       </p:sp>
       <p:sp>
         <p:nvSpPr>
-          <p:cNvPr id="45" name="Shape 43"/>
+          <p:cNvPr id="50" name="Shape 48"/>
           <p:cNvSpPr/>
           <p:nvPr/>
         </p:nvSpPr>
@@ -22648,7 +22399,7 @@
       </p:sp>
       <p:sp>
         <p:nvSpPr>
-          <p:cNvPr id="46" name="Text 44"/>
+          <p:cNvPr id="51" name="Text 49"/>
           <p:cNvSpPr/>
           <p:nvPr/>
         </p:nvSpPr>
@@ -22679,7 +22430,7 @@
                 <a:ea typeface="Trebuchet MS" pitchFamily="34" charset="-122"/>
                 <a:cs typeface="Trebuchet MS" pitchFamily="34" charset="-120"/>
               </a:rPr>
-              <a:t>s</a:t>
+              <a:t>y</a:t>
             </a:r>
             <a:endParaRPr lang="en-US" sz="900" dirty="0"/>
           </a:p>
@@ -22971,7 +22722,7 @@
                 <a:ea typeface="Calibri" pitchFamily="34" charset="-122"/>
                 <a:cs typeface="Calibri" pitchFamily="34" charset="-120"/>
               </a:rPr>
-              <a:t>Word Labs  •  wordlabs.app  •  Root: 'grace' = elegance, beauty, divine favour</a:t>
+              <a:t>Word Labs  •  wordlabs.app  •  Root: 'grace' = elegance, favour, goodwill</a:t>
             </a:r>
             <a:endParaRPr lang="en-US" sz="800" dirty="0"/>
           </a:p>
@@ -23110,7 +22861,7 @@
                 <a:ea typeface="Trebuchet MS" pitchFamily="34" charset="-122"/>
                 <a:cs typeface="Trebuchet MS" pitchFamily="34" charset="-120"/>
               </a:rPr>
-              <a:t>graceful</a:t>
+              <a:t>gracelessly</a:t>
             </a:r>
             <a:endParaRPr lang="en-US" sz="2800" dirty="0"/>
           </a:p>
@@ -23798,7 +23549,7 @@
                 <a:ea typeface="Calibri" pitchFamily="34" charset="-122"/>
                 <a:cs typeface="Calibri" pitchFamily="34" charset="-120"/>
               </a:rPr>
-              <a:t>Word Labs  •  wordlabs.app  •  Root: 'grace' = elegance, beauty, divine favour</a:t>
+              <a:t>Word Labs  •  wordlabs.app  •  Root: 'grace' = elegance, favour, goodwill</a:t>
             </a:r>
             <a:endParaRPr lang="en-US" sz="800" dirty="0"/>
           </a:p>
@@ -23937,7 +23688,7 @@
                 <a:ea typeface="Trebuchet MS" pitchFamily="34" charset="-122"/>
                 <a:cs typeface="Trebuchet MS" pitchFamily="34" charset="-120"/>
               </a:rPr>
-              <a:t>graceful</a:t>
+              <a:t>gracelessly</a:t>
             </a:r>
             <a:endParaRPr lang="en-US" sz="2800" dirty="0"/>
           </a:p>
@@ -24017,7 +23768,7 @@
         </p:nvSpPr>
         <p:spPr>
           <a:xfrm>
-            <a:off x="2938272" y="2258568"/>
+            <a:off x="2221992" y="2258568"/>
             <a:ext cx="1828800" cy="292608"/>
           </a:xfrm>
           <a:prstGeom prst="rect">
@@ -24051,7 +23802,7 @@
         </p:nvSpPr>
         <p:spPr>
           <a:xfrm>
-            <a:off x="2938272" y="2258568"/>
+            <a:off x="2221992" y="2258568"/>
             <a:ext cx="1828800" cy="292608"/>
           </a:xfrm>
           <a:prstGeom prst="rect">
@@ -24090,7 +23841,7 @@
         </p:nvSpPr>
         <p:spPr>
           <a:xfrm>
-            <a:off x="2938272" y="2569464"/>
+            <a:off x="2221992" y="2569464"/>
             <a:ext cx="1828800" cy="201168"/>
           </a:xfrm>
           <a:prstGeom prst="rect">
@@ -24115,7 +23866,7 @@
                 <a:ea typeface="Calibri" pitchFamily="34" charset="-122"/>
                 <a:cs typeface="Calibri" pitchFamily="34" charset="-120"/>
               </a:rPr>
-              <a:t>elegance, beauty</a:t>
+              <a:t>elegance, beauty, favour</a:t>
             </a:r>
             <a:endParaRPr lang="en-US" sz="850" dirty="0"/>
           </a:p>
@@ -24129,7 +23880,7 @@
         </p:nvSpPr>
         <p:spPr>
           <a:xfrm>
-            <a:off x="5803392" y="2258568"/>
+            <a:off x="4370832" y="2258568"/>
             <a:ext cx="1828800" cy="292608"/>
           </a:xfrm>
           <a:prstGeom prst="rect">
@@ -24138,11 +23889,11 @@
             </a:avLst>
           </a:prstGeom>
           <a:solidFill>
-            <a:srgbClr val="FCE7F3"/>
+            <a:srgbClr val="DDD6FE"/>
           </a:solidFill>
           <a:ln w="19050">
             <a:solidFill>
-              <a:srgbClr val="DB2777"/>
+              <a:srgbClr val="7C3AED"/>
             </a:solidFill>
             <a:prstDash val="solid"/>
           </a:ln>
@@ -24163,7 +23914,7 @@
         </p:nvSpPr>
         <p:spPr>
           <a:xfrm>
-            <a:off x="5803392" y="2258568"/>
+            <a:off x="4370832" y="2258568"/>
             <a:ext cx="1828800" cy="292608"/>
           </a:xfrm>
           <a:prstGeom prst="rect">
@@ -24182,13 +23933,13 @@
             <a:r>
               <a:rPr lang="en-US" sz="1300" b="1" dirty="0">
                 <a:solidFill>
-                  <a:srgbClr val="9D174D"/>
+                  <a:srgbClr val="4C1D95"/>
                 </a:solidFill>
                 <a:latin typeface="Trebuchet MS" pitchFamily="34" charset="0"/>
                 <a:ea typeface="Trebuchet MS" pitchFamily="34" charset="-122"/>
                 <a:cs typeface="Trebuchet MS" pitchFamily="34" charset="-120"/>
               </a:rPr>
-              <a:t>ful</a:t>
+              <a:t>less</a:t>
             </a:r>
             <a:endParaRPr lang="en-US" sz="1300" dirty="0"/>
           </a:p>
@@ -24202,7 +23953,7 @@
         </p:nvSpPr>
         <p:spPr>
           <a:xfrm>
-            <a:off x="5803392" y="2569464"/>
+            <a:off x="4370832" y="2569464"/>
             <a:ext cx="1828800" cy="201168"/>
           </a:xfrm>
           <a:prstGeom prst="rect">
@@ -24227,7 +23978,7 @@
                 <a:ea typeface="Calibri" pitchFamily="34" charset="-122"/>
                 <a:cs typeface="Calibri" pitchFamily="34" charset="-120"/>
               </a:rPr>
-              <a:t>full of</a:t>
+              <a:t>without, lacking</a:t>
             </a:r>
             <a:endParaRPr lang="en-US" sz="850" dirty="0"/>
           </a:p>
@@ -24236,6 +23987,118 @@
       <p:sp>
         <p:nvSpPr>
           <p:cNvPr id="22" name="Shape 20"/>
+          <p:cNvSpPr/>
+          <p:nvPr/>
+        </p:nvSpPr>
+        <p:spPr>
+          <a:xfrm>
+            <a:off x="6519672" y="2258568"/>
+            <a:ext cx="1828800" cy="292608"/>
+          </a:xfrm>
+          <a:prstGeom prst="rect">
+            <a:avLst>
+              <a:gd name="adj" fmla="val 25000"/>
+            </a:avLst>
+          </a:prstGeom>
+          <a:solidFill>
+            <a:srgbClr val="FCE7F3"/>
+          </a:solidFill>
+          <a:ln w="19050">
+            <a:solidFill>
+              <a:srgbClr val="DB2777"/>
+            </a:solidFill>
+            <a:prstDash val="solid"/>
+          </a:ln>
+          <a:effectLst>
+            <a:outerShdw sx="100000" sy="100000" kx="0" ky="0" algn="bl" rotWithShape="0" blurRad="101600" dist="38100" dir="8100000">
+              <a:srgbClr val="000000">
+                <a:alpha val="12000"/>
+              </a:srgbClr>
+            </a:outerShdw>
+          </a:effectLst>
+        </p:spPr>
+      </p:sp>
+      <p:sp>
+        <p:nvSpPr>
+          <p:cNvPr id="23" name="Text 21"/>
+          <p:cNvSpPr/>
+          <p:nvPr/>
+        </p:nvSpPr>
+        <p:spPr>
+          <a:xfrm>
+            <a:off x="6519672" y="2258568"/>
+            <a:ext cx="1828800" cy="292608"/>
+          </a:xfrm>
+          <a:prstGeom prst="rect">
+            <a:avLst/>
+          </a:prstGeom>
+          <a:noFill/>
+          <a:ln/>
+        </p:spPr>
+        <p:txBody>
+          <a:bodyPr wrap="square" lIns="0" tIns="0" rIns="0" bIns="0" rtlCol="0" anchor="ctr"/>
+          <a:lstStyle/>
+          <a:p>
+            <a:pPr algn="ctr" indent="0" marL="0">
+              <a:buNone/>
+            </a:pPr>
+            <a:r>
+              <a:rPr lang="en-US" sz="1300" b="1" dirty="0">
+                <a:solidFill>
+                  <a:srgbClr val="9D174D"/>
+                </a:solidFill>
+                <a:latin typeface="Trebuchet MS" pitchFamily="34" charset="0"/>
+                <a:ea typeface="Trebuchet MS" pitchFamily="34" charset="-122"/>
+                <a:cs typeface="Trebuchet MS" pitchFamily="34" charset="-120"/>
+              </a:rPr>
+              <a:t>ly</a:t>
+            </a:r>
+            <a:endParaRPr lang="en-US" sz="1300" dirty="0"/>
+          </a:p>
+        </p:txBody>
+      </p:sp>
+      <p:sp>
+        <p:nvSpPr>
+          <p:cNvPr id="24" name="Text 22"/>
+          <p:cNvSpPr/>
+          <p:nvPr/>
+        </p:nvSpPr>
+        <p:spPr>
+          <a:xfrm>
+            <a:off x="6519672" y="2569464"/>
+            <a:ext cx="1828800" cy="201168"/>
+          </a:xfrm>
+          <a:prstGeom prst="rect">
+            <a:avLst/>
+          </a:prstGeom>
+          <a:noFill/>
+          <a:ln/>
+        </p:spPr>
+        <p:txBody>
+          <a:bodyPr wrap="square" lIns="0" tIns="0" rIns="0" bIns="0" rtlCol="0" anchor="t"/>
+          <a:lstStyle/>
+          <a:p>
+            <a:pPr algn="ctr" indent="0" marL="0">
+              <a:buNone/>
+            </a:pPr>
+            <a:r>
+              <a:rPr lang="en-US" sz="850" dirty="0">
+                <a:solidFill>
+                  <a:srgbClr val="475569"/>
+                </a:solidFill>
+                <a:latin typeface="Calibri" pitchFamily="34" charset="0"/>
+                <a:ea typeface="Calibri" pitchFamily="34" charset="-122"/>
+                <a:cs typeface="Calibri" pitchFamily="34" charset="-120"/>
+              </a:rPr>
+              <a:t>in a certain way</a:t>
+            </a:r>
+            <a:endParaRPr lang="en-US" sz="850" dirty="0"/>
+          </a:p>
+        </p:txBody>
+      </p:sp>
+      <p:sp>
+        <p:nvSpPr>
+          <p:cNvPr id="25" name="Shape 23"/>
           <p:cNvSpPr/>
           <p:nvPr/>
         </p:nvSpPr>
@@ -24262,7 +24125,7 @@
       </p:sp>
       <p:sp>
         <p:nvSpPr>
-          <p:cNvPr id="23" name="Text 21"/>
+          <p:cNvPr id="26" name="Text 24"/>
           <p:cNvSpPr/>
           <p:nvPr/>
         </p:nvSpPr>
@@ -24301,7 +24164,7 @@
       </p:sp>
       <p:sp>
         <p:nvSpPr>
-          <p:cNvPr id="24" name="Shape 22"/>
+          <p:cNvPr id="27" name="Shape 25"/>
           <p:cNvSpPr/>
           <p:nvPr/>
         </p:nvSpPr>
@@ -24328,7 +24191,7 @@
       </p:sp>
       <p:sp>
         <p:nvSpPr>
-          <p:cNvPr id="25" name="Text 23"/>
+          <p:cNvPr id="28" name="Text 26"/>
           <p:cNvSpPr/>
           <p:nvPr/>
         </p:nvSpPr>
@@ -24367,7 +24230,7 @@
       </p:sp>
       <p:sp>
         <p:nvSpPr>
-          <p:cNvPr id="26" name="Shape 24"/>
+          <p:cNvPr id="29" name="Shape 27"/>
           <p:cNvSpPr/>
           <p:nvPr/>
         </p:nvSpPr>
@@ -24394,7 +24257,7 @@
       </p:sp>
       <p:sp>
         <p:nvSpPr>
-          <p:cNvPr id="27" name="Text 25"/>
+          <p:cNvPr id="30" name="Text 28"/>
           <p:cNvSpPr/>
           <p:nvPr/>
         </p:nvSpPr>
@@ -24433,7 +24296,7 @@
       </p:sp>
       <p:sp>
         <p:nvSpPr>
-          <p:cNvPr id="28" name="Shape 26"/>
+          <p:cNvPr id="31" name="Shape 29"/>
           <p:cNvSpPr/>
           <p:nvPr/>
         </p:nvSpPr>
@@ -24460,7 +24323,7 @@
       </p:sp>
       <p:sp>
         <p:nvSpPr>
-          <p:cNvPr id="29" name="Text 27"/>
+          <p:cNvPr id="32" name="Text 30"/>
           <p:cNvSpPr/>
           <p:nvPr/>
         </p:nvSpPr>
@@ -24783,7 +24646,7 @@
                 <a:ea typeface="Calibri" pitchFamily="34" charset="-122"/>
                 <a:cs typeface="Calibri" pitchFamily="34" charset="-120"/>
               </a:rPr>
-              <a:t>Word Labs  •  wordlabs.app  •  Root: 'grace' = elegance, beauty, divine favour</a:t>
+              <a:t>Word Labs  •  wordlabs.app  •  Root: 'grace' = elegance, favour, goodwill</a:t>
             </a:r>
             <a:endParaRPr lang="en-US" sz="800" dirty="0"/>
           </a:p>
@@ -24856,7 +24719,7 @@
                 <a:ea typeface="Trebuchet MS" pitchFamily="34" charset="-122"/>
                 <a:cs typeface="Trebuchet MS" pitchFamily="34" charset="-120"/>
               </a:rPr>
-              <a:t>We are learning that the root 'grace' means 'elegance, beauty, divine favour'.</a:t>
+              <a:t>We are learning that the root 'grace' means 'elegance, favour, goodwill'.</a:t>
             </a:r>
             <a:endParaRPr lang="en-US" sz="2000" dirty="0"/>
           </a:p>
@@ -25502,7 +25365,7 @@
                 <a:ea typeface="Calibri" pitchFamily="34" charset="-122"/>
                 <a:cs typeface="Calibri" pitchFamily="34" charset="-120"/>
               </a:rPr>
-              <a:t>Word Labs  •  wordlabs.app  •  Root: 'grace' = elegance, beauty, divine favour</a:t>
+              <a:t>Word Labs  •  wordlabs.app  •  Root: 'grace' = elegance, favour, goodwill</a:t>
             </a:r>
             <a:endParaRPr lang="en-US" sz="800" dirty="0"/>
           </a:p>
@@ -25641,7 +25504,7 @@
                 <a:ea typeface="Trebuchet MS" pitchFamily="34" charset="-122"/>
                 <a:cs typeface="Trebuchet MS" pitchFamily="34" charset="-120"/>
               </a:rPr>
-              <a:t>graceful</a:t>
+              <a:t>gracelessly</a:t>
             </a:r>
             <a:endParaRPr lang="en-US" sz="2800" dirty="0"/>
           </a:p>
@@ -25721,7 +25584,7 @@
         </p:nvSpPr>
         <p:spPr>
           <a:xfrm>
-            <a:off x="2938272" y="2258568"/>
+            <a:off x="2221992" y="2258568"/>
             <a:ext cx="1828800" cy="292608"/>
           </a:xfrm>
           <a:prstGeom prst="rect">
@@ -25755,7 +25618,7 @@
         </p:nvSpPr>
         <p:spPr>
           <a:xfrm>
-            <a:off x="2938272" y="2258568"/>
+            <a:off x="2221992" y="2258568"/>
             <a:ext cx="1828800" cy="292608"/>
           </a:xfrm>
           <a:prstGeom prst="rect">
@@ -25794,7 +25657,7 @@
         </p:nvSpPr>
         <p:spPr>
           <a:xfrm>
-            <a:off x="2938272" y="2569464"/>
+            <a:off x="2221992" y="2569464"/>
             <a:ext cx="1828800" cy="201168"/>
           </a:xfrm>
           <a:prstGeom prst="rect">
@@ -25819,7 +25682,7 @@
                 <a:ea typeface="Calibri" pitchFamily="34" charset="-122"/>
                 <a:cs typeface="Calibri" pitchFamily="34" charset="-120"/>
               </a:rPr>
-              <a:t>elegance, beauty</a:t>
+              <a:t>elegance, beauty, favour</a:t>
             </a:r>
             <a:endParaRPr lang="en-US" sz="850" dirty="0"/>
           </a:p>
@@ -25833,7 +25696,7 @@
         </p:nvSpPr>
         <p:spPr>
           <a:xfrm>
-            <a:off x="5803392" y="2258568"/>
+            <a:off x="4370832" y="2258568"/>
             <a:ext cx="1828800" cy="292608"/>
           </a:xfrm>
           <a:prstGeom prst="rect">
@@ -25842,11 +25705,11 @@
             </a:avLst>
           </a:prstGeom>
           <a:solidFill>
-            <a:srgbClr val="FCE7F3"/>
+            <a:srgbClr val="DDD6FE"/>
           </a:solidFill>
           <a:ln w="19050">
             <a:solidFill>
-              <a:srgbClr val="DB2777"/>
+              <a:srgbClr val="7C3AED"/>
             </a:solidFill>
             <a:prstDash val="solid"/>
           </a:ln>
@@ -25867,7 +25730,7 @@
         </p:nvSpPr>
         <p:spPr>
           <a:xfrm>
-            <a:off x="5803392" y="2258568"/>
+            <a:off x="4370832" y="2258568"/>
             <a:ext cx="1828800" cy="292608"/>
           </a:xfrm>
           <a:prstGeom prst="rect">
@@ -25886,13 +25749,13 @@
             <a:r>
               <a:rPr lang="en-US" sz="1300" b="1" dirty="0">
                 <a:solidFill>
-                  <a:srgbClr val="9D174D"/>
+                  <a:srgbClr val="4C1D95"/>
                 </a:solidFill>
                 <a:latin typeface="Trebuchet MS" pitchFamily="34" charset="0"/>
                 <a:ea typeface="Trebuchet MS" pitchFamily="34" charset="-122"/>
                 <a:cs typeface="Trebuchet MS" pitchFamily="34" charset="-120"/>
               </a:rPr>
-              <a:t>ful</a:t>
+              <a:t>less</a:t>
             </a:r>
             <a:endParaRPr lang="en-US" sz="1300" dirty="0"/>
           </a:p>
@@ -25906,7 +25769,7 @@
         </p:nvSpPr>
         <p:spPr>
           <a:xfrm>
-            <a:off x="5803392" y="2569464"/>
+            <a:off x="4370832" y="2569464"/>
             <a:ext cx="1828800" cy="201168"/>
           </a:xfrm>
           <a:prstGeom prst="rect">
@@ -25931,7 +25794,7 @@
                 <a:ea typeface="Calibri" pitchFamily="34" charset="-122"/>
                 <a:cs typeface="Calibri" pitchFamily="34" charset="-120"/>
               </a:rPr>
-              <a:t>full of</a:t>
+              <a:t>without, lacking</a:t>
             </a:r>
             <a:endParaRPr lang="en-US" sz="850" dirty="0"/>
           </a:p>
@@ -25940,6 +25803,118 @@
       <p:sp>
         <p:nvSpPr>
           <p:cNvPr id="22" name="Shape 20"/>
+          <p:cNvSpPr/>
+          <p:nvPr/>
+        </p:nvSpPr>
+        <p:spPr>
+          <a:xfrm>
+            <a:off x="6519672" y="2258568"/>
+            <a:ext cx="1828800" cy="292608"/>
+          </a:xfrm>
+          <a:prstGeom prst="rect">
+            <a:avLst>
+              <a:gd name="adj" fmla="val 25000"/>
+            </a:avLst>
+          </a:prstGeom>
+          <a:solidFill>
+            <a:srgbClr val="FCE7F3"/>
+          </a:solidFill>
+          <a:ln w="19050">
+            <a:solidFill>
+              <a:srgbClr val="DB2777"/>
+            </a:solidFill>
+            <a:prstDash val="solid"/>
+          </a:ln>
+          <a:effectLst>
+            <a:outerShdw sx="100000" sy="100000" kx="0" ky="0" algn="bl" rotWithShape="0" blurRad="101600" dist="38100" dir="8100000">
+              <a:srgbClr val="000000">
+                <a:alpha val="12000"/>
+              </a:srgbClr>
+            </a:outerShdw>
+          </a:effectLst>
+        </p:spPr>
+      </p:sp>
+      <p:sp>
+        <p:nvSpPr>
+          <p:cNvPr id="23" name="Text 21"/>
+          <p:cNvSpPr/>
+          <p:nvPr/>
+        </p:nvSpPr>
+        <p:spPr>
+          <a:xfrm>
+            <a:off x="6519672" y="2258568"/>
+            <a:ext cx="1828800" cy="292608"/>
+          </a:xfrm>
+          <a:prstGeom prst="rect">
+            <a:avLst/>
+          </a:prstGeom>
+          <a:noFill/>
+          <a:ln/>
+        </p:spPr>
+        <p:txBody>
+          <a:bodyPr wrap="square" lIns="0" tIns="0" rIns="0" bIns="0" rtlCol="0" anchor="ctr"/>
+          <a:lstStyle/>
+          <a:p>
+            <a:pPr algn="ctr" indent="0" marL="0">
+              <a:buNone/>
+            </a:pPr>
+            <a:r>
+              <a:rPr lang="en-US" sz="1300" b="1" dirty="0">
+                <a:solidFill>
+                  <a:srgbClr val="9D174D"/>
+                </a:solidFill>
+                <a:latin typeface="Trebuchet MS" pitchFamily="34" charset="0"/>
+                <a:ea typeface="Trebuchet MS" pitchFamily="34" charset="-122"/>
+                <a:cs typeface="Trebuchet MS" pitchFamily="34" charset="-120"/>
+              </a:rPr>
+              <a:t>ly</a:t>
+            </a:r>
+            <a:endParaRPr lang="en-US" sz="1300" dirty="0"/>
+          </a:p>
+        </p:txBody>
+      </p:sp>
+      <p:sp>
+        <p:nvSpPr>
+          <p:cNvPr id="24" name="Text 22"/>
+          <p:cNvSpPr/>
+          <p:nvPr/>
+        </p:nvSpPr>
+        <p:spPr>
+          <a:xfrm>
+            <a:off x="6519672" y="2569464"/>
+            <a:ext cx="1828800" cy="201168"/>
+          </a:xfrm>
+          <a:prstGeom prst="rect">
+            <a:avLst/>
+          </a:prstGeom>
+          <a:noFill/>
+          <a:ln/>
+        </p:spPr>
+        <p:txBody>
+          <a:bodyPr wrap="square" lIns="0" tIns="0" rIns="0" bIns="0" rtlCol="0" anchor="t"/>
+          <a:lstStyle/>
+          <a:p>
+            <a:pPr algn="ctr" indent="0" marL="0">
+              <a:buNone/>
+            </a:pPr>
+            <a:r>
+              <a:rPr lang="en-US" sz="850" dirty="0">
+                <a:solidFill>
+                  <a:srgbClr val="475569"/>
+                </a:solidFill>
+                <a:latin typeface="Calibri" pitchFamily="34" charset="0"/>
+                <a:ea typeface="Calibri" pitchFamily="34" charset="-122"/>
+                <a:cs typeface="Calibri" pitchFamily="34" charset="-120"/>
+              </a:rPr>
+              <a:t>in a certain way</a:t>
+            </a:r>
+            <a:endParaRPr lang="en-US" sz="850" dirty="0"/>
+          </a:p>
+        </p:txBody>
+      </p:sp>
+      <p:sp>
+        <p:nvSpPr>
+          <p:cNvPr id="25" name="Shape 23"/>
           <p:cNvSpPr/>
           <p:nvPr/>
         </p:nvSpPr>
@@ -25966,7 +25941,7 @@
       </p:sp>
       <p:sp>
         <p:nvSpPr>
-          <p:cNvPr id="23" name="Text 21"/>
+          <p:cNvPr id="26" name="Text 24"/>
           <p:cNvSpPr/>
           <p:nvPr/>
         </p:nvSpPr>
@@ -26005,7 +25980,7 @@
       </p:sp>
       <p:sp>
         <p:nvSpPr>
-          <p:cNvPr id="24" name="Shape 22"/>
+          <p:cNvPr id="27" name="Shape 25"/>
           <p:cNvSpPr/>
           <p:nvPr/>
         </p:nvSpPr>
@@ -26032,13 +26007,13 @@
       </p:sp>
       <p:sp>
         <p:nvSpPr>
-          <p:cNvPr id="25" name="Shape 23"/>
-          <p:cNvSpPr/>
-          <p:nvPr/>
-        </p:nvSpPr>
-        <p:spPr>
-          <a:xfrm>
-            <a:off x="2999232" y="3364992"/>
+          <p:cNvPr id="28" name="Shape 26"/>
+          <p:cNvSpPr/>
+          <p:nvPr/>
+        </p:nvSpPr>
+        <p:spPr>
+          <a:xfrm>
+            <a:off x="2313432" y="3364992"/>
             <a:ext cx="1645920" cy="475488"/>
           </a:xfrm>
           <a:prstGeom prst="rect">
@@ -26059,13 +26034,13 @@
       </p:sp>
       <p:sp>
         <p:nvSpPr>
-          <p:cNvPr id="26" name="Text 24"/>
-          <p:cNvSpPr/>
-          <p:nvPr/>
-        </p:nvSpPr>
-        <p:spPr>
-          <a:xfrm>
-            <a:off x="2999232" y="3364992"/>
+          <p:cNvPr id="29" name="Text 27"/>
+          <p:cNvSpPr/>
+          <p:nvPr/>
+        </p:nvSpPr>
+        <p:spPr>
+          <a:xfrm>
+            <a:off x="2313432" y="3364992"/>
             <a:ext cx="1645920" cy="475488"/>
           </a:xfrm>
           <a:prstGeom prst="rect">
@@ -26098,14 +26073,14 @@
       </p:sp>
       <p:sp>
         <p:nvSpPr>
-          <p:cNvPr id="27" name="Text 25"/>
-          <p:cNvSpPr/>
-          <p:nvPr/>
-        </p:nvSpPr>
-        <p:spPr>
-          <a:xfrm>
-            <a:off x="4645152" y="3364992"/>
-            <a:ext cx="1097280" cy="475488"/>
+          <p:cNvPr id="30" name="Text 28"/>
+          <p:cNvSpPr/>
+          <p:nvPr/>
+        </p:nvSpPr>
+        <p:spPr>
+          <a:xfrm>
+            <a:off x="3959352" y="3364992"/>
+            <a:ext cx="411480" cy="475488"/>
           </a:xfrm>
           <a:prstGeom prst="rect">
             <a:avLst/>
@@ -26137,13 +26112,13 @@
       </p:sp>
       <p:sp>
         <p:nvSpPr>
-          <p:cNvPr id="28" name="Shape 26"/>
-          <p:cNvSpPr/>
-          <p:nvPr/>
-        </p:nvSpPr>
-        <p:spPr>
-          <a:xfrm>
-            <a:off x="5742432" y="3364992"/>
+          <p:cNvPr id="31" name="Shape 29"/>
+          <p:cNvSpPr/>
+          <p:nvPr/>
+        </p:nvSpPr>
+        <p:spPr>
+          <a:xfrm>
+            <a:off x="4370832" y="3364992"/>
             <a:ext cx="1645920" cy="475488"/>
           </a:xfrm>
           <a:prstGeom prst="rect">
@@ -26164,13 +26139,13 @@
       </p:sp>
       <p:sp>
         <p:nvSpPr>
-          <p:cNvPr id="29" name="Text 27"/>
-          <p:cNvSpPr/>
-          <p:nvPr/>
-        </p:nvSpPr>
-        <p:spPr>
-          <a:xfrm>
-            <a:off x="5742432" y="3364992"/>
+          <p:cNvPr id="32" name="Text 30"/>
+          <p:cNvSpPr/>
+          <p:nvPr/>
+        </p:nvSpPr>
+        <p:spPr>
+          <a:xfrm>
+            <a:off x="4370832" y="3364992"/>
             <a:ext cx="1645920" cy="475488"/>
           </a:xfrm>
           <a:prstGeom prst="rect">
@@ -26195,7 +26170,7 @@
                 <a:ea typeface="Trebuchet MS" pitchFamily="34" charset="-122"/>
                 <a:cs typeface="Trebuchet MS" pitchFamily="34" charset="-120"/>
               </a:rPr>
-              <a:t>ful</a:t>
+              <a:t>less</a:t>
             </a:r>
             <a:endParaRPr lang="en-US" sz="1400" dirty="0"/>
           </a:p>
@@ -26203,7 +26178,112 @@
       </p:sp>
       <p:sp>
         <p:nvSpPr>
-          <p:cNvPr id="30" name="Shape 28"/>
+          <p:cNvPr id="33" name="Text 31"/>
+          <p:cNvSpPr/>
+          <p:nvPr/>
+        </p:nvSpPr>
+        <p:spPr>
+          <a:xfrm>
+            <a:off x="6016752" y="3364992"/>
+            <a:ext cx="411480" cy="475488"/>
+          </a:xfrm>
+          <a:prstGeom prst="rect">
+            <a:avLst/>
+          </a:prstGeom>
+          <a:noFill/>
+          <a:ln/>
+        </p:spPr>
+        <p:txBody>
+          <a:bodyPr wrap="square" lIns="0" tIns="0" rIns="0" bIns="0" rtlCol="0" anchor="ctr"/>
+          <a:lstStyle/>
+          <a:p>
+            <a:pPr algn="ctr" indent="0" marL="0">
+              <a:buNone/>
+            </a:pPr>
+            <a:r>
+              <a:rPr lang="en-US" sz="1600" b="1" dirty="0">
+                <a:solidFill>
+                  <a:srgbClr val="0D9488"/>
+                </a:solidFill>
+                <a:latin typeface="Trebuchet MS" pitchFamily="34" charset="0"/>
+                <a:ea typeface="Trebuchet MS" pitchFamily="34" charset="-122"/>
+                <a:cs typeface="Trebuchet MS" pitchFamily="34" charset="-120"/>
+              </a:rPr>
+              <a:t>·</a:t>
+            </a:r>
+            <a:endParaRPr lang="en-US" sz="1600" dirty="0"/>
+          </a:p>
+        </p:txBody>
+      </p:sp>
+      <p:sp>
+        <p:nvSpPr>
+          <p:cNvPr id="34" name="Shape 32"/>
+          <p:cNvSpPr/>
+          <p:nvPr/>
+        </p:nvSpPr>
+        <p:spPr>
+          <a:xfrm>
+            <a:off x="6428232" y="3364992"/>
+            <a:ext cx="1645920" cy="475488"/>
+          </a:xfrm>
+          <a:prstGeom prst="rect">
+            <a:avLst>
+              <a:gd name="adj" fmla="val 9615"/>
+            </a:avLst>
+          </a:prstGeom>
+          <a:solidFill>
+            <a:srgbClr val="FFFFFF"/>
+          </a:solidFill>
+          <a:ln w="12700">
+            <a:solidFill>
+              <a:srgbClr val="0D9488"/>
+            </a:solidFill>
+            <a:prstDash val="solid"/>
+          </a:ln>
+        </p:spPr>
+      </p:sp>
+      <p:sp>
+        <p:nvSpPr>
+          <p:cNvPr id="35" name="Text 33"/>
+          <p:cNvSpPr/>
+          <p:nvPr/>
+        </p:nvSpPr>
+        <p:spPr>
+          <a:xfrm>
+            <a:off x="6428232" y="3364992"/>
+            <a:ext cx="1645920" cy="475488"/>
+          </a:xfrm>
+          <a:prstGeom prst="rect">
+            <a:avLst/>
+          </a:prstGeom>
+          <a:noFill/>
+          <a:ln/>
+        </p:spPr>
+        <p:txBody>
+          <a:bodyPr wrap="square" lIns="0" tIns="0" rIns="0" bIns="0" rtlCol="0" anchor="ctr"/>
+          <a:lstStyle/>
+          <a:p>
+            <a:pPr algn="ctr" indent="0" marL="0">
+              <a:buNone/>
+            </a:pPr>
+            <a:r>
+              <a:rPr lang="en-US" sz="1400" b="1" dirty="0">
+                <a:solidFill>
+                  <a:srgbClr val="0D9488"/>
+                </a:solidFill>
+                <a:latin typeface="Trebuchet MS" pitchFamily="34" charset="0"/>
+                <a:ea typeface="Trebuchet MS" pitchFamily="34" charset="-122"/>
+                <a:cs typeface="Trebuchet MS" pitchFamily="34" charset="-120"/>
+              </a:rPr>
+              <a:t>ly</a:t>
+            </a:r>
+            <a:endParaRPr lang="en-US" sz="1400" dirty="0"/>
+          </a:p>
+        </p:txBody>
+      </p:sp>
+      <p:sp>
+        <p:nvSpPr>
+          <p:cNvPr id="36" name="Shape 34"/>
           <p:cNvSpPr/>
           <p:nvPr/>
         </p:nvSpPr>
@@ -26230,7 +26310,7 @@
       </p:sp>
       <p:sp>
         <p:nvSpPr>
-          <p:cNvPr id="31" name="Text 29"/>
+          <p:cNvPr id="37" name="Text 35"/>
           <p:cNvSpPr/>
           <p:nvPr/>
         </p:nvSpPr>
@@ -26269,7 +26349,7 @@
       </p:sp>
       <p:sp>
         <p:nvSpPr>
-          <p:cNvPr id="32" name="Shape 30"/>
+          <p:cNvPr id="38" name="Shape 36"/>
           <p:cNvSpPr/>
           <p:nvPr/>
         </p:nvSpPr>
@@ -26296,7 +26376,7 @@
       </p:sp>
       <p:sp>
         <p:nvSpPr>
-          <p:cNvPr id="33" name="Text 31"/>
+          <p:cNvPr id="39" name="Text 37"/>
           <p:cNvSpPr/>
           <p:nvPr/>
         </p:nvSpPr>
@@ -26619,7 +26699,7 @@
                 <a:ea typeface="Calibri" pitchFamily="34" charset="-122"/>
                 <a:cs typeface="Calibri" pitchFamily="34" charset="-120"/>
               </a:rPr>
-              <a:t>Word Labs  •  wordlabs.app  •  Root: 'grace' = elegance, beauty, divine favour</a:t>
+              <a:t>Word Labs  •  wordlabs.app  •  Root: 'grace' = elegance, favour, goodwill</a:t>
             </a:r>
             <a:endParaRPr lang="en-US" sz="800" dirty="0"/>
           </a:p>
@@ -26758,7 +26838,7 @@
                 <a:ea typeface="Trebuchet MS" pitchFamily="34" charset="-122"/>
                 <a:cs typeface="Trebuchet MS" pitchFamily="34" charset="-120"/>
               </a:rPr>
-              <a:t>graceful</a:t>
+              <a:t>gracelessly</a:t>
             </a:r>
             <a:endParaRPr lang="en-US" sz="2800" dirty="0"/>
           </a:p>
@@ -26838,7 +26918,7 @@
         </p:nvSpPr>
         <p:spPr>
           <a:xfrm>
-            <a:off x="2938272" y="2258568"/>
+            <a:off x="2221992" y="2258568"/>
             <a:ext cx="1828800" cy="292608"/>
           </a:xfrm>
           <a:prstGeom prst="rect">
@@ -26872,7 +26952,7 @@
         </p:nvSpPr>
         <p:spPr>
           <a:xfrm>
-            <a:off x="2938272" y="2258568"/>
+            <a:off x="2221992" y="2258568"/>
             <a:ext cx="1828800" cy="292608"/>
           </a:xfrm>
           <a:prstGeom prst="rect">
@@ -26911,7 +26991,7 @@
         </p:nvSpPr>
         <p:spPr>
           <a:xfrm>
-            <a:off x="2938272" y="2569464"/>
+            <a:off x="2221992" y="2569464"/>
             <a:ext cx="1828800" cy="201168"/>
           </a:xfrm>
           <a:prstGeom prst="rect">
@@ -26936,7 +27016,7 @@
                 <a:ea typeface="Calibri" pitchFamily="34" charset="-122"/>
                 <a:cs typeface="Calibri" pitchFamily="34" charset="-120"/>
               </a:rPr>
-              <a:t>elegance, beauty</a:t>
+              <a:t>elegance, beauty, favour</a:t>
             </a:r>
             <a:endParaRPr lang="en-US" sz="850" dirty="0"/>
           </a:p>
@@ -26950,7 +27030,7 @@
         </p:nvSpPr>
         <p:spPr>
           <a:xfrm>
-            <a:off x="5803392" y="2258568"/>
+            <a:off x="4370832" y="2258568"/>
             <a:ext cx="1828800" cy="292608"/>
           </a:xfrm>
           <a:prstGeom prst="rect">
@@ -26959,11 +27039,11 @@
             </a:avLst>
           </a:prstGeom>
           <a:solidFill>
-            <a:srgbClr val="FCE7F3"/>
+            <a:srgbClr val="DDD6FE"/>
           </a:solidFill>
           <a:ln w="19050">
             <a:solidFill>
-              <a:srgbClr val="DB2777"/>
+              <a:srgbClr val="7C3AED"/>
             </a:solidFill>
             <a:prstDash val="solid"/>
           </a:ln>
@@ -26984,7 +27064,7 @@
         </p:nvSpPr>
         <p:spPr>
           <a:xfrm>
-            <a:off x="5803392" y="2258568"/>
+            <a:off x="4370832" y="2258568"/>
             <a:ext cx="1828800" cy="292608"/>
           </a:xfrm>
           <a:prstGeom prst="rect">
@@ -27003,13 +27083,13 @@
             <a:r>
               <a:rPr lang="en-US" sz="1300" b="1" dirty="0">
                 <a:solidFill>
-                  <a:srgbClr val="9D174D"/>
+                  <a:srgbClr val="4C1D95"/>
                 </a:solidFill>
                 <a:latin typeface="Trebuchet MS" pitchFamily="34" charset="0"/>
                 <a:ea typeface="Trebuchet MS" pitchFamily="34" charset="-122"/>
                 <a:cs typeface="Trebuchet MS" pitchFamily="34" charset="-120"/>
               </a:rPr>
-              <a:t>ful</a:t>
+              <a:t>less</a:t>
             </a:r>
             <a:endParaRPr lang="en-US" sz="1300" dirty="0"/>
           </a:p>
@@ -27023,7 +27103,7 @@
         </p:nvSpPr>
         <p:spPr>
           <a:xfrm>
-            <a:off x="5803392" y="2569464"/>
+            <a:off x="4370832" y="2569464"/>
             <a:ext cx="1828800" cy="201168"/>
           </a:xfrm>
           <a:prstGeom prst="rect">
@@ -27048,7 +27128,7 @@
                 <a:ea typeface="Calibri" pitchFamily="34" charset="-122"/>
                 <a:cs typeface="Calibri" pitchFamily="34" charset="-120"/>
               </a:rPr>
-              <a:t>full of</a:t>
+              <a:t>without, lacking</a:t>
             </a:r>
             <a:endParaRPr lang="en-US" sz="850" dirty="0"/>
           </a:p>
@@ -27057,6 +27137,118 @@
       <p:sp>
         <p:nvSpPr>
           <p:cNvPr id="22" name="Shape 20"/>
+          <p:cNvSpPr/>
+          <p:nvPr/>
+        </p:nvSpPr>
+        <p:spPr>
+          <a:xfrm>
+            <a:off x="6519672" y="2258568"/>
+            <a:ext cx="1828800" cy="292608"/>
+          </a:xfrm>
+          <a:prstGeom prst="rect">
+            <a:avLst>
+              <a:gd name="adj" fmla="val 25000"/>
+            </a:avLst>
+          </a:prstGeom>
+          <a:solidFill>
+            <a:srgbClr val="FCE7F3"/>
+          </a:solidFill>
+          <a:ln w="19050">
+            <a:solidFill>
+              <a:srgbClr val="DB2777"/>
+            </a:solidFill>
+            <a:prstDash val="solid"/>
+          </a:ln>
+          <a:effectLst>
+            <a:outerShdw sx="100000" sy="100000" kx="0" ky="0" algn="bl" rotWithShape="0" blurRad="101600" dist="38100" dir="8100000">
+              <a:srgbClr val="000000">
+                <a:alpha val="12000"/>
+              </a:srgbClr>
+            </a:outerShdw>
+          </a:effectLst>
+        </p:spPr>
+      </p:sp>
+      <p:sp>
+        <p:nvSpPr>
+          <p:cNvPr id="23" name="Text 21"/>
+          <p:cNvSpPr/>
+          <p:nvPr/>
+        </p:nvSpPr>
+        <p:spPr>
+          <a:xfrm>
+            <a:off x="6519672" y="2258568"/>
+            <a:ext cx="1828800" cy="292608"/>
+          </a:xfrm>
+          <a:prstGeom prst="rect">
+            <a:avLst/>
+          </a:prstGeom>
+          <a:noFill/>
+          <a:ln/>
+        </p:spPr>
+        <p:txBody>
+          <a:bodyPr wrap="square" lIns="0" tIns="0" rIns="0" bIns="0" rtlCol="0" anchor="ctr"/>
+          <a:lstStyle/>
+          <a:p>
+            <a:pPr algn="ctr" indent="0" marL="0">
+              <a:buNone/>
+            </a:pPr>
+            <a:r>
+              <a:rPr lang="en-US" sz="1300" b="1" dirty="0">
+                <a:solidFill>
+                  <a:srgbClr val="9D174D"/>
+                </a:solidFill>
+                <a:latin typeface="Trebuchet MS" pitchFamily="34" charset="0"/>
+                <a:ea typeface="Trebuchet MS" pitchFamily="34" charset="-122"/>
+                <a:cs typeface="Trebuchet MS" pitchFamily="34" charset="-120"/>
+              </a:rPr>
+              <a:t>ly</a:t>
+            </a:r>
+            <a:endParaRPr lang="en-US" sz="1300" dirty="0"/>
+          </a:p>
+        </p:txBody>
+      </p:sp>
+      <p:sp>
+        <p:nvSpPr>
+          <p:cNvPr id="24" name="Text 22"/>
+          <p:cNvSpPr/>
+          <p:nvPr/>
+        </p:nvSpPr>
+        <p:spPr>
+          <a:xfrm>
+            <a:off x="6519672" y="2569464"/>
+            <a:ext cx="1828800" cy="201168"/>
+          </a:xfrm>
+          <a:prstGeom prst="rect">
+            <a:avLst/>
+          </a:prstGeom>
+          <a:noFill/>
+          <a:ln/>
+        </p:spPr>
+        <p:txBody>
+          <a:bodyPr wrap="square" lIns="0" tIns="0" rIns="0" bIns="0" rtlCol="0" anchor="t"/>
+          <a:lstStyle/>
+          <a:p>
+            <a:pPr algn="ctr" indent="0" marL="0">
+              <a:buNone/>
+            </a:pPr>
+            <a:r>
+              <a:rPr lang="en-US" sz="850" dirty="0">
+                <a:solidFill>
+                  <a:srgbClr val="475569"/>
+                </a:solidFill>
+                <a:latin typeface="Calibri" pitchFamily="34" charset="0"/>
+                <a:ea typeface="Calibri" pitchFamily="34" charset="-122"/>
+                <a:cs typeface="Calibri" pitchFamily="34" charset="-120"/>
+              </a:rPr>
+              <a:t>in a certain way</a:t>
+            </a:r>
+            <a:endParaRPr lang="en-US" sz="850" dirty="0"/>
+          </a:p>
+        </p:txBody>
+      </p:sp>
+      <p:sp>
+        <p:nvSpPr>
+          <p:cNvPr id="25" name="Shape 23"/>
           <p:cNvSpPr/>
           <p:nvPr/>
         </p:nvSpPr>
@@ -27083,7 +27275,7 @@
       </p:sp>
       <p:sp>
         <p:nvSpPr>
-          <p:cNvPr id="23" name="Text 21"/>
+          <p:cNvPr id="26" name="Text 24"/>
           <p:cNvSpPr/>
           <p:nvPr/>
         </p:nvSpPr>
@@ -27122,7 +27314,7 @@
       </p:sp>
       <p:sp>
         <p:nvSpPr>
-          <p:cNvPr id="24" name="Shape 22"/>
+          <p:cNvPr id="27" name="Shape 25"/>
           <p:cNvSpPr/>
           <p:nvPr/>
         </p:nvSpPr>
@@ -27149,13 +27341,13 @@
       </p:sp>
       <p:sp>
         <p:nvSpPr>
-          <p:cNvPr id="25" name="Shape 23"/>
-          <p:cNvSpPr/>
-          <p:nvPr/>
-        </p:nvSpPr>
-        <p:spPr>
-          <a:xfrm>
-            <a:off x="2999232" y="3364992"/>
+          <p:cNvPr id="28" name="Shape 26"/>
+          <p:cNvSpPr/>
+          <p:nvPr/>
+        </p:nvSpPr>
+        <p:spPr>
+          <a:xfrm>
+            <a:off x="2313432" y="3364992"/>
             <a:ext cx="1645920" cy="475488"/>
           </a:xfrm>
           <a:prstGeom prst="rect">
@@ -27176,13 +27368,13 @@
       </p:sp>
       <p:sp>
         <p:nvSpPr>
-          <p:cNvPr id="26" name="Text 24"/>
-          <p:cNvSpPr/>
-          <p:nvPr/>
-        </p:nvSpPr>
-        <p:spPr>
-          <a:xfrm>
-            <a:off x="2999232" y="3364992"/>
+          <p:cNvPr id="29" name="Text 27"/>
+          <p:cNvSpPr/>
+          <p:nvPr/>
+        </p:nvSpPr>
+        <p:spPr>
+          <a:xfrm>
+            <a:off x="2313432" y="3364992"/>
             <a:ext cx="1645920" cy="475488"/>
           </a:xfrm>
           <a:prstGeom prst="rect">
@@ -27215,14 +27407,14 @@
       </p:sp>
       <p:sp>
         <p:nvSpPr>
-          <p:cNvPr id="27" name="Text 25"/>
-          <p:cNvSpPr/>
-          <p:nvPr/>
-        </p:nvSpPr>
-        <p:spPr>
-          <a:xfrm>
-            <a:off x="4645152" y="3364992"/>
-            <a:ext cx="1097280" cy="475488"/>
+          <p:cNvPr id="30" name="Text 28"/>
+          <p:cNvSpPr/>
+          <p:nvPr/>
+        </p:nvSpPr>
+        <p:spPr>
+          <a:xfrm>
+            <a:off x="3959352" y="3364992"/>
+            <a:ext cx="411480" cy="475488"/>
           </a:xfrm>
           <a:prstGeom prst="rect">
             <a:avLst/>
@@ -27254,13 +27446,13 @@
       </p:sp>
       <p:sp>
         <p:nvSpPr>
-          <p:cNvPr id="28" name="Shape 26"/>
-          <p:cNvSpPr/>
-          <p:nvPr/>
-        </p:nvSpPr>
-        <p:spPr>
-          <a:xfrm>
-            <a:off x="5742432" y="3364992"/>
+          <p:cNvPr id="31" name="Shape 29"/>
+          <p:cNvSpPr/>
+          <p:nvPr/>
+        </p:nvSpPr>
+        <p:spPr>
+          <a:xfrm>
+            <a:off x="4370832" y="3364992"/>
             <a:ext cx="1645920" cy="475488"/>
           </a:xfrm>
           <a:prstGeom prst="rect">
@@ -27281,13 +27473,13 @@
       </p:sp>
       <p:sp>
         <p:nvSpPr>
-          <p:cNvPr id="29" name="Text 27"/>
-          <p:cNvSpPr/>
-          <p:nvPr/>
-        </p:nvSpPr>
-        <p:spPr>
-          <a:xfrm>
-            <a:off x="5742432" y="3364992"/>
+          <p:cNvPr id="32" name="Text 30"/>
+          <p:cNvSpPr/>
+          <p:nvPr/>
+        </p:nvSpPr>
+        <p:spPr>
+          <a:xfrm>
+            <a:off x="4370832" y="3364992"/>
             <a:ext cx="1645920" cy="475488"/>
           </a:xfrm>
           <a:prstGeom prst="rect">
@@ -27312,7 +27504,7 @@
                 <a:ea typeface="Trebuchet MS" pitchFamily="34" charset="-122"/>
                 <a:cs typeface="Trebuchet MS" pitchFamily="34" charset="-120"/>
               </a:rPr>
-              <a:t>ful</a:t>
+              <a:t>less</a:t>
             </a:r>
             <a:endParaRPr lang="en-US" sz="1400" dirty="0"/>
           </a:p>
@@ -27320,7 +27512,112 @@
       </p:sp>
       <p:sp>
         <p:nvSpPr>
-          <p:cNvPr id="30" name="Shape 28"/>
+          <p:cNvPr id="33" name="Text 31"/>
+          <p:cNvSpPr/>
+          <p:nvPr/>
+        </p:nvSpPr>
+        <p:spPr>
+          <a:xfrm>
+            <a:off x="6016752" y="3364992"/>
+            <a:ext cx="411480" cy="475488"/>
+          </a:xfrm>
+          <a:prstGeom prst="rect">
+            <a:avLst/>
+          </a:prstGeom>
+          <a:noFill/>
+          <a:ln/>
+        </p:spPr>
+        <p:txBody>
+          <a:bodyPr wrap="square" lIns="0" tIns="0" rIns="0" bIns="0" rtlCol="0" anchor="ctr"/>
+          <a:lstStyle/>
+          <a:p>
+            <a:pPr algn="ctr" indent="0" marL="0">
+              <a:buNone/>
+            </a:pPr>
+            <a:r>
+              <a:rPr lang="en-US" sz="1600" b="1" dirty="0">
+                <a:solidFill>
+                  <a:srgbClr val="0D9488"/>
+                </a:solidFill>
+                <a:latin typeface="Trebuchet MS" pitchFamily="34" charset="0"/>
+                <a:ea typeface="Trebuchet MS" pitchFamily="34" charset="-122"/>
+                <a:cs typeface="Trebuchet MS" pitchFamily="34" charset="-120"/>
+              </a:rPr>
+              <a:t>·</a:t>
+            </a:r>
+            <a:endParaRPr lang="en-US" sz="1600" dirty="0"/>
+          </a:p>
+        </p:txBody>
+      </p:sp>
+      <p:sp>
+        <p:nvSpPr>
+          <p:cNvPr id="34" name="Shape 32"/>
+          <p:cNvSpPr/>
+          <p:nvPr/>
+        </p:nvSpPr>
+        <p:spPr>
+          <a:xfrm>
+            <a:off x="6428232" y="3364992"/>
+            <a:ext cx="1645920" cy="475488"/>
+          </a:xfrm>
+          <a:prstGeom prst="rect">
+            <a:avLst>
+              <a:gd name="adj" fmla="val 9615"/>
+            </a:avLst>
+          </a:prstGeom>
+          <a:solidFill>
+            <a:srgbClr val="FFFFFF"/>
+          </a:solidFill>
+          <a:ln w="12700">
+            <a:solidFill>
+              <a:srgbClr val="0D9488"/>
+            </a:solidFill>
+            <a:prstDash val="solid"/>
+          </a:ln>
+        </p:spPr>
+      </p:sp>
+      <p:sp>
+        <p:nvSpPr>
+          <p:cNvPr id="35" name="Text 33"/>
+          <p:cNvSpPr/>
+          <p:nvPr/>
+        </p:nvSpPr>
+        <p:spPr>
+          <a:xfrm>
+            <a:off x="6428232" y="3364992"/>
+            <a:ext cx="1645920" cy="475488"/>
+          </a:xfrm>
+          <a:prstGeom prst="rect">
+            <a:avLst/>
+          </a:prstGeom>
+          <a:noFill/>
+          <a:ln/>
+        </p:spPr>
+        <p:txBody>
+          <a:bodyPr wrap="square" lIns="0" tIns="0" rIns="0" bIns="0" rtlCol="0" anchor="ctr"/>
+          <a:lstStyle/>
+          <a:p>
+            <a:pPr algn="ctr" indent="0" marL="0">
+              <a:buNone/>
+            </a:pPr>
+            <a:r>
+              <a:rPr lang="en-US" sz="1400" b="1" dirty="0">
+                <a:solidFill>
+                  <a:srgbClr val="0D9488"/>
+                </a:solidFill>
+                <a:latin typeface="Trebuchet MS" pitchFamily="34" charset="0"/>
+                <a:ea typeface="Trebuchet MS" pitchFamily="34" charset="-122"/>
+                <a:cs typeface="Trebuchet MS" pitchFamily="34" charset="-120"/>
+              </a:rPr>
+              <a:t>ly</a:t>
+            </a:r>
+            <a:endParaRPr lang="en-US" sz="1400" dirty="0"/>
+          </a:p>
+        </p:txBody>
+      </p:sp>
+      <p:sp>
+        <p:nvSpPr>
+          <p:cNvPr id="36" name="Shape 34"/>
           <p:cNvSpPr/>
           <p:nvPr/>
         </p:nvSpPr>
@@ -27347,7 +27644,7 @@
       </p:sp>
       <p:sp>
         <p:nvSpPr>
-          <p:cNvPr id="31" name="Text 29"/>
+          <p:cNvPr id="37" name="Text 35"/>
           <p:cNvSpPr/>
           <p:nvPr/>
         </p:nvSpPr>
@@ -27386,7 +27683,7 @@
       </p:sp>
       <p:sp>
         <p:nvSpPr>
-          <p:cNvPr id="32" name="Shape 30"/>
+          <p:cNvPr id="38" name="Shape 36"/>
           <p:cNvSpPr/>
           <p:nvPr/>
         </p:nvSpPr>
@@ -27413,13 +27710,13 @@
       </p:sp>
       <p:sp>
         <p:nvSpPr>
-          <p:cNvPr id="33" name="Shape 31"/>
-          <p:cNvSpPr/>
-          <p:nvPr/>
-        </p:nvSpPr>
-        <p:spPr>
-          <a:xfrm>
-            <a:off x="2254649" y="4169664"/>
+          <p:cNvPr id="39" name="Shape 37"/>
+          <p:cNvSpPr/>
+          <p:nvPr/>
+        </p:nvSpPr>
+        <p:spPr>
+          <a:xfrm>
+            <a:off x="2023872" y="4169664"/>
             <a:ext cx="685800" cy="384048"/>
           </a:xfrm>
           <a:prstGeom prst="rect">
@@ -27440,13 +27737,13 @@
       </p:sp>
       <p:sp>
         <p:nvSpPr>
-          <p:cNvPr id="34" name="Text 32"/>
-          <p:cNvSpPr/>
-          <p:nvPr/>
-        </p:nvSpPr>
-        <p:spPr>
-          <a:xfrm>
-            <a:off x="2254649" y="4169664"/>
+          <p:cNvPr id="40" name="Text 38"/>
+          <p:cNvSpPr/>
+          <p:nvPr/>
+        </p:nvSpPr>
+        <p:spPr>
+          <a:xfrm>
+            <a:off x="2023872" y="4169664"/>
             <a:ext cx="685800" cy="384048"/>
           </a:xfrm>
           <a:prstGeom prst="rect">
@@ -27479,13 +27776,13 @@
       </p:sp>
       <p:sp>
         <p:nvSpPr>
-          <p:cNvPr id="35" name="Shape 33"/>
-          <p:cNvSpPr/>
-          <p:nvPr/>
-        </p:nvSpPr>
-        <p:spPr>
-          <a:xfrm>
-            <a:off x="3293146" y="4169664"/>
+          <p:cNvPr id="41" name="Shape 39"/>
+          <p:cNvSpPr/>
+          <p:nvPr/>
+        </p:nvSpPr>
+        <p:spPr>
+          <a:xfrm>
+            <a:off x="2831592" y="4169664"/>
             <a:ext cx="685800" cy="384048"/>
           </a:xfrm>
           <a:prstGeom prst="rect">
@@ -27506,13 +27803,13 @@
       </p:sp>
       <p:sp>
         <p:nvSpPr>
-          <p:cNvPr id="36" name="Text 34"/>
-          <p:cNvSpPr/>
-          <p:nvPr/>
-        </p:nvSpPr>
-        <p:spPr>
-          <a:xfrm>
-            <a:off x="3293146" y="4169664"/>
+          <p:cNvPr id="42" name="Text 40"/>
+          <p:cNvSpPr/>
+          <p:nvPr/>
+        </p:nvSpPr>
+        <p:spPr>
+          <a:xfrm>
+            <a:off x="2831592" y="4169664"/>
             <a:ext cx="685800" cy="384048"/>
           </a:xfrm>
           <a:prstGeom prst="rect">
@@ -27545,13 +27842,13 @@
       </p:sp>
       <p:sp>
         <p:nvSpPr>
-          <p:cNvPr id="37" name="Shape 35"/>
-          <p:cNvSpPr/>
-          <p:nvPr/>
-        </p:nvSpPr>
-        <p:spPr>
-          <a:xfrm>
-            <a:off x="4331643" y="4169664"/>
+          <p:cNvPr id="43" name="Shape 41"/>
+          <p:cNvSpPr/>
+          <p:nvPr/>
+        </p:nvSpPr>
+        <p:spPr>
+          <a:xfrm>
+            <a:off x="3639312" y="4169664"/>
             <a:ext cx="685800" cy="384048"/>
           </a:xfrm>
           <a:prstGeom prst="rect">
@@ -27572,13 +27869,13 @@
       </p:sp>
       <p:sp>
         <p:nvSpPr>
-          <p:cNvPr id="38" name="Text 36"/>
-          <p:cNvSpPr/>
-          <p:nvPr/>
-        </p:nvSpPr>
-        <p:spPr>
-          <a:xfrm>
-            <a:off x="4331643" y="4169664"/>
+          <p:cNvPr id="44" name="Text 42"/>
+          <p:cNvSpPr/>
+          <p:nvPr/>
+        </p:nvSpPr>
+        <p:spPr>
+          <a:xfrm>
+            <a:off x="3639312" y="4169664"/>
             <a:ext cx="685800" cy="384048"/>
           </a:xfrm>
           <a:prstGeom prst="rect">
@@ -27611,13 +27908,13 @@
       </p:sp>
       <p:sp>
         <p:nvSpPr>
-          <p:cNvPr id="39" name="Text 37"/>
-          <p:cNvSpPr/>
-          <p:nvPr/>
-        </p:nvSpPr>
-        <p:spPr>
-          <a:xfrm>
-            <a:off x="4331643" y="4572000"/>
+          <p:cNvPr id="45" name="Text 43"/>
+          <p:cNvSpPr/>
+          <p:nvPr/>
+        </p:nvSpPr>
+        <p:spPr>
+          <a:xfrm>
+            <a:off x="3639312" y="4572000"/>
             <a:ext cx="685800" cy="219456"/>
           </a:xfrm>
           <a:prstGeom prst="rect">
@@ -27650,13 +27947,13 @@
       </p:sp>
       <p:sp>
         <p:nvSpPr>
-          <p:cNvPr id="40" name="Shape 38"/>
-          <p:cNvSpPr/>
-          <p:nvPr/>
-        </p:nvSpPr>
-        <p:spPr>
-          <a:xfrm>
-            <a:off x="5370141" y="4169664"/>
+          <p:cNvPr id="46" name="Shape 44"/>
+          <p:cNvSpPr/>
+          <p:nvPr/>
+        </p:nvSpPr>
+        <p:spPr>
+          <a:xfrm>
+            <a:off x="4447032" y="4169664"/>
             <a:ext cx="685800" cy="384048"/>
           </a:xfrm>
           <a:prstGeom prst="rect">
@@ -27677,13 +27974,13 @@
       </p:sp>
       <p:sp>
         <p:nvSpPr>
-          <p:cNvPr id="41" name="Text 39"/>
-          <p:cNvSpPr/>
-          <p:nvPr/>
-        </p:nvSpPr>
-        <p:spPr>
-          <a:xfrm>
-            <a:off x="5370141" y="4169664"/>
+          <p:cNvPr id="47" name="Text 45"/>
+          <p:cNvSpPr/>
+          <p:nvPr/>
+        </p:nvSpPr>
+        <p:spPr>
+          <a:xfrm>
+            <a:off x="4447032" y="4169664"/>
             <a:ext cx="685800" cy="384048"/>
           </a:xfrm>
           <a:prstGeom prst="rect">
@@ -27708,7 +28005,7 @@
                 <a:ea typeface="Trebuchet MS" pitchFamily="34" charset="-122"/>
                 <a:cs typeface="Trebuchet MS" pitchFamily="34" charset="-120"/>
               </a:rPr>
-              <a:t>f</a:t>
+              <a:t>l</a:t>
             </a:r>
             <a:endParaRPr lang="en-US" sz="900" dirty="0"/>
           </a:p>
@@ -27716,13 +28013,13 @@
       </p:sp>
       <p:sp>
         <p:nvSpPr>
-          <p:cNvPr id="42" name="Shape 40"/>
-          <p:cNvSpPr/>
-          <p:nvPr/>
-        </p:nvSpPr>
-        <p:spPr>
-          <a:xfrm>
-            <a:off x="6408638" y="4169664"/>
+          <p:cNvPr id="48" name="Shape 46"/>
+          <p:cNvSpPr/>
+          <p:nvPr/>
+        </p:nvSpPr>
+        <p:spPr>
+          <a:xfrm>
+            <a:off x="5254752" y="4169664"/>
             <a:ext cx="685800" cy="384048"/>
           </a:xfrm>
           <a:prstGeom prst="rect">
@@ -27743,13 +28040,13 @@
       </p:sp>
       <p:sp>
         <p:nvSpPr>
-          <p:cNvPr id="43" name="Text 41"/>
-          <p:cNvSpPr/>
-          <p:nvPr/>
-        </p:nvSpPr>
-        <p:spPr>
-          <a:xfrm>
-            <a:off x="6408638" y="4169664"/>
+          <p:cNvPr id="49" name="Text 47"/>
+          <p:cNvSpPr/>
+          <p:nvPr/>
+        </p:nvSpPr>
+        <p:spPr>
+          <a:xfrm>
+            <a:off x="5254752" y="4169664"/>
             <a:ext cx="685800" cy="384048"/>
           </a:xfrm>
           <a:prstGeom prst="rect">
@@ -27774,7 +28071,7 @@
                 <a:ea typeface="Trebuchet MS" pitchFamily="34" charset="-122"/>
                 <a:cs typeface="Trebuchet MS" pitchFamily="34" charset="-120"/>
               </a:rPr>
-              <a:t>u</a:t>
+              <a:t>e</a:t>
             </a:r>
             <a:endParaRPr lang="en-US" sz="900" dirty="0"/>
           </a:p>
@@ -27782,13 +28079,13 @@
       </p:sp>
       <p:sp>
         <p:nvSpPr>
-          <p:cNvPr id="44" name="Shape 42"/>
-          <p:cNvSpPr/>
-          <p:nvPr/>
-        </p:nvSpPr>
-        <p:spPr>
-          <a:xfrm>
-            <a:off x="7447135" y="4169664"/>
+          <p:cNvPr id="50" name="Shape 48"/>
+          <p:cNvSpPr/>
+          <p:nvPr/>
+        </p:nvSpPr>
+        <p:spPr>
+          <a:xfrm>
+            <a:off x="6062472" y="4169664"/>
             <a:ext cx="685800" cy="384048"/>
           </a:xfrm>
           <a:prstGeom prst="rect">
@@ -27809,13 +28106,13 @@
       </p:sp>
       <p:sp>
         <p:nvSpPr>
-          <p:cNvPr id="45" name="Text 43"/>
-          <p:cNvSpPr/>
-          <p:nvPr/>
-        </p:nvSpPr>
-        <p:spPr>
-          <a:xfrm>
-            <a:off x="7447135" y="4169664"/>
+          <p:cNvPr id="51" name="Text 49"/>
+          <p:cNvSpPr/>
+          <p:nvPr/>
+        </p:nvSpPr>
+        <p:spPr>
+          <a:xfrm>
+            <a:off x="6062472" y="4169664"/>
             <a:ext cx="685800" cy="384048"/>
           </a:xfrm>
           <a:prstGeom prst="rect">
@@ -27840,7 +28137,139 @@
                 <a:ea typeface="Trebuchet MS" pitchFamily="34" charset="-122"/>
                 <a:cs typeface="Trebuchet MS" pitchFamily="34" charset="-120"/>
               </a:rPr>
+              <a:t>ss</a:t>
+            </a:r>
+            <a:endParaRPr lang="en-US" sz="900" dirty="0"/>
+          </a:p>
+        </p:txBody>
+      </p:sp>
+      <p:sp>
+        <p:nvSpPr>
+          <p:cNvPr id="52" name="Shape 50"/>
+          <p:cNvSpPr/>
+          <p:nvPr/>
+        </p:nvSpPr>
+        <p:spPr>
+          <a:xfrm>
+            <a:off x="6870192" y="4169664"/>
+            <a:ext cx="685800" cy="384048"/>
+          </a:xfrm>
+          <a:prstGeom prst="rect">
+            <a:avLst>
+              <a:gd name="adj" fmla="val 9524"/>
+            </a:avLst>
+          </a:prstGeom>
+          <a:solidFill>
+            <a:srgbClr val="FFFFFF"/>
+          </a:solidFill>
+          <a:ln w="12700">
+            <a:solidFill>
+              <a:srgbClr val="DB2777"/>
+            </a:solidFill>
+            <a:prstDash val="solid"/>
+          </a:ln>
+        </p:spPr>
+      </p:sp>
+      <p:sp>
+        <p:nvSpPr>
+          <p:cNvPr id="53" name="Text 51"/>
+          <p:cNvSpPr/>
+          <p:nvPr/>
+        </p:nvSpPr>
+        <p:spPr>
+          <a:xfrm>
+            <a:off x="6870192" y="4169664"/>
+            <a:ext cx="685800" cy="384048"/>
+          </a:xfrm>
+          <a:prstGeom prst="rect">
+            <a:avLst/>
+          </a:prstGeom>
+          <a:noFill/>
+          <a:ln/>
+        </p:spPr>
+        <p:txBody>
+          <a:bodyPr wrap="square" lIns="0" tIns="0" rIns="0" bIns="0" rtlCol="0" anchor="ctr"/>
+          <a:lstStyle/>
+          <a:p>
+            <a:pPr algn="ctr" indent="0" marL="0">
+              <a:buNone/>
+            </a:pPr>
+            <a:r>
+              <a:rPr lang="en-US" sz="900" b="1" dirty="0">
+                <a:solidFill>
+                  <a:srgbClr val="9D174D"/>
+                </a:solidFill>
+                <a:latin typeface="Trebuchet MS" pitchFamily="34" charset="0"/>
+                <a:ea typeface="Trebuchet MS" pitchFamily="34" charset="-122"/>
+                <a:cs typeface="Trebuchet MS" pitchFamily="34" charset="-120"/>
+              </a:rPr>
               <a:t>l</a:t>
+            </a:r>
+            <a:endParaRPr lang="en-US" sz="900" dirty="0"/>
+          </a:p>
+        </p:txBody>
+      </p:sp>
+      <p:sp>
+        <p:nvSpPr>
+          <p:cNvPr id="54" name="Shape 52"/>
+          <p:cNvSpPr/>
+          <p:nvPr/>
+        </p:nvSpPr>
+        <p:spPr>
+          <a:xfrm>
+            <a:off x="7677912" y="4169664"/>
+            <a:ext cx="685800" cy="384048"/>
+          </a:xfrm>
+          <a:prstGeom prst="rect">
+            <a:avLst>
+              <a:gd name="adj" fmla="val 9524"/>
+            </a:avLst>
+          </a:prstGeom>
+          <a:solidFill>
+            <a:srgbClr val="FFFFFF"/>
+          </a:solidFill>
+          <a:ln w="12700">
+            <a:solidFill>
+              <a:srgbClr val="DB2777"/>
+            </a:solidFill>
+            <a:prstDash val="solid"/>
+          </a:ln>
+        </p:spPr>
+      </p:sp>
+      <p:sp>
+        <p:nvSpPr>
+          <p:cNvPr id="55" name="Text 53"/>
+          <p:cNvSpPr/>
+          <p:nvPr/>
+        </p:nvSpPr>
+        <p:spPr>
+          <a:xfrm>
+            <a:off x="7677912" y="4169664"/>
+            <a:ext cx="685800" cy="384048"/>
+          </a:xfrm>
+          <a:prstGeom prst="rect">
+            <a:avLst/>
+          </a:prstGeom>
+          <a:noFill/>
+          <a:ln/>
+        </p:spPr>
+        <p:txBody>
+          <a:bodyPr wrap="square" lIns="0" tIns="0" rIns="0" bIns="0" rtlCol="0" anchor="ctr"/>
+          <a:lstStyle/>
+          <a:p>
+            <a:pPr algn="ctr" indent="0" marL="0">
+              <a:buNone/>
+            </a:pPr>
+            <a:r>
+              <a:rPr lang="en-US" sz="900" b="1" dirty="0">
+                <a:solidFill>
+                  <a:srgbClr val="9D174D"/>
+                </a:solidFill>
+                <a:latin typeface="Trebuchet MS" pitchFamily="34" charset="0"/>
+                <a:ea typeface="Trebuchet MS" pitchFamily="34" charset="-122"/>
+                <a:cs typeface="Trebuchet MS" pitchFamily="34" charset="-120"/>
+              </a:rPr>
+              <a:t>y</a:t>
             </a:r>
             <a:endParaRPr lang="en-US" sz="900" dirty="0"/>
           </a:p>
@@ -28132,7 +28561,7 @@
                 <a:ea typeface="Calibri" pitchFamily="34" charset="-122"/>
                 <a:cs typeface="Calibri" pitchFamily="34" charset="-120"/>
               </a:rPr>
-              <a:t>Word Labs  •  wordlabs.app  •  Root: 'grace' = elegance, beauty, divine favour</a:t>
+              <a:t>Word Labs  •  wordlabs.app  •  Root: 'grace' = elegance, favour, goodwill</a:t>
             </a:r>
             <a:endParaRPr lang="en-US" sz="800" dirty="0"/>
           </a:p>
@@ -28271,7 +28700,7 @@
                 <a:ea typeface="Trebuchet MS" pitchFamily="34" charset="-122"/>
                 <a:cs typeface="Trebuchet MS" pitchFamily="34" charset="-120"/>
               </a:rPr>
-              <a:t>graceless</a:t>
+              <a:t>disgraceful</a:t>
             </a:r>
             <a:endParaRPr lang="en-US" sz="2800" dirty="0"/>
           </a:p>
@@ -28959,7 +29388,7 @@
                 <a:ea typeface="Calibri" pitchFamily="34" charset="-122"/>
                 <a:cs typeface="Calibri" pitchFamily="34" charset="-120"/>
               </a:rPr>
-              <a:t>Word Labs  •  wordlabs.app  •  Root: 'grace' = elegance, beauty, divine favour</a:t>
+              <a:t>Word Labs  •  wordlabs.app  •  Root: 'grace' = elegance, favour, goodwill</a:t>
             </a:r>
             <a:endParaRPr lang="en-US" sz="800" dirty="0"/>
           </a:p>
@@ -29098,7 +29527,7 @@
                 <a:ea typeface="Trebuchet MS" pitchFamily="34" charset="-122"/>
                 <a:cs typeface="Trebuchet MS" pitchFamily="34" charset="-120"/>
               </a:rPr>
-              <a:t>graceless</a:t>
+              <a:t>disgraceful</a:t>
             </a:r>
             <a:endParaRPr lang="en-US" sz="2800" dirty="0"/>
           </a:p>
@@ -29178,7 +29607,7 @@
         </p:nvSpPr>
         <p:spPr>
           <a:xfrm>
-            <a:off x="2938272" y="2258568"/>
+            <a:off x="2221992" y="2258568"/>
             <a:ext cx="1828800" cy="292608"/>
           </a:xfrm>
           <a:prstGeom prst="rect">
@@ -29187,11 +29616,11 @@
             </a:avLst>
           </a:prstGeom>
           <a:solidFill>
-            <a:srgbClr val="CCFBF1"/>
+            <a:srgbClr val="DDD6FE"/>
           </a:solidFill>
           <a:ln w="19050">
             <a:solidFill>
-              <a:srgbClr val="0D9488"/>
+              <a:srgbClr val="7C3AED"/>
             </a:solidFill>
             <a:prstDash val="solid"/>
           </a:ln>
@@ -29212,7 +29641,7 @@
         </p:nvSpPr>
         <p:spPr>
           <a:xfrm>
-            <a:off x="2938272" y="2258568"/>
+            <a:off x="2221992" y="2258568"/>
             <a:ext cx="1828800" cy="292608"/>
           </a:xfrm>
           <a:prstGeom prst="rect">
@@ -29231,13 +29660,13 @@
             <a:r>
               <a:rPr lang="en-US" sz="1300" b="1" dirty="0">
                 <a:solidFill>
-                  <a:srgbClr val="0F766E"/>
+                  <a:srgbClr val="4C1D95"/>
                 </a:solidFill>
                 <a:latin typeface="Trebuchet MS" pitchFamily="34" charset="0"/>
                 <a:ea typeface="Trebuchet MS" pitchFamily="34" charset="-122"/>
                 <a:cs typeface="Trebuchet MS" pitchFamily="34" charset="-120"/>
               </a:rPr>
-              <a:t>grace</a:t>
+              <a:t>dis</a:t>
             </a:r>
             <a:endParaRPr lang="en-US" sz="1300" dirty="0"/>
           </a:p>
@@ -29251,7 +29680,7 @@
         </p:nvSpPr>
         <p:spPr>
           <a:xfrm>
-            <a:off x="2938272" y="2569464"/>
+            <a:off x="2221992" y="2569464"/>
             <a:ext cx="1828800" cy="201168"/>
           </a:xfrm>
           <a:prstGeom prst="rect">
@@ -29276,7 +29705,7 @@
                 <a:ea typeface="Calibri" pitchFamily="34" charset="-122"/>
                 <a:cs typeface="Calibri" pitchFamily="34" charset="-120"/>
               </a:rPr>
-              <a:t>elegance, beauty</a:t>
+              <a:t>not, opposite of, away</a:t>
             </a:r>
             <a:endParaRPr lang="en-US" sz="850" dirty="0"/>
           </a:p>
@@ -29290,7 +29719,7 @@
         </p:nvSpPr>
         <p:spPr>
           <a:xfrm>
-            <a:off x="5803392" y="2258568"/>
+            <a:off x="4370832" y="2258568"/>
             <a:ext cx="1828800" cy="292608"/>
           </a:xfrm>
           <a:prstGeom prst="rect">
@@ -29299,11 +29728,11 @@
             </a:avLst>
           </a:prstGeom>
           <a:solidFill>
-            <a:srgbClr val="DDD6FE"/>
+            <a:srgbClr val="CCFBF1"/>
           </a:solidFill>
           <a:ln w="19050">
             <a:solidFill>
-              <a:srgbClr val="7C3AED"/>
+              <a:srgbClr val="0D9488"/>
             </a:solidFill>
             <a:prstDash val="solid"/>
           </a:ln>
@@ -29324,7 +29753,7 @@
         </p:nvSpPr>
         <p:spPr>
           <a:xfrm>
-            <a:off x="5803392" y="2258568"/>
+            <a:off x="4370832" y="2258568"/>
             <a:ext cx="1828800" cy="292608"/>
           </a:xfrm>
           <a:prstGeom prst="rect">
@@ -29343,13 +29772,13 @@
             <a:r>
               <a:rPr lang="en-US" sz="1300" b="1" dirty="0">
                 <a:solidFill>
-                  <a:srgbClr val="4C1D95"/>
+                  <a:srgbClr val="0F766E"/>
                 </a:solidFill>
                 <a:latin typeface="Trebuchet MS" pitchFamily="34" charset="0"/>
                 <a:ea typeface="Trebuchet MS" pitchFamily="34" charset="-122"/>
                 <a:cs typeface="Trebuchet MS" pitchFamily="34" charset="-120"/>
               </a:rPr>
-              <a:t>less</a:t>
+              <a:t>grace</a:t>
             </a:r>
             <a:endParaRPr lang="en-US" sz="1300" dirty="0"/>
           </a:p>
@@ -29363,7 +29792,7 @@
         </p:nvSpPr>
         <p:spPr>
           <a:xfrm>
-            <a:off x="5803392" y="2569464"/>
+            <a:off x="4370832" y="2569464"/>
             <a:ext cx="1828800" cy="201168"/>
           </a:xfrm>
           <a:prstGeom prst="rect">
@@ -29388,7 +29817,7 @@
                 <a:ea typeface="Calibri" pitchFamily="34" charset="-122"/>
                 <a:cs typeface="Calibri" pitchFamily="34" charset="-120"/>
               </a:rPr>
-              <a:t>without</a:t>
+              <a:t>elegance, beauty, favour</a:t>
             </a:r>
             <a:endParaRPr lang="en-US" sz="850" dirty="0"/>
           </a:p>
@@ -29397,6 +29826,118 @@
       <p:sp>
         <p:nvSpPr>
           <p:cNvPr id="22" name="Shape 20"/>
+          <p:cNvSpPr/>
+          <p:nvPr/>
+        </p:nvSpPr>
+        <p:spPr>
+          <a:xfrm>
+            <a:off x="6519672" y="2258568"/>
+            <a:ext cx="1828800" cy="292608"/>
+          </a:xfrm>
+          <a:prstGeom prst="rect">
+            <a:avLst>
+              <a:gd name="adj" fmla="val 25000"/>
+            </a:avLst>
+          </a:prstGeom>
+          <a:solidFill>
+            <a:srgbClr val="FCE7F3"/>
+          </a:solidFill>
+          <a:ln w="19050">
+            <a:solidFill>
+              <a:srgbClr val="DB2777"/>
+            </a:solidFill>
+            <a:prstDash val="solid"/>
+          </a:ln>
+          <a:effectLst>
+            <a:outerShdw sx="100000" sy="100000" kx="0" ky="0" algn="bl" rotWithShape="0" blurRad="101600" dist="38100" dir="8100000">
+              <a:srgbClr val="000000">
+                <a:alpha val="12000"/>
+              </a:srgbClr>
+            </a:outerShdw>
+          </a:effectLst>
+        </p:spPr>
+      </p:sp>
+      <p:sp>
+        <p:nvSpPr>
+          <p:cNvPr id="23" name="Text 21"/>
+          <p:cNvSpPr/>
+          <p:nvPr/>
+        </p:nvSpPr>
+        <p:spPr>
+          <a:xfrm>
+            <a:off x="6519672" y="2258568"/>
+            <a:ext cx="1828800" cy="292608"/>
+          </a:xfrm>
+          <a:prstGeom prst="rect">
+            <a:avLst/>
+          </a:prstGeom>
+          <a:noFill/>
+          <a:ln/>
+        </p:spPr>
+        <p:txBody>
+          <a:bodyPr wrap="square" lIns="0" tIns="0" rIns="0" bIns="0" rtlCol="0" anchor="ctr"/>
+          <a:lstStyle/>
+          <a:p>
+            <a:pPr algn="ctr" indent="0" marL="0">
+              <a:buNone/>
+            </a:pPr>
+            <a:r>
+              <a:rPr lang="en-US" sz="1300" b="1" dirty="0">
+                <a:solidFill>
+                  <a:srgbClr val="9D174D"/>
+                </a:solidFill>
+                <a:latin typeface="Trebuchet MS" pitchFamily="34" charset="0"/>
+                <a:ea typeface="Trebuchet MS" pitchFamily="34" charset="-122"/>
+                <a:cs typeface="Trebuchet MS" pitchFamily="34" charset="-120"/>
+              </a:rPr>
+              <a:t>ful</a:t>
+            </a:r>
+            <a:endParaRPr lang="en-US" sz="1300" dirty="0"/>
+          </a:p>
+        </p:txBody>
+      </p:sp>
+      <p:sp>
+        <p:nvSpPr>
+          <p:cNvPr id="24" name="Text 22"/>
+          <p:cNvSpPr/>
+          <p:nvPr/>
+        </p:nvSpPr>
+        <p:spPr>
+          <a:xfrm>
+            <a:off x="6519672" y="2569464"/>
+            <a:ext cx="1828800" cy="201168"/>
+          </a:xfrm>
+          <a:prstGeom prst="rect">
+            <a:avLst/>
+          </a:prstGeom>
+          <a:noFill/>
+          <a:ln/>
+        </p:spPr>
+        <p:txBody>
+          <a:bodyPr wrap="square" lIns="0" tIns="0" rIns="0" bIns="0" rtlCol="0" anchor="t"/>
+          <a:lstStyle/>
+          <a:p>
+            <a:pPr algn="ctr" indent="0" marL="0">
+              <a:buNone/>
+            </a:pPr>
+            <a:r>
+              <a:rPr lang="en-US" sz="850" dirty="0">
+                <a:solidFill>
+                  <a:srgbClr val="475569"/>
+                </a:solidFill>
+                <a:latin typeface="Calibri" pitchFamily="34" charset="0"/>
+                <a:ea typeface="Calibri" pitchFamily="34" charset="-122"/>
+                <a:cs typeface="Calibri" pitchFamily="34" charset="-120"/>
+              </a:rPr>
+              <a:t>full of, having the quality of</a:t>
+            </a:r>
+            <a:endParaRPr lang="en-US" sz="850" dirty="0"/>
+          </a:p>
+        </p:txBody>
+      </p:sp>
+      <p:sp>
+        <p:nvSpPr>
+          <p:cNvPr id="25" name="Shape 23"/>
           <p:cNvSpPr/>
           <p:nvPr/>
         </p:nvSpPr>
@@ -29423,7 +29964,7 @@
       </p:sp>
       <p:sp>
         <p:nvSpPr>
-          <p:cNvPr id="23" name="Text 21"/>
+          <p:cNvPr id="26" name="Text 24"/>
           <p:cNvSpPr/>
           <p:nvPr/>
         </p:nvSpPr>
@@ -29462,7 +30003,7 @@
       </p:sp>
       <p:sp>
         <p:nvSpPr>
-          <p:cNvPr id="24" name="Shape 22"/>
+          <p:cNvPr id="27" name="Shape 25"/>
           <p:cNvSpPr/>
           <p:nvPr/>
         </p:nvSpPr>
@@ -29489,7 +30030,7 @@
       </p:sp>
       <p:sp>
         <p:nvSpPr>
-          <p:cNvPr id="25" name="Text 23"/>
+          <p:cNvPr id="28" name="Text 26"/>
           <p:cNvSpPr/>
           <p:nvPr/>
         </p:nvSpPr>
@@ -29528,7 +30069,7 @@
       </p:sp>
       <p:sp>
         <p:nvSpPr>
-          <p:cNvPr id="26" name="Shape 24"/>
+          <p:cNvPr id="29" name="Shape 27"/>
           <p:cNvSpPr/>
           <p:nvPr/>
         </p:nvSpPr>
@@ -29555,7 +30096,7 @@
       </p:sp>
       <p:sp>
         <p:nvSpPr>
-          <p:cNvPr id="27" name="Text 25"/>
+          <p:cNvPr id="30" name="Text 28"/>
           <p:cNvSpPr/>
           <p:nvPr/>
         </p:nvSpPr>
@@ -29594,7 +30135,7 @@
       </p:sp>
       <p:sp>
         <p:nvSpPr>
-          <p:cNvPr id="28" name="Shape 26"/>
+          <p:cNvPr id="31" name="Shape 29"/>
           <p:cNvSpPr/>
           <p:nvPr/>
         </p:nvSpPr>
@@ -29621,7 +30162,7 @@
       </p:sp>
       <p:sp>
         <p:nvSpPr>
-          <p:cNvPr id="29" name="Text 27"/>
+          <p:cNvPr id="32" name="Text 30"/>
           <p:cNvSpPr/>
           <p:nvPr/>
         </p:nvSpPr>
@@ -29944,7 +30485,7 @@
                 <a:ea typeface="Calibri" pitchFamily="34" charset="-122"/>
                 <a:cs typeface="Calibri" pitchFamily="34" charset="-120"/>
               </a:rPr>
-              <a:t>Word Labs  •  wordlabs.app  •  Root: 'grace' = elegance, beauty, divine favour</a:t>
+              <a:t>Word Labs  •  wordlabs.app  •  Root: 'grace' = elegance, favour, goodwill</a:t>
             </a:r>
             <a:endParaRPr lang="en-US" sz="800" dirty="0"/>
           </a:p>
@@ -30083,7 +30624,7 @@
                 <a:ea typeface="Trebuchet MS" pitchFamily="34" charset="-122"/>
                 <a:cs typeface="Trebuchet MS" pitchFamily="34" charset="-120"/>
               </a:rPr>
-              <a:t>graceless</a:t>
+              <a:t>disgraceful</a:t>
             </a:r>
             <a:endParaRPr lang="en-US" sz="2800" dirty="0"/>
           </a:p>
@@ -30163,7 +30704,7 @@
         </p:nvSpPr>
         <p:spPr>
           <a:xfrm>
-            <a:off x="2938272" y="2258568"/>
+            <a:off x="2221992" y="2258568"/>
             <a:ext cx="1828800" cy="292608"/>
           </a:xfrm>
           <a:prstGeom prst="rect">
@@ -30172,11 +30713,11 @@
             </a:avLst>
           </a:prstGeom>
           <a:solidFill>
-            <a:srgbClr val="CCFBF1"/>
+            <a:srgbClr val="DDD6FE"/>
           </a:solidFill>
           <a:ln w="19050">
             <a:solidFill>
-              <a:srgbClr val="0D9488"/>
+              <a:srgbClr val="7C3AED"/>
             </a:solidFill>
             <a:prstDash val="solid"/>
           </a:ln>
@@ -30197,7 +30738,7 @@
         </p:nvSpPr>
         <p:spPr>
           <a:xfrm>
-            <a:off x="2938272" y="2258568"/>
+            <a:off x="2221992" y="2258568"/>
             <a:ext cx="1828800" cy="292608"/>
           </a:xfrm>
           <a:prstGeom prst="rect">
@@ -30216,13 +30757,13 @@
             <a:r>
               <a:rPr lang="en-US" sz="1300" b="1" dirty="0">
                 <a:solidFill>
-                  <a:srgbClr val="0F766E"/>
+                  <a:srgbClr val="4C1D95"/>
                 </a:solidFill>
                 <a:latin typeface="Trebuchet MS" pitchFamily="34" charset="0"/>
                 <a:ea typeface="Trebuchet MS" pitchFamily="34" charset="-122"/>
                 <a:cs typeface="Trebuchet MS" pitchFamily="34" charset="-120"/>
               </a:rPr>
-              <a:t>grace</a:t>
+              <a:t>dis</a:t>
             </a:r>
             <a:endParaRPr lang="en-US" sz="1300" dirty="0"/>
           </a:p>
@@ -30236,7 +30777,7 @@
         </p:nvSpPr>
         <p:spPr>
           <a:xfrm>
-            <a:off x="2938272" y="2569464"/>
+            <a:off x="2221992" y="2569464"/>
             <a:ext cx="1828800" cy="201168"/>
           </a:xfrm>
           <a:prstGeom prst="rect">
@@ -30261,7 +30802,7 @@
                 <a:ea typeface="Calibri" pitchFamily="34" charset="-122"/>
                 <a:cs typeface="Calibri" pitchFamily="34" charset="-120"/>
               </a:rPr>
-              <a:t>elegance, beauty</a:t>
+              <a:t>not, opposite of, away</a:t>
             </a:r>
             <a:endParaRPr lang="en-US" sz="850" dirty="0"/>
           </a:p>
@@ -30275,7 +30816,7 @@
         </p:nvSpPr>
         <p:spPr>
           <a:xfrm>
-            <a:off x="5803392" y="2258568"/>
+            <a:off x="4370832" y="2258568"/>
             <a:ext cx="1828800" cy="292608"/>
           </a:xfrm>
           <a:prstGeom prst="rect">
@@ -30284,11 +30825,11 @@
             </a:avLst>
           </a:prstGeom>
           <a:solidFill>
-            <a:srgbClr val="DDD6FE"/>
+            <a:srgbClr val="CCFBF1"/>
           </a:solidFill>
           <a:ln w="19050">
             <a:solidFill>
-              <a:srgbClr val="7C3AED"/>
+              <a:srgbClr val="0D9488"/>
             </a:solidFill>
             <a:prstDash val="solid"/>
           </a:ln>
@@ -30309,7 +30850,7 @@
         </p:nvSpPr>
         <p:spPr>
           <a:xfrm>
-            <a:off x="5803392" y="2258568"/>
+            <a:off x="4370832" y="2258568"/>
             <a:ext cx="1828800" cy="292608"/>
           </a:xfrm>
           <a:prstGeom prst="rect">
@@ -30328,13 +30869,13 @@
             <a:r>
               <a:rPr lang="en-US" sz="1300" b="1" dirty="0">
                 <a:solidFill>
-                  <a:srgbClr val="4C1D95"/>
+                  <a:srgbClr val="0F766E"/>
                 </a:solidFill>
                 <a:latin typeface="Trebuchet MS" pitchFamily="34" charset="0"/>
                 <a:ea typeface="Trebuchet MS" pitchFamily="34" charset="-122"/>
                 <a:cs typeface="Trebuchet MS" pitchFamily="34" charset="-120"/>
               </a:rPr>
-              <a:t>less</a:t>
+              <a:t>grace</a:t>
             </a:r>
             <a:endParaRPr lang="en-US" sz="1300" dirty="0"/>
           </a:p>
@@ -30348,7 +30889,7 @@
         </p:nvSpPr>
         <p:spPr>
           <a:xfrm>
-            <a:off x="5803392" y="2569464"/>
+            <a:off x="4370832" y="2569464"/>
             <a:ext cx="1828800" cy="201168"/>
           </a:xfrm>
           <a:prstGeom prst="rect">
@@ -30373,7 +30914,7 @@
                 <a:ea typeface="Calibri" pitchFamily="34" charset="-122"/>
                 <a:cs typeface="Calibri" pitchFamily="34" charset="-120"/>
               </a:rPr>
-              <a:t>without</a:t>
+              <a:t>elegance, beauty, favour</a:t>
             </a:r>
             <a:endParaRPr lang="en-US" sz="850" dirty="0"/>
           </a:p>
@@ -30382,6 +30923,118 @@
       <p:sp>
         <p:nvSpPr>
           <p:cNvPr id="22" name="Shape 20"/>
+          <p:cNvSpPr/>
+          <p:nvPr/>
+        </p:nvSpPr>
+        <p:spPr>
+          <a:xfrm>
+            <a:off x="6519672" y="2258568"/>
+            <a:ext cx="1828800" cy="292608"/>
+          </a:xfrm>
+          <a:prstGeom prst="rect">
+            <a:avLst>
+              <a:gd name="adj" fmla="val 25000"/>
+            </a:avLst>
+          </a:prstGeom>
+          <a:solidFill>
+            <a:srgbClr val="FCE7F3"/>
+          </a:solidFill>
+          <a:ln w="19050">
+            <a:solidFill>
+              <a:srgbClr val="DB2777"/>
+            </a:solidFill>
+            <a:prstDash val="solid"/>
+          </a:ln>
+          <a:effectLst>
+            <a:outerShdw sx="100000" sy="100000" kx="0" ky="0" algn="bl" rotWithShape="0" blurRad="101600" dist="38100" dir="8100000">
+              <a:srgbClr val="000000">
+                <a:alpha val="12000"/>
+              </a:srgbClr>
+            </a:outerShdw>
+          </a:effectLst>
+        </p:spPr>
+      </p:sp>
+      <p:sp>
+        <p:nvSpPr>
+          <p:cNvPr id="23" name="Text 21"/>
+          <p:cNvSpPr/>
+          <p:nvPr/>
+        </p:nvSpPr>
+        <p:spPr>
+          <a:xfrm>
+            <a:off x="6519672" y="2258568"/>
+            <a:ext cx="1828800" cy="292608"/>
+          </a:xfrm>
+          <a:prstGeom prst="rect">
+            <a:avLst/>
+          </a:prstGeom>
+          <a:noFill/>
+          <a:ln/>
+        </p:spPr>
+        <p:txBody>
+          <a:bodyPr wrap="square" lIns="0" tIns="0" rIns="0" bIns="0" rtlCol="0" anchor="ctr"/>
+          <a:lstStyle/>
+          <a:p>
+            <a:pPr algn="ctr" indent="0" marL="0">
+              <a:buNone/>
+            </a:pPr>
+            <a:r>
+              <a:rPr lang="en-US" sz="1300" b="1" dirty="0">
+                <a:solidFill>
+                  <a:srgbClr val="9D174D"/>
+                </a:solidFill>
+                <a:latin typeface="Trebuchet MS" pitchFamily="34" charset="0"/>
+                <a:ea typeface="Trebuchet MS" pitchFamily="34" charset="-122"/>
+                <a:cs typeface="Trebuchet MS" pitchFamily="34" charset="-120"/>
+              </a:rPr>
+              <a:t>ful</a:t>
+            </a:r>
+            <a:endParaRPr lang="en-US" sz="1300" dirty="0"/>
+          </a:p>
+        </p:txBody>
+      </p:sp>
+      <p:sp>
+        <p:nvSpPr>
+          <p:cNvPr id="24" name="Text 22"/>
+          <p:cNvSpPr/>
+          <p:nvPr/>
+        </p:nvSpPr>
+        <p:spPr>
+          <a:xfrm>
+            <a:off x="6519672" y="2569464"/>
+            <a:ext cx="1828800" cy="201168"/>
+          </a:xfrm>
+          <a:prstGeom prst="rect">
+            <a:avLst/>
+          </a:prstGeom>
+          <a:noFill/>
+          <a:ln/>
+        </p:spPr>
+        <p:txBody>
+          <a:bodyPr wrap="square" lIns="0" tIns="0" rIns="0" bIns="0" rtlCol="0" anchor="t"/>
+          <a:lstStyle/>
+          <a:p>
+            <a:pPr algn="ctr" indent="0" marL="0">
+              <a:buNone/>
+            </a:pPr>
+            <a:r>
+              <a:rPr lang="en-US" sz="850" dirty="0">
+                <a:solidFill>
+                  <a:srgbClr val="475569"/>
+                </a:solidFill>
+                <a:latin typeface="Calibri" pitchFamily="34" charset="0"/>
+                <a:ea typeface="Calibri" pitchFamily="34" charset="-122"/>
+                <a:cs typeface="Calibri" pitchFamily="34" charset="-120"/>
+              </a:rPr>
+              <a:t>full of, having the quality of</a:t>
+            </a:r>
+            <a:endParaRPr lang="en-US" sz="850" dirty="0"/>
+          </a:p>
+        </p:txBody>
+      </p:sp>
+      <p:sp>
+        <p:nvSpPr>
+          <p:cNvPr id="25" name="Shape 23"/>
           <p:cNvSpPr/>
           <p:nvPr/>
         </p:nvSpPr>
@@ -30408,7 +31061,7 @@
       </p:sp>
       <p:sp>
         <p:nvSpPr>
-          <p:cNvPr id="23" name="Text 21"/>
+          <p:cNvPr id="26" name="Text 24"/>
           <p:cNvSpPr/>
           <p:nvPr/>
         </p:nvSpPr>
@@ -30447,7 +31100,7 @@
       </p:sp>
       <p:sp>
         <p:nvSpPr>
-          <p:cNvPr id="24" name="Shape 22"/>
+          <p:cNvPr id="27" name="Shape 25"/>
           <p:cNvSpPr/>
           <p:nvPr/>
         </p:nvSpPr>
@@ -30474,13 +31127,13 @@
       </p:sp>
       <p:sp>
         <p:nvSpPr>
-          <p:cNvPr id="25" name="Shape 23"/>
-          <p:cNvSpPr/>
-          <p:nvPr/>
-        </p:nvSpPr>
-        <p:spPr>
-          <a:xfrm>
-            <a:off x="2999232" y="3364992"/>
+          <p:cNvPr id="28" name="Shape 26"/>
+          <p:cNvSpPr/>
+          <p:nvPr/>
+        </p:nvSpPr>
+        <p:spPr>
+          <a:xfrm>
+            <a:off x="2313432" y="3364992"/>
             <a:ext cx="1645920" cy="475488"/>
           </a:xfrm>
           <a:prstGeom prst="rect">
@@ -30501,13 +31154,13 @@
       </p:sp>
       <p:sp>
         <p:nvSpPr>
-          <p:cNvPr id="26" name="Text 24"/>
-          <p:cNvSpPr/>
-          <p:nvPr/>
-        </p:nvSpPr>
-        <p:spPr>
-          <a:xfrm>
-            <a:off x="2999232" y="3364992"/>
+          <p:cNvPr id="29" name="Text 27"/>
+          <p:cNvSpPr/>
+          <p:nvPr/>
+        </p:nvSpPr>
+        <p:spPr>
+          <a:xfrm>
+            <a:off x="2313432" y="3364992"/>
             <a:ext cx="1645920" cy="475488"/>
           </a:xfrm>
           <a:prstGeom prst="rect">
@@ -30532,7 +31185,7 @@
                 <a:ea typeface="Trebuchet MS" pitchFamily="34" charset="-122"/>
                 <a:cs typeface="Trebuchet MS" pitchFamily="34" charset="-120"/>
               </a:rPr>
-              <a:t>grace</a:t>
+              <a:t>dis</a:t>
             </a:r>
             <a:endParaRPr lang="en-US" sz="1400" dirty="0"/>
           </a:p>
@@ -30540,14 +31193,14 @@
       </p:sp>
       <p:sp>
         <p:nvSpPr>
-          <p:cNvPr id="27" name="Text 25"/>
-          <p:cNvSpPr/>
-          <p:nvPr/>
-        </p:nvSpPr>
-        <p:spPr>
-          <a:xfrm>
-            <a:off x="4645152" y="3364992"/>
-            <a:ext cx="1097280" cy="475488"/>
+          <p:cNvPr id="30" name="Text 28"/>
+          <p:cNvSpPr/>
+          <p:nvPr/>
+        </p:nvSpPr>
+        <p:spPr>
+          <a:xfrm>
+            <a:off x="3959352" y="3364992"/>
+            <a:ext cx="411480" cy="475488"/>
           </a:xfrm>
           <a:prstGeom prst="rect">
             <a:avLst/>
@@ -30579,13 +31232,13 @@
       </p:sp>
       <p:sp>
         <p:nvSpPr>
-          <p:cNvPr id="28" name="Shape 26"/>
-          <p:cNvSpPr/>
-          <p:nvPr/>
-        </p:nvSpPr>
-        <p:spPr>
-          <a:xfrm>
-            <a:off x="5742432" y="3364992"/>
+          <p:cNvPr id="31" name="Shape 29"/>
+          <p:cNvSpPr/>
+          <p:nvPr/>
+        </p:nvSpPr>
+        <p:spPr>
+          <a:xfrm>
+            <a:off x="4370832" y="3364992"/>
             <a:ext cx="1645920" cy="475488"/>
           </a:xfrm>
           <a:prstGeom prst="rect">
@@ -30606,13 +31259,13 @@
       </p:sp>
       <p:sp>
         <p:nvSpPr>
-          <p:cNvPr id="29" name="Text 27"/>
-          <p:cNvSpPr/>
-          <p:nvPr/>
-        </p:nvSpPr>
-        <p:spPr>
-          <a:xfrm>
-            <a:off x="5742432" y="3364992"/>
+          <p:cNvPr id="32" name="Text 30"/>
+          <p:cNvSpPr/>
+          <p:nvPr/>
+        </p:nvSpPr>
+        <p:spPr>
+          <a:xfrm>
+            <a:off x="4370832" y="3364992"/>
             <a:ext cx="1645920" cy="475488"/>
           </a:xfrm>
           <a:prstGeom prst="rect">
@@ -30637,7 +31290,7 @@
                 <a:ea typeface="Trebuchet MS" pitchFamily="34" charset="-122"/>
                 <a:cs typeface="Trebuchet MS" pitchFamily="34" charset="-120"/>
               </a:rPr>
-              <a:t>less</a:t>
+              <a:t>grace</a:t>
             </a:r>
             <a:endParaRPr lang="en-US" sz="1400" dirty="0"/>
           </a:p>
@@ -30645,7 +31298,112 @@
       </p:sp>
       <p:sp>
         <p:nvSpPr>
-          <p:cNvPr id="30" name="Shape 28"/>
+          <p:cNvPr id="33" name="Text 31"/>
+          <p:cNvSpPr/>
+          <p:nvPr/>
+        </p:nvSpPr>
+        <p:spPr>
+          <a:xfrm>
+            <a:off x="6016752" y="3364992"/>
+            <a:ext cx="411480" cy="475488"/>
+          </a:xfrm>
+          <a:prstGeom prst="rect">
+            <a:avLst/>
+          </a:prstGeom>
+          <a:noFill/>
+          <a:ln/>
+        </p:spPr>
+        <p:txBody>
+          <a:bodyPr wrap="square" lIns="0" tIns="0" rIns="0" bIns="0" rtlCol="0" anchor="ctr"/>
+          <a:lstStyle/>
+          <a:p>
+            <a:pPr algn="ctr" indent="0" marL="0">
+              <a:buNone/>
+            </a:pPr>
+            <a:r>
+              <a:rPr lang="en-US" sz="1600" b="1" dirty="0">
+                <a:solidFill>
+                  <a:srgbClr val="0D9488"/>
+                </a:solidFill>
+                <a:latin typeface="Trebuchet MS" pitchFamily="34" charset="0"/>
+                <a:ea typeface="Trebuchet MS" pitchFamily="34" charset="-122"/>
+                <a:cs typeface="Trebuchet MS" pitchFamily="34" charset="-120"/>
+              </a:rPr>
+              <a:t>·</a:t>
+            </a:r>
+            <a:endParaRPr lang="en-US" sz="1600" dirty="0"/>
+          </a:p>
+        </p:txBody>
+      </p:sp>
+      <p:sp>
+        <p:nvSpPr>
+          <p:cNvPr id="34" name="Shape 32"/>
+          <p:cNvSpPr/>
+          <p:nvPr/>
+        </p:nvSpPr>
+        <p:spPr>
+          <a:xfrm>
+            <a:off x="6428232" y="3364992"/>
+            <a:ext cx="1645920" cy="475488"/>
+          </a:xfrm>
+          <a:prstGeom prst="rect">
+            <a:avLst>
+              <a:gd name="adj" fmla="val 9615"/>
+            </a:avLst>
+          </a:prstGeom>
+          <a:solidFill>
+            <a:srgbClr val="FFFFFF"/>
+          </a:solidFill>
+          <a:ln w="12700">
+            <a:solidFill>
+              <a:srgbClr val="0D9488"/>
+            </a:solidFill>
+            <a:prstDash val="solid"/>
+          </a:ln>
+        </p:spPr>
+      </p:sp>
+      <p:sp>
+        <p:nvSpPr>
+          <p:cNvPr id="35" name="Text 33"/>
+          <p:cNvSpPr/>
+          <p:nvPr/>
+        </p:nvSpPr>
+        <p:spPr>
+          <a:xfrm>
+            <a:off x="6428232" y="3364992"/>
+            <a:ext cx="1645920" cy="475488"/>
+          </a:xfrm>
+          <a:prstGeom prst="rect">
+            <a:avLst/>
+          </a:prstGeom>
+          <a:noFill/>
+          <a:ln/>
+        </p:spPr>
+        <p:txBody>
+          <a:bodyPr wrap="square" lIns="0" tIns="0" rIns="0" bIns="0" rtlCol="0" anchor="ctr"/>
+          <a:lstStyle/>
+          <a:p>
+            <a:pPr algn="ctr" indent="0" marL="0">
+              <a:buNone/>
+            </a:pPr>
+            <a:r>
+              <a:rPr lang="en-US" sz="1400" b="1" dirty="0">
+                <a:solidFill>
+                  <a:srgbClr val="0D9488"/>
+                </a:solidFill>
+                <a:latin typeface="Trebuchet MS" pitchFamily="34" charset="0"/>
+                <a:ea typeface="Trebuchet MS" pitchFamily="34" charset="-122"/>
+                <a:cs typeface="Trebuchet MS" pitchFamily="34" charset="-120"/>
+              </a:rPr>
+              <a:t>ful</a:t>
+            </a:r>
+            <a:endParaRPr lang="en-US" sz="1400" dirty="0"/>
+          </a:p>
+        </p:txBody>
+      </p:sp>
+      <p:sp>
+        <p:nvSpPr>
+          <p:cNvPr id="36" name="Shape 34"/>
           <p:cNvSpPr/>
           <p:nvPr/>
         </p:nvSpPr>
@@ -30672,7 +31430,7 @@
       </p:sp>
       <p:sp>
         <p:nvSpPr>
-          <p:cNvPr id="31" name="Text 29"/>
+          <p:cNvPr id="37" name="Text 35"/>
           <p:cNvSpPr/>
           <p:nvPr/>
         </p:nvSpPr>
@@ -30711,7 +31469,7 @@
       </p:sp>
       <p:sp>
         <p:nvSpPr>
-          <p:cNvPr id="32" name="Shape 30"/>
+          <p:cNvPr id="38" name="Shape 36"/>
           <p:cNvSpPr/>
           <p:nvPr/>
         </p:nvSpPr>
@@ -30738,7 +31496,7 @@
       </p:sp>
       <p:sp>
         <p:nvSpPr>
-          <p:cNvPr id="33" name="Text 31"/>
+          <p:cNvPr id="39" name="Text 37"/>
           <p:cNvSpPr/>
           <p:nvPr/>
         </p:nvSpPr>
@@ -31061,7 +31819,7 @@
                 <a:ea typeface="Calibri" pitchFamily="34" charset="-122"/>
                 <a:cs typeface="Calibri" pitchFamily="34" charset="-120"/>
               </a:rPr>
-              <a:t>Word Labs  •  wordlabs.app  •  Root: 'grace' = elegance, beauty, divine favour</a:t>
+              <a:t>Word Labs  •  wordlabs.app  •  Root: 'grace' = elegance, favour, goodwill</a:t>
             </a:r>
             <a:endParaRPr lang="en-US" sz="800" dirty="0"/>
           </a:p>
@@ -31200,7 +31958,7 @@
                 <a:ea typeface="Trebuchet MS" pitchFamily="34" charset="-122"/>
                 <a:cs typeface="Trebuchet MS" pitchFamily="34" charset="-120"/>
               </a:rPr>
-              <a:t>graceless</a:t>
+              <a:t>disgraceful</a:t>
             </a:r>
             <a:endParaRPr lang="en-US" sz="2800" dirty="0"/>
           </a:p>
@@ -31280,7 +32038,7 @@
         </p:nvSpPr>
         <p:spPr>
           <a:xfrm>
-            <a:off x="2938272" y="2258568"/>
+            <a:off x="2221992" y="2258568"/>
             <a:ext cx="1828800" cy="292608"/>
           </a:xfrm>
           <a:prstGeom prst="rect">
@@ -31289,11 +32047,11 @@
             </a:avLst>
           </a:prstGeom>
           <a:solidFill>
-            <a:srgbClr val="CCFBF1"/>
+            <a:srgbClr val="DDD6FE"/>
           </a:solidFill>
           <a:ln w="19050">
             <a:solidFill>
-              <a:srgbClr val="0D9488"/>
+              <a:srgbClr val="7C3AED"/>
             </a:solidFill>
             <a:prstDash val="solid"/>
           </a:ln>
@@ -31314,7 +32072,7 @@
         </p:nvSpPr>
         <p:spPr>
           <a:xfrm>
-            <a:off x="2938272" y="2258568"/>
+            <a:off x="2221992" y="2258568"/>
             <a:ext cx="1828800" cy="292608"/>
           </a:xfrm>
           <a:prstGeom prst="rect">
@@ -31333,13 +32091,13 @@
             <a:r>
               <a:rPr lang="en-US" sz="1300" b="1" dirty="0">
                 <a:solidFill>
-                  <a:srgbClr val="0F766E"/>
+                  <a:srgbClr val="4C1D95"/>
                 </a:solidFill>
                 <a:latin typeface="Trebuchet MS" pitchFamily="34" charset="0"/>
                 <a:ea typeface="Trebuchet MS" pitchFamily="34" charset="-122"/>
                 <a:cs typeface="Trebuchet MS" pitchFamily="34" charset="-120"/>
               </a:rPr>
-              <a:t>grace</a:t>
+              <a:t>dis</a:t>
             </a:r>
             <a:endParaRPr lang="en-US" sz="1300" dirty="0"/>
           </a:p>
@@ -31353,7 +32111,7 @@
         </p:nvSpPr>
         <p:spPr>
           <a:xfrm>
-            <a:off x="2938272" y="2569464"/>
+            <a:off x="2221992" y="2569464"/>
             <a:ext cx="1828800" cy="201168"/>
           </a:xfrm>
           <a:prstGeom prst="rect">
@@ -31378,7 +32136,7 @@
                 <a:ea typeface="Calibri" pitchFamily="34" charset="-122"/>
                 <a:cs typeface="Calibri" pitchFamily="34" charset="-120"/>
               </a:rPr>
-              <a:t>elegance, beauty</a:t>
+              <a:t>not, opposite of, away</a:t>
             </a:r>
             <a:endParaRPr lang="en-US" sz="850" dirty="0"/>
           </a:p>
@@ -31392,7 +32150,7 @@
         </p:nvSpPr>
         <p:spPr>
           <a:xfrm>
-            <a:off x="5803392" y="2258568"/>
+            <a:off x="4370832" y="2258568"/>
             <a:ext cx="1828800" cy="292608"/>
           </a:xfrm>
           <a:prstGeom prst="rect">
@@ -31401,11 +32159,11 @@
             </a:avLst>
           </a:prstGeom>
           <a:solidFill>
-            <a:srgbClr val="DDD6FE"/>
+            <a:srgbClr val="CCFBF1"/>
           </a:solidFill>
           <a:ln w="19050">
             <a:solidFill>
-              <a:srgbClr val="7C3AED"/>
+              <a:srgbClr val="0D9488"/>
             </a:solidFill>
             <a:prstDash val="solid"/>
           </a:ln>
@@ -31426,7 +32184,7 @@
         </p:nvSpPr>
         <p:spPr>
           <a:xfrm>
-            <a:off x="5803392" y="2258568"/>
+            <a:off x="4370832" y="2258568"/>
             <a:ext cx="1828800" cy="292608"/>
           </a:xfrm>
           <a:prstGeom prst="rect">
@@ -31445,13 +32203,13 @@
             <a:r>
               <a:rPr lang="en-US" sz="1300" b="1" dirty="0">
                 <a:solidFill>
-                  <a:srgbClr val="4C1D95"/>
+                  <a:srgbClr val="0F766E"/>
                 </a:solidFill>
                 <a:latin typeface="Trebuchet MS" pitchFamily="34" charset="0"/>
                 <a:ea typeface="Trebuchet MS" pitchFamily="34" charset="-122"/>
                 <a:cs typeface="Trebuchet MS" pitchFamily="34" charset="-120"/>
               </a:rPr>
-              <a:t>less</a:t>
+              <a:t>grace</a:t>
             </a:r>
             <a:endParaRPr lang="en-US" sz="1300" dirty="0"/>
           </a:p>
@@ -31465,7 +32223,7 @@
         </p:nvSpPr>
         <p:spPr>
           <a:xfrm>
-            <a:off x="5803392" y="2569464"/>
+            <a:off x="4370832" y="2569464"/>
             <a:ext cx="1828800" cy="201168"/>
           </a:xfrm>
           <a:prstGeom prst="rect">
@@ -31490,7 +32248,7 @@
                 <a:ea typeface="Calibri" pitchFamily="34" charset="-122"/>
                 <a:cs typeface="Calibri" pitchFamily="34" charset="-120"/>
               </a:rPr>
-              <a:t>without</a:t>
+              <a:t>elegance, beauty, favour</a:t>
             </a:r>
             <a:endParaRPr lang="en-US" sz="850" dirty="0"/>
           </a:p>
@@ -31499,6 +32257,118 @@
       <p:sp>
         <p:nvSpPr>
           <p:cNvPr id="22" name="Shape 20"/>
+          <p:cNvSpPr/>
+          <p:nvPr/>
+        </p:nvSpPr>
+        <p:spPr>
+          <a:xfrm>
+            <a:off x="6519672" y="2258568"/>
+            <a:ext cx="1828800" cy="292608"/>
+          </a:xfrm>
+          <a:prstGeom prst="rect">
+            <a:avLst>
+              <a:gd name="adj" fmla="val 25000"/>
+            </a:avLst>
+          </a:prstGeom>
+          <a:solidFill>
+            <a:srgbClr val="FCE7F3"/>
+          </a:solidFill>
+          <a:ln w="19050">
+            <a:solidFill>
+              <a:srgbClr val="DB2777"/>
+            </a:solidFill>
+            <a:prstDash val="solid"/>
+          </a:ln>
+          <a:effectLst>
+            <a:outerShdw sx="100000" sy="100000" kx="0" ky="0" algn="bl" rotWithShape="0" blurRad="101600" dist="38100" dir="8100000">
+              <a:srgbClr val="000000">
+                <a:alpha val="12000"/>
+              </a:srgbClr>
+            </a:outerShdw>
+          </a:effectLst>
+        </p:spPr>
+      </p:sp>
+      <p:sp>
+        <p:nvSpPr>
+          <p:cNvPr id="23" name="Text 21"/>
+          <p:cNvSpPr/>
+          <p:nvPr/>
+        </p:nvSpPr>
+        <p:spPr>
+          <a:xfrm>
+            <a:off x="6519672" y="2258568"/>
+            <a:ext cx="1828800" cy="292608"/>
+          </a:xfrm>
+          <a:prstGeom prst="rect">
+            <a:avLst/>
+          </a:prstGeom>
+          <a:noFill/>
+          <a:ln/>
+        </p:spPr>
+        <p:txBody>
+          <a:bodyPr wrap="square" lIns="0" tIns="0" rIns="0" bIns="0" rtlCol="0" anchor="ctr"/>
+          <a:lstStyle/>
+          <a:p>
+            <a:pPr algn="ctr" indent="0" marL="0">
+              <a:buNone/>
+            </a:pPr>
+            <a:r>
+              <a:rPr lang="en-US" sz="1300" b="1" dirty="0">
+                <a:solidFill>
+                  <a:srgbClr val="9D174D"/>
+                </a:solidFill>
+                <a:latin typeface="Trebuchet MS" pitchFamily="34" charset="0"/>
+                <a:ea typeface="Trebuchet MS" pitchFamily="34" charset="-122"/>
+                <a:cs typeface="Trebuchet MS" pitchFamily="34" charset="-120"/>
+              </a:rPr>
+              <a:t>ful</a:t>
+            </a:r>
+            <a:endParaRPr lang="en-US" sz="1300" dirty="0"/>
+          </a:p>
+        </p:txBody>
+      </p:sp>
+      <p:sp>
+        <p:nvSpPr>
+          <p:cNvPr id="24" name="Text 22"/>
+          <p:cNvSpPr/>
+          <p:nvPr/>
+        </p:nvSpPr>
+        <p:spPr>
+          <a:xfrm>
+            <a:off x="6519672" y="2569464"/>
+            <a:ext cx="1828800" cy="201168"/>
+          </a:xfrm>
+          <a:prstGeom prst="rect">
+            <a:avLst/>
+          </a:prstGeom>
+          <a:noFill/>
+          <a:ln/>
+        </p:spPr>
+        <p:txBody>
+          <a:bodyPr wrap="square" lIns="0" tIns="0" rIns="0" bIns="0" rtlCol="0" anchor="t"/>
+          <a:lstStyle/>
+          <a:p>
+            <a:pPr algn="ctr" indent="0" marL="0">
+              <a:buNone/>
+            </a:pPr>
+            <a:r>
+              <a:rPr lang="en-US" sz="850" dirty="0">
+                <a:solidFill>
+                  <a:srgbClr val="475569"/>
+                </a:solidFill>
+                <a:latin typeface="Calibri" pitchFamily="34" charset="0"/>
+                <a:ea typeface="Calibri" pitchFamily="34" charset="-122"/>
+                <a:cs typeface="Calibri" pitchFamily="34" charset="-120"/>
+              </a:rPr>
+              <a:t>full of, having the quality of</a:t>
+            </a:r>
+            <a:endParaRPr lang="en-US" sz="850" dirty="0"/>
+          </a:p>
+        </p:txBody>
+      </p:sp>
+      <p:sp>
+        <p:nvSpPr>
+          <p:cNvPr id="25" name="Shape 23"/>
           <p:cNvSpPr/>
           <p:nvPr/>
         </p:nvSpPr>
@@ -31525,7 +32395,7 @@
       </p:sp>
       <p:sp>
         <p:nvSpPr>
-          <p:cNvPr id="23" name="Text 21"/>
+          <p:cNvPr id="26" name="Text 24"/>
           <p:cNvSpPr/>
           <p:nvPr/>
         </p:nvSpPr>
@@ -31564,7 +32434,7 @@
       </p:sp>
       <p:sp>
         <p:nvSpPr>
-          <p:cNvPr id="24" name="Shape 22"/>
+          <p:cNvPr id="27" name="Shape 25"/>
           <p:cNvSpPr/>
           <p:nvPr/>
         </p:nvSpPr>
@@ -31591,13 +32461,13 @@
       </p:sp>
       <p:sp>
         <p:nvSpPr>
-          <p:cNvPr id="25" name="Shape 23"/>
-          <p:cNvSpPr/>
-          <p:nvPr/>
-        </p:nvSpPr>
-        <p:spPr>
-          <a:xfrm>
-            <a:off x="2999232" y="3364992"/>
+          <p:cNvPr id="28" name="Shape 26"/>
+          <p:cNvSpPr/>
+          <p:nvPr/>
+        </p:nvSpPr>
+        <p:spPr>
+          <a:xfrm>
+            <a:off x="2313432" y="3364992"/>
             <a:ext cx="1645920" cy="475488"/>
           </a:xfrm>
           <a:prstGeom prst="rect">
@@ -31618,13 +32488,13 @@
       </p:sp>
       <p:sp>
         <p:nvSpPr>
-          <p:cNvPr id="26" name="Text 24"/>
-          <p:cNvSpPr/>
-          <p:nvPr/>
-        </p:nvSpPr>
-        <p:spPr>
-          <a:xfrm>
-            <a:off x="2999232" y="3364992"/>
+          <p:cNvPr id="29" name="Text 27"/>
+          <p:cNvSpPr/>
+          <p:nvPr/>
+        </p:nvSpPr>
+        <p:spPr>
+          <a:xfrm>
+            <a:off x="2313432" y="3364992"/>
             <a:ext cx="1645920" cy="475488"/>
           </a:xfrm>
           <a:prstGeom prst="rect">
@@ -31649,7 +32519,7 @@
                 <a:ea typeface="Trebuchet MS" pitchFamily="34" charset="-122"/>
                 <a:cs typeface="Trebuchet MS" pitchFamily="34" charset="-120"/>
               </a:rPr>
-              <a:t>grace</a:t>
+              <a:t>dis</a:t>
             </a:r>
             <a:endParaRPr lang="en-US" sz="1400" dirty="0"/>
           </a:p>
@@ -31657,14 +32527,14 @@
       </p:sp>
       <p:sp>
         <p:nvSpPr>
-          <p:cNvPr id="27" name="Text 25"/>
-          <p:cNvSpPr/>
-          <p:nvPr/>
-        </p:nvSpPr>
-        <p:spPr>
-          <a:xfrm>
-            <a:off x="4645152" y="3364992"/>
-            <a:ext cx="1097280" cy="475488"/>
+          <p:cNvPr id="30" name="Text 28"/>
+          <p:cNvSpPr/>
+          <p:nvPr/>
+        </p:nvSpPr>
+        <p:spPr>
+          <a:xfrm>
+            <a:off x="3959352" y="3364992"/>
+            <a:ext cx="411480" cy="475488"/>
           </a:xfrm>
           <a:prstGeom prst="rect">
             <a:avLst/>
@@ -31696,13 +32566,13 @@
       </p:sp>
       <p:sp>
         <p:nvSpPr>
-          <p:cNvPr id="28" name="Shape 26"/>
-          <p:cNvSpPr/>
-          <p:nvPr/>
-        </p:nvSpPr>
-        <p:spPr>
-          <a:xfrm>
-            <a:off x="5742432" y="3364992"/>
+          <p:cNvPr id="31" name="Shape 29"/>
+          <p:cNvSpPr/>
+          <p:nvPr/>
+        </p:nvSpPr>
+        <p:spPr>
+          <a:xfrm>
+            <a:off x="4370832" y="3364992"/>
             <a:ext cx="1645920" cy="475488"/>
           </a:xfrm>
           <a:prstGeom prst="rect">
@@ -31723,13 +32593,13 @@
       </p:sp>
       <p:sp>
         <p:nvSpPr>
-          <p:cNvPr id="29" name="Text 27"/>
-          <p:cNvSpPr/>
-          <p:nvPr/>
-        </p:nvSpPr>
-        <p:spPr>
-          <a:xfrm>
-            <a:off x="5742432" y="3364992"/>
+          <p:cNvPr id="32" name="Text 30"/>
+          <p:cNvSpPr/>
+          <p:nvPr/>
+        </p:nvSpPr>
+        <p:spPr>
+          <a:xfrm>
+            <a:off x="4370832" y="3364992"/>
             <a:ext cx="1645920" cy="475488"/>
           </a:xfrm>
           <a:prstGeom prst="rect">
@@ -31754,7 +32624,7 @@
                 <a:ea typeface="Trebuchet MS" pitchFamily="34" charset="-122"/>
                 <a:cs typeface="Trebuchet MS" pitchFamily="34" charset="-120"/>
               </a:rPr>
-              <a:t>less</a:t>
+              <a:t>grace</a:t>
             </a:r>
             <a:endParaRPr lang="en-US" sz="1400" dirty="0"/>
           </a:p>
@@ -31762,7 +32632,112 @@
       </p:sp>
       <p:sp>
         <p:nvSpPr>
-          <p:cNvPr id="30" name="Shape 28"/>
+          <p:cNvPr id="33" name="Text 31"/>
+          <p:cNvSpPr/>
+          <p:nvPr/>
+        </p:nvSpPr>
+        <p:spPr>
+          <a:xfrm>
+            <a:off x="6016752" y="3364992"/>
+            <a:ext cx="411480" cy="475488"/>
+          </a:xfrm>
+          <a:prstGeom prst="rect">
+            <a:avLst/>
+          </a:prstGeom>
+          <a:noFill/>
+          <a:ln/>
+        </p:spPr>
+        <p:txBody>
+          <a:bodyPr wrap="square" lIns="0" tIns="0" rIns="0" bIns="0" rtlCol="0" anchor="ctr"/>
+          <a:lstStyle/>
+          <a:p>
+            <a:pPr algn="ctr" indent="0" marL="0">
+              <a:buNone/>
+            </a:pPr>
+            <a:r>
+              <a:rPr lang="en-US" sz="1600" b="1" dirty="0">
+                <a:solidFill>
+                  <a:srgbClr val="0D9488"/>
+                </a:solidFill>
+                <a:latin typeface="Trebuchet MS" pitchFamily="34" charset="0"/>
+                <a:ea typeface="Trebuchet MS" pitchFamily="34" charset="-122"/>
+                <a:cs typeface="Trebuchet MS" pitchFamily="34" charset="-120"/>
+              </a:rPr>
+              <a:t>·</a:t>
+            </a:r>
+            <a:endParaRPr lang="en-US" sz="1600" dirty="0"/>
+          </a:p>
+        </p:txBody>
+      </p:sp>
+      <p:sp>
+        <p:nvSpPr>
+          <p:cNvPr id="34" name="Shape 32"/>
+          <p:cNvSpPr/>
+          <p:nvPr/>
+        </p:nvSpPr>
+        <p:spPr>
+          <a:xfrm>
+            <a:off x="6428232" y="3364992"/>
+            <a:ext cx="1645920" cy="475488"/>
+          </a:xfrm>
+          <a:prstGeom prst="rect">
+            <a:avLst>
+              <a:gd name="adj" fmla="val 9615"/>
+            </a:avLst>
+          </a:prstGeom>
+          <a:solidFill>
+            <a:srgbClr val="FFFFFF"/>
+          </a:solidFill>
+          <a:ln w="12700">
+            <a:solidFill>
+              <a:srgbClr val="0D9488"/>
+            </a:solidFill>
+            <a:prstDash val="solid"/>
+          </a:ln>
+        </p:spPr>
+      </p:sp>
+      <p:sp>
+        <p:nvSpPr>
+          <p:cNvPr id="35" name="Text 33"/>
+          <p:cNvSpPr/>
+          <p:nvPr/>
+        </p:nvSpPr>
+        <p:spPr>
+          <a:xfrm>
+            <a:off x="6428232" y="3364992"/>
+            <a:ext cx="1645920" cy="475488"/>
+          </a:xfrm>
+          <a:prstGeom prst="rect">
+            <a:avLst/>
+          </a:prstGeom>
+          <a:noFill/>
+          <a:ln/>
+        </p:spPr>
+        <p:txBody>
+          <a:bodyPr wrap="square" lIns="0" tIns="0" rIns="0" bIns="0" rtlCol="0" anchor="ctr"/>
+          <a:lstStyle/>
+          <a:p>
+            <a:pPr algn="ctr" indent="0" marL="0">
+              <a:buNone/>
+            </a:pPr>
+            <a:r>
+              <a:rPr lang="en-US" sz="1400" b="1" dirty="0">
+                <a:solidFill>
+                  <a:srgbClr val="0D9488"/>
+                </a:solidFill>
+                <a:latin typeface="Trebuchet MS" pitchFamily="34" charset="0"/>
+                <a:ea typeface="Trebuchet MS" pitchFamily="34" charset="-122"/>
+                <a:cs typeface="Trebuchet MS" pitchFamily="34" charset="-120"/>
+              </a:rPr>
+              <a:t>ful</a:t>
+            </a:r>
+            <a:endParaRPr lang="en-US" sz="1400" dirty="0"/>
+          </a:p>
+        </p:txBody>
+      </p:sp>
+      <p:sp>
+        <p:nvSpPr>
+          <p:cNvPr id="36" name="Shape 34"/>
           <p:cNvSpPr/>
           <p:nvPr/>
         </p:nvSpPr>
@@ -31789,7 +32764,7 @@
       </p:sp>
       <p:sp>
         <p:nvSpPr>
-          <p:cNvPr id="31" name="Text 29"/>
+          <p:cNvPr id="37" name="Text 35"/>
           <p:cNvSpPr/>
           <p:nvPr/>
         </p:nvSpPr>
@@ -31828,7 +32803,7 @@
       </p:sp>
       <p:sp>
         <p:nvSpPr>
-          <p:cNvPr id="32" name="Shape 30"/>
+          <p:cNvPr id="38" name="Shape 36"/>
           <p:cNvSpPr/>
           <p:nvPr/>
         </p:nvSpPr>
@@ -31855,14 +32830,14 @@
       </p:sp>
       <p:sp>
         <p:nvSpPr>
-          <p:cNvPr id="33" name="Shape 31"/>
-          <p:cNvSpPr/>
-          <p:nvPr/>
-        </p:nvSpPr>
-        <p:spPr>
-          <a:xfrm>
-            <a:off x="2254649" y="4169664"/>
-            <a:ext cx="685800" cy="384048"/>
+          <p:cNvPr id="39" name="Shape 37"/>
+          <p:cNvSpPr/>
+          <p:nvPr/>
+        </p:nvSpPr>
+        <p:spPr>
+          <a:xfrm>
+            <a:off x="1951330" y="4169664"/>
+            <a:ext cx="676656" cy="384048"/>
           </a:xfrm>
           <a:prstGeom prst="rect">
             <a:avLst>
@@ -31882,14 +32857,14 @@
       </p:sp>
       <p:sp>
         <p:nvSpPr>
-          <p:cNvPr id="34" name="Text 32"/>
-          <p:cNvSpPr/>
-          <p:nvPr/>
-        </p:nvSpPr>
-        <p:spPr>
-          <a:xfrm>
-            <a:off x="2254649" y="4169664"/>
-            <a:ext cx="685800" cy="384048"/>
+          <p:cNvPr id="40" name="Text 38"/>
+          <p:cNvSpPr/>
+          <p:nvPr/>
+        </p:nvSpPr>
+        <p:spPr>
+          <a:xfrm>
+            <a:off x="1951330" y="4169664"/>
+            <a:ext cx="676656" cy="384048"/>
           </a:xfrm>
           <a:prstGeom prst="rect">
             <a:avLst/>
@@ -31913,7 +32888,7 @@
                 <a:ea typeface="Trebuchet MS" pitchFamily="34" charset="-122"/>
                 <a:cs typeface="Trebuchet MS" pitchFamily="34" charset="-120"/>
               </a:rPr>
-              <a:t>gr</a:t>
+              <a:t>d</a:t>
             </a:r>
             <a:endParaRPr lang="en-US" sz="900" dirty="0"/>
           </a:p>
@@ -31921,14 +32896,14 @@
       </p:sp>
       <p:sp>
         <p:nvSpPr>
-          <p:cNvPr id="35" name="Shape 33"/>
-          <p:cNvSpPr/>
-          <p:nvPr/>
-        </p:nvSpPr>
-        <p:spPr>
-          <a:xfrm>
-            <a:off x="3293146" y="4169664"/>
-            <a:ext cx="685800" cy="384048"/>
+          <p:cNvPr id="41" name="Shape 39"/>
+          <p:cNvSpPr/>
+          <p:nvPr/>
+        </p:nvSpPr>
+        <p:spPr>
+          <a:xfrm>
+            <a:off x="2677363" y="4169664"/>
+            <a:ext cx="676656" cy="384048"/>
           </a:xfrm>
           <a:prstGeom prst="rect">
             <a:avLst>
@@ -31948,14 +32923,14 @@
       </p:sp>
       <p:sp>
         <p:nvSpPr>
-          <p:cNvPr id="36" name="Text 34"/>
-          <p:cNvSpPr/>
-          <p:nvPr/>
-        </p:nvSpPr>
-        <p:spPr>
-          <a:xfrm>
-            <a:off x="3293146" y="4169664"/>
-            <a:ext cx="685800" cy="384048"/>
+          <p:cNvPr id="42" name="Text 40"/>
+          <p:cNvSpPr/>
+          <p:nvPr/>
+        </p:nvSpPr>
+        <p:spPr>
+          <a:xfrm>
+            <a:off x="2677363" y="4169664"/>
+            <a:ext cx="676656" cy="384048"/>
           </a:xfrm>
           <a:prstGeom prst="rect">
             <a:avLst/>
@@ -31979,7 +32954,7 @@
                 <a:ea typeface="Trebuchet MS" pitchFamily="34" charset="-122"/>
                 <a:cs typeface="Trebuchet MS" pitchFamily="34" charset="-120"/>
               </a:rPr>
-              <a:t>a</a:t>
+              <a:t>i</a:t>
             </a:r>
             <a:endParaRPr lang="en-US" sz="900" dirty="0"/>
           </a:p>
@@ -31987,14 +32962,14 @@
       </p:sp>
       <p:sp>
         <p:nvSpPr>
-          <p:cNvPr id="37" name="Shape 35"/>
-          <p:cNvSpPr/>
-          <p:nvPr/>
-        </p:nvSpPr>
-        <p:spPr>
-          <a:xfrm>
-            <a:off x="4331643" y="4169664"/>
-            <a:ext cx="685800" cy="384048"/>
+          <p:cNvPr id="43" name="Shape 41"/>
+          <p:cNvSpPr/>
+          <p:nvPr/>
+        </p:nvSpPr>
+        <p:spPr>
+          <a:xfrm>
+            <a:off x="3403397" y="4169664"/>
+            <a:ext cx="676656" cy="384048"/>
           </a:xfrm>
           <a:prstGeom prst="rect">
             <a:avLst>
@@ -32014,14 +32989,14 @@
       </p:sp>
       <p:sp>
         <p:nvSpPr>
-          <p:cNvPr id="38" name="Text 36"/>
-          <p:cNvSpPr/>
-          <p:nvPr/>
-        </p:nvSpPr>
-        <p:spPr>
-          <a:xfrm>
-            <a:off x="4331643" y="4169664"/>
-            <a:ext cx="685800" cy="384048"/>
+          <p:cNvPr id="44" name="Text 42"/>
+          <p:cNvSpPr/>
+          <p:nvPr/>
+        </p:nvSpPr>
+        <p:spPr>
+          <a:xfrm>
+            <a:off x="3403397" y="4169664"/>
+            <a:ext cx="676656" cy="384048"/>
           </a:xfrm>
           <a:prstGeom prst="rect">
             <a:avLst/>
@@ -32045,6 +33020,204 @@
                 <a:ea typeface="Trebuchet MS" pitchFamily="34" charset="-122"/>
                 <a:cs typeface="Trebuchet MS" pitchFamily="34" charset="-120"/>
               </a:rPr>
+              <a:t>s</a:t>
+            </a:r>
+            <a:endParaRPr lang="en-US" sz="900" dirty="0"/>
+          </a:p>
+        </p:txBody>
+      </p:sp>
+      <p:sp>
+        <p:nvSpPr>
+          <p:cNvPr id="45" name="Shape 43"/>
+          <p:cNvSpPr/>
+          <p:nvPr/>
+        </p:nvSpPr>
+        <p:spPr>
+          <a:xfrm>
+            <a:off x="4129430" y="4169664"/>
+            <a:ext cx="676656" cy="384048"/>
+          </a:xfrm>
+          <a:prstGeom prst="rect">
+            <a:avLst>
+              <a:gd name="adj" fmla="val 9524"/>
+            </a:avLst>
+          </a:prstGeom>
+          <a:solidFill>
+            <a:srgbClr val="FFFFFF"/>
+          </a:solidFill>
+          <a:ln w="12700">
+            <a:solidFill>
+              <a:srgbClr val="DB2777"/>
+            </a:solidFill>
+            <a:prstDash val="solid"/>
+          </a:ln>
+        </p:spPr>
+      </p:sp>
+      <p:sp>
+        <p:nvSpPr>
+          <p:cNvPr id="46" name="Text 44"/>
+          <p:cNvSpPr/>
+          <p:nvPr/>
+        </p:nvSpPr>
+        <p:spPr>
+          <a:xfrm>
+            <a:off x="4129430" y="4169664"/>
+            <a:ext cx="676656" cy="384048"/>
+          </a:xfrm>
+          <a:prstGeom prst="rect">
+            <a:avLst/>
+          </a:prstGeom>
+          <a:noFill/>
+          <a:ln/>
+        </p:spPr>
+        <p:txBody>
+          <a:bodyPr wrap="square" lIns="0" tIns="0" rIns="0" bIns="0" rtlCol="0" anchor="ctr"/>
+          <a:lstStyle/>
+          <a:p>
+            <a:pPr algn="ctr" indent="0" marL="0">
+              <a:buNone/>
+            </a:pPr>
+            <a:r>
+              <a:rPr lang="en-US" sz="900" b="1" dirty="0">
+                <a:solidFill>
+                  <a:srgbClr val="9D174D"/>
+                </a:solidFill>
+                <a:latin typeface="Trebuchet MS" pitchFamily="34" charset="0"/>
+                <a:ea typeface="Trebuchet MS" pitchFamily="34" charset="-122"/>
+                <a:cs typeface="Trebuchet MS" pitchFamily="34" charset="-120"/>
+              </a:rPr>
+              <a:t>gr</a:t>
+            </a:r>
+            <a:endParaRPr lang="en-US" sz="900" dirty="0"/>
+          </a:p>
+        </p:txBody>
+      </p:sp>
+      <p:sp>
+        <p:nvSpPr>
+          <p:cNvPr id="47" name="Shape 45"/>
+          <p:cNvSpPr/>
+          <p:nvPr/>
+        </p:nvSpPr>
+        <p:spPr>
+          <a:xfrm>
+            <a:off x="4855464" y="4169664"/>
+            <a:ext cx="676656" cy="384048"/>
+          </a:xfrm>
+          <a:prstGeom prst="rect">
+            <a:avLst>
+              <a:gd name="adj" fmla="val 9524"/>
+            </a:avLst>
+          </a:prstGeom>
+          <a:solidFill>
+            <a:srgbClr val="FFFFFF"/>
+          </a:solidFill>
+          <a:ln w="12700">
+            <a:solidFill>
+              <a:srgbClr val="DB2777"/>
+            </a:solidFill>
+            <a:prstDash val="solid"/>
+          </a:ln>
+        </p:spPr>
+      </p:sp>
+      <p:sp>
+        <p:nvSpPr>
+          <p:cNvPr id="48" name="Text 46"/>
+          <p:cNvSpPr/>
+          <p:nvPr/>
+        </p:nvSpPr>
+        <p:spPr>
+          <a:xfrm>
+            <a:off x="4855464" y="4169664"/>
+            <a:ext cx="676656" cy="384048"/>
+          </a:xfrm>
+          <a:prstGeom prst="rect">
+            <a:avLst/>
+          </a:prstGeom>
+          <a:noFill/>
+          <a:ln/>
+        </p:spPr>
+        <p:txBody>
+          <a:bodyPr wrap="square" lIns="0" tIns="0" rIns="0" bIns="0" rtlCol="0" anchor="ctr"/>
+          <a:lstStyle/>
+          <a:p>
+            <a:pPr algn="ctr" indent="0" marL="0">
+              <a:buNone/>
+            </a:pPr>
+            <a:r>
+              <a:rPr lang="en-US" sz="900" b="1" dirty="0">
+                <a:solidFill>
+                  <a:srgbClr val="9D174D"/>
+                </a:solidFill>
+                <a:latin typeface="Trebuchet MS" pitchFamily="34" charset="0"/>
+                <a:ea typeface="Trebuchet MS" pitchFamily="34" charset="-122"/>
+                <a:cs typeface="Trebuchet MS" pitchFamily="34" charset="-120"/>
+              </a:rPr>
+              <a:t>a</a:t>
+            </a:r>
+            <a:endParaRPr lang="en-US" sz="900" dirty="0"/>
+          </a:p>
+        </p:txBody>
+      </p:sp>
+      <p:sp>
+        <p:nvSpPr>
+          <p:cNvPr id="49" name="Shape 47"/>
+          <p:cNvSpPr/>
+          <p:nvPr/>
+        </p:nvSpPr>
+        <p:spPr>
+          <a:xfrm>
+            <a:off x="5581498" y="4169664"/>
+            <a:ext cx="676656" cy="384048"/>
+          </a:xfrm>
+          <a:prstGeom prst="rect">
+            <a:avLst>
+              <a:gd name="adj" fmla="val 9524"/>
+            </a:avLst>
+          </a:prstGeom>
+          <a:solidFill>
+            <a:srgbClr val="FFFFFF"/>
+          </a:solidFill>
+          <a:ln w="12700">
+            <a:solidFill>
+              <a:srgbClr val="DB2777"/>
+            </a:solidFill>
+            <a:prstDash val="solid"/>
+          </a:ln>
+        </p:spPr>
+      </p:sp>
+      <p:sp>
+        <p:nvSpPr>
+          <p:cNvPr id="50" name="Text 48"/>
+          <p:cNvSpPr/>
+          <p:nvPr/>
+        </p:nvSpPr>
+        <p:spPr>
+          <a:xfrm>
+            <a:off x="5581498" y="4169664"/>
+            <a:ext cx="676656" cy="384048"/>
+          </a:xfrm>
+          <a:prstGeom prst="rect">
+            <a:avLst/>
+          </a:prstGeom>
+          <a:noFill/>
+          <a:ln/>
+        </p:spPr>
+        <p:txBody>
+          <a:bodyPr wrap="square" lIns="0" tIns="0" rIns="0" bIns="0" rtlCol="0" anchor="ctr"/>
+          <a:lstStyle/>
+          <a:p>
+            <a:pPr algn="ctr" indent="0" marL="0">
+              <a:buNone/>
+            </a:pPr>
+            <a:r>
+              <a:rPr lang="en-US" sz="900" b="1" dirty="0">
+                <a:solidFill>
+                  <a:srgbClr val="9D174D"/>
+                </a:solidFill>
+                <a:latin typeface="Trebuchet MS" pitchFamily="34" charset="0"/>
+                <a:ea typeface="Trebuchet MS" pitchFamily="34" charset="-122"/>
+                <a:cs typeface="Trebuchet MS" pitchFamily="34" charset="-120"/>
+              </a:rPr>
               <a:t>ce</a:t>
             </a:r>
             <a:endParaRPr lang="en-US" sz="900" dirty="0"/>
@@ -32053,14 +33226,14 @@
       </p:sp>
       <p:sp>
         <p:nvSpPr>
-          <p:cNvPr id="39" name="Text 37"/>
-          <p:cNvSpPr/>
-          <p:nvPr/>
-        </p:nvSpPr>
-        <p:spPr>
-          <a:xfrm>
-            <a:off x="4331643" y="4572000"/>
-            <a:ext cx="685800" cy="219456"/>
+          <p:cNvPr id="51" name="Text 49"/>
+          <p:cNvSpPr/>
+          <p:nvPr/>
+        </p:nvSpPr>
+        <p:spPr>
+          <a:xfrm>
+            <a:off x="5581498" y="4572000"/>
+            <a:ext cx="676656" cy="219456"/>
           </a:xfrm>
           <a:prstGeom prst="rect">
             <a:avLst/>
@@ -32092,14 +33265,14 @@
       </p:sp>
       <p:sp>
         <p:nvSpPr>
-          <p:cNvPr id="40" name="Shape 38"/>
-          <p:cNvSpPr/>
-          <p:nvPr/>
-        </p:nvSpPr>
-        <p:spPr>
-          <a:xfrm>
-            <a:off x="5370141" y="4169664"/>
-            <a:ext cx="685800" cy="384048"/>
+          <p:cNvPr id="52" name="Shape 50"/>
+          <p:cNvSpPr/>
+          <p:nvPr/>
+        </p:nvSpPr>
+        <p:spPr>
+          <a:xfrm>
+            <a:off x="6307531" y="4169664"/>
+            <a:ext cx="676656" cy="384048"/>
           </a:xfrm>
           <a:prstGeom prst="rect">
             <a:avLst>
@@ -32119,14 +33292,14 @@
       </p:sp>
       <p:sp>
         <p:nvSpPr>
-          <p:cNvPr id="41" name="Text 39"/>
-          <p:cNvSpPr/>
-          <p:nvPr/>
-        </p:nvSpPr>
-        <p:spPr>
-          <a:xfrm>
-            <a:off x="5370141" y="4169664"/>
-            <a:ext cx="685800" cy="384048"/>
+          <p:cNvPr id="53" name="Text 51"/>
+          <p:cNvSpPr/>
+          <p:nvPr/>
+        </p:nvSpPr>
+        <p:spPr>
+          <a:xfrm>
+            <a:off x="6307531" y="4169664"/>
+            <a:ext cx="676656" cy="384048"/>
           </a:xfrm>
           <a:prstGeom prst="rect">
             <a:avLst/>
@@ -32150,7 +33323,7 @@
                 <a:ea typeface="Trebuchet MS" pitchFamily="34" charset="-122"/>
                 <a:cs typeface="Trebuchet MS" pitchFamily="34" charset="-120"/>
               </a:rPr>
-              <a:t>l</a:t>
+              <a:t>f</a:t>
             </a:r>
             <a:endParaRPr lang="en-US" sz="900" dirty="0"/>
           </a:p>
@@ -32158,14 +33331,14 @@
       </p:sp>
       <p:sp>
         <p:nvSpPr>
-          <p:cNvPr id="42" name="Shape 40"/>
-          <p:cNvSpPr/>
-          <p:nvPr/>
-        </p:nvSpPr>
-        <p:spPr>
-          <a:xfrm>
-            <a:off x="6408638" y="4169664"/>
-            <a:ext cx="685800" cy="384048"/>
+          <p:cNvPr id="54" name="Shape 52"/>
+          <p:cNvSpPr/>
+          <p:nvPr/>
+        </p:nvSpPr>
+        <p:spPr>
+          <a:xfrm>
+            <a:off x="7033565" y="4169664"/>
+            <a:ext cx="676656" cy="384048"/>
           </a:xfrm>
           <a:prstGeom prst="rect">
             <a:avLst>
@@ -32185,14 +33358,14 @@
       </p:sp>
       <p:sp>
         <p:nvSpPr>
-          <p:cNvPr id="43" name="Text 41"/>
-          <p:cNvSpPr/>
-          <p:nvPr/>
-        </p:nvSpPr>
-        <p:spPr>
-          <a:xfrm>
-            <a:off x="6408638" y="4169664"/>
-            <a:ext cx="685800" cy="384048"/>
+          <p:cNvPr id="55" name="Text 53"/>
+          <p:cNvSpPr/>
+          <p:nvPr/>
+        </p:nvSpPr>
+        <p:spPr>
+          <a:xfrm>
+            <a:off x="7033565" y="4169664"/>
+            <a:ext cx="676656" cy="384048"/>
           </a:xfrm>
           <a:prstGeom prst="rect">
             <a:avLst/>
@@ -32216,7 +33389,7 @@
                 <a:ea typeface="Trebuchet MS" pitchFamily="34" charset="-122"/>
                 <a:cs typeface="Trebuchet MS" pitchFamily="34" charset="-120"/>
               </a:rPr>
-              <a:t>e</a:t>
+              <a:t>u</a:t>
             </a:r>
             <a:endParaRPr lang="en-US" sz="900" dirty="0"/>
           </a:p>
@@ -32224,14 +33397,14 @@
       </p:sp>
       <p:sp>
         <p:nvSpPr>
-          <p:cNvPr id="44" name="Shape 42"/>
-          <p:cNvSpPr/>
-          <p:nvPr/>
-        </p:nvSpPr>
-        <p:spPr>
-          <a:xfrm>
-            <a:off x="7447135" y="4169664"/>
-            <a:ext cx="685800" cy="384048"/>
+          <p:cNvPr id="56" name="Shape 54"/>
+          <p:cNvSpPr/>
+          <p:nvPr/>
+        </p:nvSpPr>
+        <p:spPr>
+          <a:xfrm>
+            <a:off x="7759598" y="4169664"/>
+            <a:ext cx="676656" cy="384048"/>
           </a:xfrm>
           <a:prstGeom prst="rect">
             <a:avLst>
@@ -32251,14 +33424,14 @@
       </p:sp>
       <p:sp>
         <p:nvSpPr>
-          <p:cNvPr id="45" name="Text 43"/>
-          <p:cNvSpPr/>
-          <p:nvPr/>
-        </p:nvSpPr>
-        <p:spPr>
-          <a:xfrm>
-            <a:off x="7447135" y="4169664"/>
-            <a:ext cx="685800" cy="384048"/>
+          <p:cNvPr id="57" name="Text 55"/>
+          <p:cNvSpPr/>
+          <p:nvPr/>
+        </p:nvSpPr>
+        <p:spPr>
+          <a:xfrm>
+            <a:off x="7759598" y="4169664"/>
+            <a:ext cx="676656" cy="384048"/>
           </a:xfrm>
           <a:prstGeom prst="rect">
             <a:avLst/>
@@ -32282,7 +33455,7 @@
                 <a:ea typeface="Trebuchet MS" pitchFamily="34" charset="-122"/>
                 <a:cs typeface="Trebuchet MS" pitchFamily="34" charset="-120"/>
               </a:rPr>
-              <a:t>ss</a:t>
+              <a:t>l</a:t>
             </a:r>
             <a:endParaRPr lang="en-US" sz="900" dirty="0"/>
           </a:p>
@@ -32574,7 +33747,7 @@
                 <a:ea typeface="Calibri" pitchFamily="34" charset="-122"/>
                 <a:cs typeface="Calibri" pitchFamily="34" charset="-120"/>
               </a:rPr>
-              <a:t>Word Labs  •  wordlabs.app  •  Root: 'grace' = elegance, beauty, divine favour</a:t>
+              <a:t>Word Labs  •  wordlabs.app  •  Root: 'grace' = elegance, favour, goodwill</a:t>
             </a:r>
             <a:endParaRPr lang="en-US" sz="800" dirty="0"/>
           </a:p>
@@ -33743,7 +34916,7 @@
                 <a:ea typeface="Calibri" pitchFamily="34" charset="-122"/>
                 <a:cs typeface="Calibri" pitchFamily="34" charset="-120"/>
               </a:rPr>
-              <a:t>Word Labs  •  wordlabs.app  •  Root: 'grace' = elegance, beauty, divine favour</a:t>
+              <a:t>Word Labs  •  wordlabs.app  •  Root: 'grace' = elegance, favour, goodwill</a:t>
             </a:r>
             <a:endParaRPr lang="en-US" sz="800" dirty="0"/>
           </a:p>
@@ -34389,7 +35562,7 @@
                 <a:ea typeface="Trebuchet MS" pitchFamily="34" charset="-122"/>
                 <a:cs typeface="Trebuchet MS" pitchFamily="34" charset="-120"/>
               </a:rPr>
-              <a:t>in-</a:t>
+              <a:t>re-</a:t>
             </a:r>
             <a:endParaRPr lang="en-US" sz="1300" dirty="0"/>
           </a:p>
@@ -34478,7 +35651,7 @@
                 <a:ea typeface="Trebuchet MS" pitchFamily="34" charset="-122"/>
                 <a:cs typeface="Trebuchet MS" pitchFamily="34" charset="-120"/>
               </a:rPr>
-              <a:t>-ous</a:t>
+              <a:t>-ious</a:t>
             </a:r>
             <a:endParaRPr lang="en-US" sz="1300" dirty="0"/>
           </a:p>
@@ -34542,7 +35715,7 @@
                 <a:ea typeface="Trebuchet MS" pitchFamily="34" charset="-122"/>
                 <a:cs typeface="Trebuchet MS" pitchFamily="34" charset="-120"/>
               </a:rPr>
-              <a:t>out-</a:t>
+              <a:t>in-</a:t>
             </a:r>
             <a:endParaRPr lang="en-US" sz="1300" dirty="0"/>
           </a:p>
@@ -34631,7 +35804,7 @@
                 <a:ea typeface="Trebuchet MS" pitchFamily="34" charset="-122"/>
                 <a:cs typeface="Trebuchet MS" pitchFamily="34" charset="-120"/>
               </a:rPr>
-              <a:t>-ful</a:t>
+              <a:t>-fully</a:t>
             </a:r>
             <a:endParaRPr lang="en-US" sz="1300" dirty="0"/>
           </a:p>
@@ -34695,7 +35868,7 @@
                 <a:ea typeface="Trebuchet MS" pitchFamily="34" charset="-122"/>
                 <a:cs typeface="Trebuchet MS" pitchFamily="34" charset="-120"/>
               </a:rPr>
-              <a:t>over-</a:t>
+              <a:t>out-</a:t>
             </a:r>
             <a:endParaRPr lang="en-US" sz="1300" dirty="0"/>
           </a:p>
@@ -34784,7 +35957,7 @@
                 <a:ea typeface="Trebuchet MS" pitchFamily="34" charset="-122"/>
                 <a:cs typeface="Trebuchet MS" pitchFamily="34" charset="-120"/>
               </a:rPr>
-              <a:t>-ly</a:t>
+              <a:t>-ful</a:t>
             </a:r>
             <a:endParaRPr lang="en-US" sz="1300" dirty="0"/>
           </a:p>
@@ -34889,7 +36062,7 @@
                 <a:ea typeface="Trebuchet MS" pitchFamily="34" charset="-122"/>
                 <a:cs typeface="Trebuchet MS" pitchFamily="34" charset="-120"/>
               </a:rPr>
-              <a:t>graceful</a:t>
+              <a:t>grace</a:t>
             </a:r>
             <a:endParaRPr lang="en-US" sz="1200" dirty="0"/>
           </a:p>
@@ -34955,7 +36128,7 @@
                 <a:ea typeface="Trebuchet MS" pitchFamily="34" charset="-122"/>
                 <a:cs typeface="Trebuchet MS" pitchFamily="34" charset="-120"/>
               </a:rPr>
-              <a:t>graceless</a:t>
+              <a:t>graceful</a:t>
             </a:r>
             <a:endParaRPr lang="en-US" sz="1200" dirty="0"/>
           </a:p>
@@ -35021,7 +36194,7 @@
                 <a:ea typeface="Trebuchet MS" pitchFamily="34" charset="-122"/>
                 <a:cs typeface="Trebuchet MS" pitchFamily="34" charset="-120"/>
               </a:rPr>
-              <a:t>gracious</a:t>
+              <a:t>graceless</a:t>
             </a:r>
             <a:endParaRPr lang="en-US" sz="1200" dirty="0"/>
           </a:p>
@@ -35087,7 +36260,7 @@
                 <a:ea typeface="Trebuchet MS" pitchFamily="34" charset="-122"/>
                 <a:cs typeface="Trebuchet MS" pitchFamily="34" charset="-120"/>
               </a:rPr>
-              <a:t>disgrace</a:t>
+              <a:t>gracious</a:t>
             </a:r>
             <a:endParaRPr lang="en-US" sz="1200" dirty="0"/>
           </a:p>
@@ -35153,7 +36326,7 @@
                 <a:ea typeface="Trebuchet MS" pitchFamily="34" charset="-122"/>
                 <a:cs typeface="Trebuchet MS" pitchFamily="34" charset="-120"/>
               </a:rPr>
-              <a:t>gracefully</a:t>
+              <a:t>disgrace</a:t>
             </a:r>
             <a:endParaRPr lang="en-US" sz="1200" dirty="0"/>
           </a:p>
@@ -35219,7 +36392,7 @@
                 <a:ea typeface="Trebuchet MS" pitchFamily="34" charset="-122"/>
                 <a:cs typeface="Trebuchet MS" pitchFamily="34" charset="-120"/>
               </a:rPr>
-              <a:t>gracefulness</a:t>
+              <a:t>gracefully</a:t>
             </a:r>
             <a:endParaRPr lang="en-US" sz="1200" dirty="0"/>
           </a:p>
@@ -35285,7 +36458,7 @@
                 <a:ea typeface="Trebuchet MS" pitchFamily="34" charset="-122"/>
                 <a:cs typeface="Trebuchet MS" pitchFamily="34" charset="-120"/>
               </a:rPr>
-              <a:t>ungraceful</a:t>
+              <a:t>disgraced</a:t>
             </a:r>
             <a:endParaRPr lang="en-US" sz="1200" dirty="0"/>
           </a:p>
@@ -35351,7 +36524,7 @@
                 <a:ea typeface="Trebuchet MS" pitchFamily="34" charset="-122"/>
                 <a:cs typeface="Trebuchet MS" pitchFamily="34" charset="-120"/>
               </a:rPr>
-              <a:t>graciously</a:t>
+              <a:t>ungraceful</a:t>
             </a:r>
             <a:endParaRPr lang="en-US" sz="1200" dirty="0"/>
           </a:p>
@@ -35643,7 +36816,7 @@
                 <a:ea typeface="Calibri" pitchFamily="34" charset="-122"/>
                 <a:cs typeface="Calibri" pitchFamily="34" charset="-120"/>
               </a:rPr>
-              <a:t>Word Labs  •  wordlabs.app  •  Root: 'grace' = elegance, beauty, divine favour</a:t>
+              <a:t>Word Labs  •  wordlabs.app  •  Root: 'grace' = elegance, favour, goodwill</a:t>
             </a:r>
             <a:endParaRPr lang="en-US" sz="800" dirty="0"/>
           </a:p>
@@ -35807,7 +36980,7 @@
                 <a:ea typeface="Calibri" pitchFamily="34" charset="-122"/>
                 <a:cs typeface="Calibri" pitchFamily="34" charset="-120"/>
               </a:rPr>
-              <a:t>The core part of a word carrying its basic meaning. For example, 'grace' means 'elegance, beauty, divine favour'.</a:t>
+              <a:t>The core part of a word carrying its basic meaning. For example, 'grace' means 'elegance, favour, goodwill'.</a:t>
             </a:r>
             <a:endParaRPr lang="en-US" sz="1350" dirty="0"/>
           </a:p>
@@ -36427,7 +37600,7 @@
                 <a:ea typeface="Calibri" pitchFamily="34" charset="-122"/>
                 <a:cs typeface="Calibri" pitchFamily="34" charset="-120"/>
               </a:rPr>
-              <a:t>Word Labs  •  wordlabs.app  •  Root: 'grace' = elegance, beauty, divine favour</a:t>
+              <a:t>Word Labs  •  wordlabs.app  •  Root: 'grace' = elegance, favour, goodwill</a:t>
             </a:r>
             <a:endParaRPr lang="en-US" sz="800" dirty="0"/>
           </a:p>
@@ -36539,7 +37712,7 @@
                 <a:ea typeface="Calibri" pitchFamily="34" charset="-122"/>
                 <a:cs typeface="Calibri" pitchFamily="34" charset="-120"/>
               </a:rPr>
-              <a:t>1.  The root 'grace' comes from the Latin word 'gratia'.</a:t>
+              <a:t>1.  Adding the prefix 'dis' to 'grace' creates a word that means shame or loss of respect.</a:t>
             </a:r>
             <a:endParaRPr lang="en-US" sz="1300" dirty="0"/>
           </a:p>
@@ -36678,7 +37851,7 @@
                 <a:ea typeface="Calibri" pitchFamily="34" charset="-122"/>
                 <a:cs typeface="Calibri" pitchFamily="34" charset="-120"/>
               </a:rPr>
-              <a:t>2.  The word 'disgrace' means to show great elegance.</a:t>
+              <a:t>2.  The root 'grace' originally came from the ancient Greek word 'logos'.</a:t>
             </a:r>
             <a:endParaRPr lang="en-US" sz="1300" dirty="0"/>
           </a:p>
@@ -36817,7 +37990,7 @@
                 <a:ea typeface="Calibri" pitchFamily="34" charset="-122"/>
                 <a:cs typeface="Calibri" pitchFamily="34" charset="-120"/>
               </a:rPr>
-              <a:t>3.  A graceful dancer moves in a smooth and beautiful way.</a:t>
+              <a:t>3.  The root 'grace' can be found in words like 'gracious' and 'disgrace'.</a:t>
             </a:r>
             <a:endParaRPr lang="en-US" sz="1300" dirty="0"/>
           </a:p>
@@ -36956,7 +38129,7 @@
                 <a:ea typeface="Calibri" pitchFamily="34" charset="-122"/>
                 <a:cs typeface="Calibri" pitchFamily="34" charset="-120"/>
               </a:rPr>
-              <a:t>4.  The suffix '-ful' means full of, so 'graceful' means full of grace.</a:t>
+              <a:t>4.  The word 'graceful' means the same thing as 'graceless'.</a:t>
             </a:r>
             <a:endParaRPr lang="en-US" sz="1300" dirty="0"/>
           </a:p>
@@ -36979,11 +38152,11 @@
             </a:avLst>
           </a:prstGeom>
           <a:solidFill>
-            <a:srgbClr val="DCFCE7"/>
-          </a:solidFill>
-          <a:ln w="12700">
-            <a:solidFill>
-              <a:srgbClr val="16A34A"/>
+            <a:srgbClr val="FEE2E2"/>
+          </a:solidFill>
+          <a:ln w="12700">
+            <a:solidFill>
+              <a:srgbClr val="DC2626"/>
             </a:solidFill>
             <a:prstDash val="solid"/>
           </a:ln>
@@ -37016,13 +38189,13 @@
             <a:r>
               <a:rPr lang="en-US" sz="1100" b="1" dirty="0">
                 <a:solidFill>
-                  <a:srgbClr val="16A34A"/>
+                  <a:srgbClr val="DC2626"/>
                 </a:solidFill>
                 <a:latin typeface="Trebuchet MS" pitchFamily="34" charset="0"/>
                 <a:ea typeface="Trebuchet MS" pitchFamily="34" charset="-122"/>
                 <a:cs typeface="Trebuchet MS" pitchFamily="34" charset="-120"/>
               </a:rPr>
-              <a:t>TRUE</a:t>
+              <a:t>FALSE</a:t>
             </a:r>
             <a:endParaRPr lang="en-US" sz="1100" dirty="0"/>
           </a:p>
@@ -37095,7 +38268,7 @@
                 <a:ea typeface="Calibri" pitchFamily="34" charset="-122"/>
                 <a:cs typeface="Calibri" pitchFamily="34" charset="-120"/>
               </a:rPr>
-              <a:t>5.  The word 'gracious' contains the suffix '-less'.</a:t>
+              <a:t>5.  The root 'grace' comes from the Latin word 'gratia', meaning favour or elegance.</a:t>
             </a:r>
             <a:endParaRPr lang="en-US" sz="1300" dirty="0"/>
           </a:p>
@@ -37118,11 +38291,11 @@
             </a:avLst>
           </a:prstGeom>
           <a:solidFill>
-            <a:srgbClr val="FEE2E2"/>
-          </a:solidFill>
-          <a:ln w="12700">
-            <a:solidFill>
-              <a:srgbClr val="DC2626"/>
+            <a:srgbClr val="DCFCE7"/>
+          </a:solidFill>
+          <a:ln w="12700">
+            <a:solidFill>
+              <a:srgbClr val="16A34A"/>
             </a:solidFill>
             <a:prstDash val="solid"/>
           </a:ln>
@@ -37155,13 +38328,13 @@
             <a:r>
               <a:rPr lang="en-US" sz="1100" b="1" dirty="0">
                 <a:solidFill>
-                  <a:srgbClr val="DC2626"/>
+                  <a:srgbClr val="16A34A"/>
                 </a:solidFill>
                 <a:latin typeface="Trebuchet MS" pitchFamily="34" charset="0"/>
                 <a:ea typeface="Trebuchet MS" pitchFamily="34" charset="-122"/>
                 <a:cs typeface="Trebuchet MS" pitchFamily="34" charset="-120"/>
               </a:rPr>
-              <a:t>FALSE</a:t>
+              <a:t>TRUE</a:t>
             </a:r>
             <a:endParaRPr lang="en-US" sz="1100" dirty="0"/>
           </a:p>
@@ -37453,7 +38626,7 @@
                 <a:ea typeface="Calibri" pitchFamily="34" charset="-122"/>
                 <a:cs typeface="Calibri" pitchFamily="34" charset="-120"/>
               </a:rPr>
-              <a:t>Word Labs  •  wordlabs.app  •  Root: 'grace' = elegance, beauty, divine favour</a:t>
+              <a:t>Word Labs  •  wordlabs.app  •  Root: 'grace' = elegance, favour, goodwill</a:t>
             </a:r>
             <a:endParaRPr lang="en-US" sz="800" dirty="0"/>
           </a:p>
@@ -37590,7 +38763,7 @@
                 <a:ea typeface="Trebuchet MS" pitchFamily="34" charset="-122"/>
                 <a:cs typeface="Trebuchet MS" pitchFamily="34" charset="-120"/>
               </a:rPr>
-              <a:t>elegance, beauty, divine favour</a:t>
+              <a:t>elegance, favour, goodwill</a:t>
             </a:r>
             <a:endParaRPr lang="en-US" sz="2000" dirty="0"/>
           </a:p>
@@ -37734,7 +38907,7 @@
                 <a:ea typeface="Trebuchet MS" pitchFamily="34" charset="-122"/>
                 <a:cs typeface="Trebuchet MS" pitchFamily="34" charset="-120"/>
               </a:rPr>
-              <a:t>graceful</a:t>
+              <a:t>grace</a:t>
             </a:r>
             <a:endParaRPr lang="en-US" sz="1300" dirty="0"/>
           </a:p>
@@ -37800,7 +38973,7 @@
                 <a:ea typeface="Trebuchet MS" pitchFamily="34" charset="-122"/>
                 <a:cs typeface="Trebuchet MS" pitchFamily="34" charset="-120"/>
               </a:rPr>
-              <a:t>graceless</a:t>
+              <a:t>graceful</a:t>
             </a:r>
             <a:endParaRPr lang="en-US" sz="1300" dirty="0"/>
           </a:p>
@@ -37866,7 +39039,7 @@
                 <a:ea typeface="Trebuchet MS" pitchFamily="34" charset="-122"/>
                 <a:cs typeface="Trebuchet MS" pitchFamily="34" charset="-120"/>
               </a:rPr>
-              <a:t>gracious</a:t>
+              <a:t>graceless</a:t>
             </a:r>
             <a:endParaRPr lang="en-US" sz="1300" dirty="0"/>
           </a:p>
@@ -37932,7 +39105,7 @@
                 <a:ea typeface="Trebuchet MS" pitchFamily="34" charset="-122"/>
                 <a:cs typeface="Trebuchet MS" pitchFamily="34" charset="-120"/>
               </a:rPr>
-              <a:t>disgrace</a:t>
+              <a:t>gracious</a:t>
             </a:r>
             <a:endParaRPr lang="en-US" sz="1300" dirty="0"/>
           </a:p>
@@ -37998,7 +39171,7 @@
                 <a:ea typeface="Trebuchet MS" pitchFamily="34" charset="-122"/>
                 <a:cs typeface="Trebuchet MS" pitchFamily="34" charset="-120"/>
               </a:rPr>
-              <a:t>gracefully</a:t>
+              <a:t>disgrace</a:t>
             </a:r>
             <a:endParaRPr lang="en-US" sz="1300" dirty="0"/>
           </a:p>
@@ -38064,7 +39237,7 @@
                 <a:ea typeface="Trebuchet MS" pitchFamily="34" charset="-122"/>
                 <a:cs typeface="Trebuchet MS" pitchFamily="34" charset="-120"/>
               </a:rPr>
-              <a:t>gracefulness</a:t>
+              <a:t>gracefully</a:t>
             </a:r>
             <a:endParaRPr lang="en-US" sz="1300" dirty="0"/>
           </a:p>
@@ -38130,7 +39303,7 @@
                 <a:ea typeface="Trebuchet MS" pitchFamily="34" charset="-122"/>
                 <a:cs typeface="Trebuchet MS" pitchFamily="34" charset="-120"/>
               </a:rPr>
-              <a:t>ungraceful</a:t>
+              <a:t>disgraced</a:t>
             </a:r>
             <a:endParaRPr lang="en-US" sz="1300" dirty="0"/>
           </a:p>
@@ -38422,7 +39595,7 @@
                 <a:ea typeface="Calibri" pitchFamily="34" charset="-122"/>
                 <a:cs typeface="Calibri" pitchFamily="34" charset="-120"/>
               </a:rPr>
-              <a:t>Word Labs  •  wordlabs.app  •  Root: 'grace' = elegance, beauty, divine favour</a:t>
+              <a:t>Word Labs  •  wordlabs.app  •  Root: 'grace' = elegance, favour, goodwill</a:t>
             </a:r>
             <a:endParaRPr lang="en-US" sz="800" dirty="0"/>
           </a:p>
@@ -39068,7 +40241,7 @@
                 <a:ea typeface="Trebuchet MS" pitchFamily="34" charset="-122"/>
                 <a:cs typeface="Trebuchet MS" pitchFamily="34" charset="-120"/>
               </a:rPr>
-              <a:t>in-</a:t>
+              <a:t>re-</a:t>
             </a:r>
             <a:endParaRPr lang="en-US" sz="1300" dirty="0"/>
           </a:p>
@@ -39157,7 +40330,7 @@
                 <a:ea typeface="Trebuchet MS" pitchFamily="34" charset="-122"/>
                 <a:cs typeface="Trebuchet MS" pitchFamily="34" charset="-120"/>
               </a:rPr>
-              <a:t>-ous</a:t>
+              <a:t>-ious</a:t>
             </a:r>
             <a:endParaRPr lang="en-US" sz="1300" dirty="0"/>
           </a:p>
@@ -39221,7 +40394,7 @@
                 <a:ea typeface="Trebuchet MS" pitchFamily="34" charset="-122"/>
                 <a:cs typeface="Trebuchet MS" pitchFamily="34" charset="-120"/>
               </a:rPr>
-              <a:t>out-</a:t>
+              <a:t>in-</a:t>
             </a:r>
             <a:endParaRPr lang="en-US" sz="1300" dirty="0"/>
           </a:p>
@@ -39310,7 +40483,7 @@
                 <a:ea typeface="Trebuchet MS" pitchFamily="34" charset="-122"/>
                 <a:cs typeface="Trebuchet MS" pitchFamily="34" charset="-120"/>
               </a:rPr>
-              <a:t>-ful</a:t>
+              <a:t>-fully</a:t>
             </a:r>
             <a:endParaRPr lang="en-US" sz="1300" dirty="0"/>
           </a:p>
@@ -39374,7 +40547,7 @@
                 <a:ea typeface="Trebuchet MS" pitchFamily="34" charset="-122"/>
                 <a:cs typeface="Trebuchet MS" pitchFamily="34" charset="-120"/>
               </a:rPr>
-              <a:t>over-</a:t>
+              <a:t>out-</a:t>
             </a:r>
             <a:endParaRPr lang="en-US" sz="1300" dirty="0"/>
           </a:p>
@@ -39463,7 +40636,7 @@
                 <a:ea typeface="Trebuchet MS" pitchFamily="34" charset="-122"/>
                 <a:cs typeface="Trebuchet MS" pitchFamily="34" charset="-120"/>
               </a:rPr>
-              <a:t>-ly</a:t>
+              <a:t>-ful</a:t>
             </a:r>
             <a:endParaRPr lang="en-US" sz="1300" dirty="0"/>
           </a:p>
@@ -39904,7 +41077,7 @@
                 <a:ea typeface="Trebuchet MS" pitchFamily="34" charset="-122"/>
                 <a:cs typeface="Trebuchet MS" pitchFamily="34" charset="-120"/>
               </a:rPr>
-              <a:t>graceful</a:t>
+              <a:t>grace</a:t>
             </a:r>
             <a:endParaRPr lang="en-US" sz="1400" dirty="0"/>
           </a:p>
@@ -40196,7 +41369,7 @@
                 <a:ea typeface="Calibri" pitchFamily="34" charset="-122"/>
                 <a:cs typeface="Calibri" pitchFamily="34" charset="-120"/>
               </a:rPr>
-              <a:t>Word Labs  •  wordlabs.app  •  Root: 'grace' = elegance, beauty, divine favour</a:t>
+              <a:t>Word Labs  •  wordlabs.app  •  Root: 'grace' = elegance, favour, goodwill</a:t>
             </a:r>
             <a:endParaRPr lang="en-US" sz="800" dirty="0"/>
           </a:p>
@@ -40308,7 +41481,7 @@
                 <a:ea typeface="Trebuchet MS" pitchFamily="34" charset="-122"/>
                 <a:cs typeface="Trebuchet MS" pitchFamily="34" charset="-120"/>
               </a:rPr>
-              <a:t>graceful</a:t>
+              <a:t>grace</a:t>
             </a:r>
             <a:endParaRPr lang="en-US" sz="1200" dirty="0"/>
           </a:p>
@@ -40374,7 +41547,7 @@
                 <a:ea typeface="Calibri" pitchFamily="34" charset="-122"/>
                 <a:cs typeface="Calibri" pitchFamily="34" charset="-120"/>
               </a:rPr>
-              <a:t>Not moving or behaving in a smooth or elegant way.</a:t>
+              <a:t>When a person has lost the respect of others because of bad behaviour.</a:t>
             </a:r>
             <a:endParaRPr lang="en-US" sz="1200" dirty="0"/>
           </a:p>
@@ -40447,7 +41620,7 @@
                 <a:ea typeface="Trebuchet MS" pitchFamily="34" charset="-122"/>
                 <a:cs typeface="Trebuchet MS" pitchFamily="34" charset="-120"/>
               </a:rPr>
-              <a:t>graceless</a:t>
+              <a:t>graceful</a:t>
             </a:r>
             <a:endParaRPr lang="en-US" sz="1200" dirty="0"/>
           </a:p>
@@ -40513,7 +41686,7 @@
                 <a:ea typeface="Calibri" pitchFamily="34" charset="-122"/>
                 <a:cs typeface="Calibri" pitchFamily="34" charset="-120"/>
               </a:rPr>
-              <a:t>Being very kind, polite, and generous to others.</a:t>
+              <a:t>Moving or behaving in a clumsy or rude way, without any elegance.</a:t>
             </a:r>
             <a:endParaRPr lang="en-US" sz="1200" dirty="0"/>
           </a:p>
@@ -40586,7 +41759,7 @@
                 <a:ea typeface="Trebuchet MS" pitchFamily="34" charset="-122"/>
                 <a:cs typeface="Trebuchet MS" pitchFamily="34" charset="-120"/>
               </a:rPr>
-              <a:t>gracious</a:t>
+              <a:t>graceless</a:t>
             </a:r>
             <a:endParaRPr lang="en-US" sz="1200" dirty="0"/>
           </a:p>
@@ -40652,7 +41825,7 @@
                 <a:ea typeface="Calibri" pitchFamily="34" charset="-122"/>
                 <a:cs typeface="Calibri" pitchFamily="34" charset="-120"/>
               </a:rPr>
-              <a:t>Doing something in a smooth and beautiful way.</a:t>
+              <a:t>When someone does something very wrong or embarrassing that brings shame.</a:t>
             </a:r>
             <a:endParaRPr lang="en-US" sz="1200" dirty="0"/>
           </a:p>
@@ -40725,7 +41898,7 @@
                 <a:ea typeface="Trebuchet MS" pitchFamily="34" charset="-122"/>
                 <a:cs typeface="Trebuchet MS" pitchFamily="34" charset="-120"/>
               </a:rPr>
-              <a:t>disgrace</a:t>
+              <a:t>gracious</a:t>
             </a:r>
             <a:endParaRPr lang="en-US" sz="1200" dirty="0"/>
           </a:p>
@@ -40791,7 +41964,7 @@
                 <a:ea typeface="Calibri" pitchFamily="34" charset="-122"/>
                 <a:cs typeface="Calibri" pitchFamily="34" charset="-120"/>
               </a:rPr>
-              <a:t>The quality of being elegant and smooth in movement or manner.</a:t>
+              <a:t>Doing something in a smooth, beautiful, and elegant way.</a:t>
             </a:r>
             <a:endParaRPr lang="en-US" sz="1200" dirty="0"/>
           </a:p>
@@ -40864,7 +42037,7 @@
                 <a:ea typeface="Trebuchet MS" pitchFamily="34" charset="-122"/>
                 <a:cs typeface="Trebuchet MS" pitchFamily="34" charset="-120"/>
               </a:rPr>
-              <a:t>gracefully</a:t>
+              <a:t>disgrace</a:t>
             </a:r>
             <a:endParaRPr lang="en-US" sz="1200" dirty="0"/>
           </a:p>
@@ -40930,7 +42103,7 @@
                 <a:ea typeface="Calibri" pitchFamily="34" charset="-122"/>
                 <a:cs typeface="Calibri" pitchFamily="34" charset="-120"/>
               </a:rPr>
-              <a:t>When someone has done something that makes others feel ashamed or disappointed.</a:t>
+              <a:t>Being very kind, polite, and pleasant to other people.</a:t>
             </a:r>
             <a:endParaRPr lang="en-US" sz="1200" dirty="0"/>
           </a:p>
@@ -41003,7 +42176,7 @@
                 <a:ea typeface="Trebuchet MS" pitchFamily="34" charset="-122"/>
                 <a:cs typeface="Trebuchet MS" pitchFamily="34" charset="-120"/>
               </a:rPr>
-              <a:t>gracefulness</a:t>
+              <a:t>gracefully</a:t>
             </a:r>
             <a:endParaRPr lang="en-US" sz="1200" dirty="0"/>
           </a:p>
@@ -41069,7 +42242,7 @@
                 <a:ea typeface="Calibri" pitchFamily="34" charset="-122"/>
                 <a:cs typeface="Calibri" pitchFamily="34" charset="-120"/>
               </a:rPr>
-              <a:t>Moving in a smooth, beautiful way, like a dancer.</a:t>
+              <a:t>A smooth, beautiful way of moving or behaving that is pleasing to watch.</a:t>
             </a:r>
             <a:endParaRPr lang="en-US" sz="1200" dirty="0"/>
           </a:p>
@@ -41142,7 +42315,7 @@
                 <a:ea typeface="Trebuchet MS" pitchFamily="34" charset="-122"/>
                 <a:cs typeface="Trebuchet MS" pitchFamily="34" charset="-120"/>
               </a:rPr>
-              <a:t>ungraceful</a:t>
+              <a:t>disgraced</a:t>
             </a:r>
             <a:endParaRPr lang="en-US" sz="1200" dirty="0"/>
           </a:p>
@@ -41208,7 +42381,7 @@
                 <a:ea typeface="Calibri" pitchFamily="34" charset="-122"/>
                 <a:cs typeface="Calibri" pitchFamily="34" charset="-120"/>
               </a:rPr>
-              <a:t>Moving in a clumsy or awkward way, without elegance.</a:t>
+              <a:t>Moving in a smooth and beautiful way, like a dancer or a swan.</a:t>
             </a:r>
             <a:endParaRPr lang="en-US" sz="1200" dirty="0"/>
           </a:p>
@@ -41500,7 +42673,7 @@
                 <a:ea typeface="Calibri" pitchFamily="34" charset="-122"/>
                 <a:cs typeface="Calibri" pitchFamily="34" charset="-120"/>
               </a:rPr>
-              <a:t>Word Labs  •  wordlabs.app  •  Root: 'grace' = elegance, beauty, divine favour</a:t>
+              <a:t>Word Labs  •  wordlabs.app  •  Root: 'grace' = elegance, favour, goodwill</a:t>
             </a:r>
             <a:endParaRPr lang="en-US" sz="800" dirty="0"/>
           </a:p>
@@ -41703,7 +42876,7 @@
                 <a:ea typeface="Calibri" pitchFamily="34" charset="-122"/>
                 <a:cs typeface="Calibri" pitchFamily="34" charset="-120"/>
               </a:rPr>
-              <a:t>The ballet dancer moved gracefully across the stage, making every step look effortless.</a:t>
+              <a:t>The ballet dancer moved with such grace that the whole audience was amazed.</a:t>
             </a:r>
             <a:endParaRPr lang="en-US" sz="1500" dirty="0"/>
           </a:p>
@@ -41867,7 +43040,7 @@
                 <a:ea typeface="Calibri" pitchFamily="34" charset="-122"/>
                 <a:cs typeface="Calibri" pitchFamily="34" charset="-120"/>
               </a:rPr>
-              <a:t>It was a disgrace that someone had scribbled graffiti all over the new school mural.</a:t>
+              <a:t>It was disgraceful behaviour to leave the classroom without asking permission.</a:t>
             </a:r>
             <a:endParaRPr lang="en-US" sz="1500" dirty="0"/>
           </a:p>
@@ -42031,7 +43204,7 @@
                 <a:ea typeface="Calibri" pitchFamily="34" charset="-122"/>
                 <a:cs typeface="Calibri" pitchFamily="34" charset="-120"/>
               </a:rPr>
-              <a:t>The gracious host welcomed every guest with a warm smile and kind words.</a:t>
+              <a:t>She gracefully caught the ball and passed it to her teammate without missing a step.</a:t>
             </a:r>
             <a:endParaRPr lang="en-US" sz="1500" dirty="0"/>
           </a:p>
